--- a/Kiszállítás és Ételrendező Rendszer.pptx
+++ b/Kiszállítás és Ételrendező Rendszer.pptx
@@ -8,6 +8,13 @@
     <p:sldId id="256" r:id="rId2"/>
     <p:sldId id="258" r:id="rId3"/>
     <p:sldId id="257" r:id="rId4"/>
+    <p:sldId id="259" r:id="rId5"/>
+    <p:sldId id="260" r:id="rId6"/>
+    <p:sldId id="261" r:id="rId7"/>
+    <p:sldId id="262" r:id="rId8"/>
+    <p:sldId id="263" r:id="rId9"/>
+    <p:sldId id="264" r:id="rId10"/>
+    <p:sldId id="265" r:id="rId11"/>
   </p:sldIdLst>
   <p:sldSz cx="12192000" cy="6858000"/>
   <p:notesSz cx="6858000" cy="9144000"/>
@@ -106,7 +113,933 @@
       </a:defRPr>
     </a:lvl9pPr>
   </p:defaultTextStyle>
+  <p:extLst>
+    <p:ext uri="{EFAFB233-063F-42B5-8137-9DF3F51BA10A}">
+      <p15:sldGuideLst xmlns:p15="http://schemas.microsoft.com/office/powerpoint/2012/main"/>
+    </p:ext>
+  </p:extLst>
 </p:presentation>
+</file>
+
+<file path=ppt/charts/chart1.xml><?xml version="1.0" encoding="utf-8"?>
+<c:chartSpace xmlns:c="http://schemas.openxmlformats.org/drawingml/2006/chart" xmlns:a="http://schemas.openxmlformats.org/drawingml/2006/main" xmlns:r="http://schemas.openxmlformats.org/officeDocument/2006/relationships" xmlns:c16r2="http://schemas.microsoft.com/office/drawing/2015/06/chart">
+  <c:date1904 val="0"/>
+  <c:lang val="en-US"/>
+  <c:roundedCorners val="1"/>
+  <mc:AlternateContent xmlns:mc="http://schemas.openxmlformats.org/markup-compatibility/2006">
+    <mc:Choice xmlns:c14="http://schemas.microsoft.com/office/drawing/2007/8/2/chart" Requires="c14">
+      <c14:style val="102"/>
+    </mc:Choice>
+    <mc:Fallback>
+      <c:style val="2"/>
+    </mc:Fallback>
+  </mc:AlternateContent>
+  <c:chart>
+    <c:autoTitleDeleted val="1"/>
+    <c:plotArea>
+      <c:layout>
+        <c:manualLayout>
+          <c:layoutTarget val="inner"/>
+          <c:xMode val="edge"/>
+          <c:yMode val="edge"/>
+          <c:x val="9.7707367066296222E-2"/>
+          <c:y val="5.5361230627176142E-2"/>
+          <c:w val="0.88096436890377605"/>
+          <c:h val="0.78418108569340039"/>
+        </c:manualLayout>
+      </c:layout>
+      <c:lineChart>
+        <c:grouping val="standard"/>
+        <c:varyColors val="0"/>
+        <c:ser>
+          <c:idx val="0"/>
+          <c:order val="0"/>
+          <c:tx>
+            <c:strRef>
+              <c:f>Sheet1!$B$1</c:f>
+              <c:strCache>
+                <c:ptCount val="1"/>
+                <c:pt idx="0">
+                  <c:v>Tihamér</c:v>
+                </c:pt>
+              </c:strCache>
+            </c:strRef>
+          </c:tx>
+          <c:spPr>
+            <a:ln w="28575" cap="rnd">
+              <a:solidFill>
+                <a:srgbClr val="296075"/>
+              </a:solidFill>
+              <a:round/>
+            </a:ln>
+            <a:effectLst/>
+          </c:spPr>
+          <c:marker>
+            <c:symbol val="none"/>
+          </c:marker>
+          <c:cat>
+            <c:strRef>
+              <c:f>Sheet1!$A$2:$A$4</c:f>
+              <c:strCache>
+                <c:ptCount val="3"/>
+                <c:pt idx="0">
+                  <c:v>1. Hét</c:v>
+                </c:pt>
+                <c:pt idx="1">
+                  <c:v>2. Hét</c:v>
+                </c:pt>
+                <c:pt idx="2">
+                  <c:v>3. Hét</c:v>
+                </c:pt>
+              </c:strCache>
+            </c:strRef>
+          </c:cat>
+          <c:val>
+            <c:numRef>
+              <c:f>Sheet1!$B$2:$B$4</c:f>
+              <c:numCache>
+                <c:formatCode>General</c:formatCode>
+                <c:ptCount val="3"/>
+                <c:pt idx="0">
+                  <c:v>2.2000000000000002</c:v>
+                </c:pt>
+                <c:pt idx="1">
+                  <c:v>1.1000000000000001</c:v>
+                </c:pt>
+                <c:pt idx="2">
+                  <c:v>1.9</c:v>
+                </c:pt>
+              </c:numCache>
+            </c:numRef>
+          </c:val>
+          <c:smooth val="0"/>
+          <c:extLst>
+            <c:ext xmlns:c16="http://schemas.microsoft.com/office/drawing/2014/chart" uri="{C3380CC4-5D6E-409C-BE32-E72D297353CC}">
+              <c16:uniqueId val="{00000000-89DA-4E6B-AE1A-DEAF980F2E75}"/>
+            </c:ext>
+          </c:extLst>
+        </c:ser>
+        <c:ser>
+          <c:idx val="1"/>
+          <c:order val="1"/>
+          <c:tx>
+            <c:strRef>
+              <c:f>Sheet1!$C$1</c:f>
+              <c:strCache>
+                <c:ptCount val="1"/>
+                <c:pt idx="0">
+                  <c:v>Levente</c:v>
+                </c:pt>
+              </c:strCache>
+            </c:strRef>
+          </c:tx>
+          <c:spPr>
+            <a:ln w="28575" cap="rnd">
+              <a:solidFill>
+                <a:srgbClr val="57C785"/>
+              </a:solidFill>
+              <a:round/>
+            </a:ln>
+            <a:effectLst/>
+          </c:spPr>
+          <c:marker>
+            <c:symbol val="none"/>
+          </c:marker>
+          <c:cat>
+            <c:strRef>
+              <c:f>Sheet1!$A$2:$A$4</c:f>
+              <c:strCache>
+                <c:ptCount val="3"/>
+                <c:pt idx="0">
+                  <c:v>1. Hét</c:v>
+                </c:pt>
+                <c:pt idx="1">
+                  <c:v>2. Hét</c:v>
+                </c:pt>
+                <c:pt idx="2">
+                  <c:v>3. Hét</c:v>
+                </c:pt>
+              </c:strCache>
+            </c:strRef>
+          </c:cat>
+          <c:val>
+            <c:numRef>
+              <c:f>Sheet1!$C$2:$C$4</c:f>
+              <c:numCache>
+                <c:formatCode>General</c:formatCode>
+                <c:ptCount val="3"/>
+                <c:pt idx="0">
+                  <c:v>0.4</c:v>
+                </c:pt>
+                <c:pt idx="1">
+                  <c:v>2.4</c:v>
+                </c:pt>
+                <c:pt idx="2">
+                  <c:v>2</c:v>
+                </c:pt>
+              </c:numCache>
+            </c:numRef>
+          </c:val>
+          <c:smooth val="0"/>
+          <c:extLst>
+            <c:ext xmlns:c16="http://schemas.microsoft.com/office/drawing/2014/chart" uri="{C3380CC4-5D6E-409C-BE32-E72D297353CC}">
+              <c16:uniqueId val="{00000001-89DA-4E6B-AE1A-DEAF980F2E75}"/>
+            </c:ext>
+          </c:extLst>
+        </c:ser>
+        <c:dLbls>
+          <c:showLegendKey val="0"/>
+          <c:showVal val="0"/>
+          <c:showCatName val="0"/>
+          <c:showSerName val="0"/>
+          <c:showPercent val="0"/>
+          <c:showBubbleSize val="0"/>
+        </c:dLbls>
+        <c:smooth val="0"/>
+        <c:axId val="883931199"/>
+        <c:axId val="646720816"/>
+      </c:lineChart>
+      <c:catAx>
+        <c:axId val="883931199"/>
+        <c:scaling>
+          <c:orientation val="minMax"/>
+        </c:scaling>
+        <c:delete val="0"/>
+        <c:axPos val="b"/>
+        <c:numFmt formatCode="General" sourceLinked="1"/>
+        <c:majorTickMark val="none"/>
+        <c:minorTickMark val="none"/>
+        <c:tickLblPos val="nextTo"/>
+        <c:spPr>
+          <a:noFill/>
+          <a:ln w="9525" cap="flat" cmpd="sng" algn="ctr">
+            <a:solidFill>
+              <a:schemeClr val="tx1">
+                <a:lumMod val="15000"/>
+                <a:lumOff val="85000"/>
+              </a:schemeClr>
+            </a:solidFill>
+            <a:round/>
+          </a:ln>
+          <a:effectLst/>
+        </c:spPr>
+        <c:txPr>
+          <a:bodyPr rot="-60000000" spcFirstLastPara="1" vertOverflow="ellipsis" vert="horz" wrap="square" anchor="ctr" anchorCtr="1"/>
+          <a:lstStyle/>
+          <a:p>
+            <a:pPr>
+              <a:defRPr sz="1197" b="0" i="0" u="none" strike="noStrike" kern="1200" baseline="0">
+                <a:solidFill>
+                  <a:schemeClr val="tx1">
+                    <a:lumMod val="65000"/>
+                    <a:lumOff val="35000"/>
+                  </a:schemeClr>
+                </a:solidFill>
+                <a:latin typeface="+mn-lt"/>
+                <a:ea typeface="+mn-ea"/>
+                <a:cs typeface="+mn-cs"/>
+              </a:defRPr>
+            </a:pPr>
+            <a:endParaRPr lang="hu-HU"/>
+          </a:p>
+        </c:txPr>
+        <c:crossAx val="646720816"/>
+        <c:crosses val="autoZero"/>
+        <c:auto val="1"/>
+        <c:lblAlgn val="ctr"/>
+        <c:lblOffset val="100"/>
+        <c:noMultiLvlLbl val="0"/>
+      </c:catAx>
+      <c:valAx>
+        <c:axId val="646720816"/>
+        <c:scaling>
+          <c:orientation val="minMax"/>
+        </c:scaling>
+        <c:delete val="0"/>
+        <c:axPos val="l"/>
+        <c:majorGridlines>
+          <c:spPr>
+            <a:ln w="9525" cap="flat" cmpd="sng" algn="ctr">
+              <a:solidFill>
+                <a:schemeClr val="tx1">
+                  <a:lumMod val="15000"/>
+                  <a:lumOff val="85000"/>
+                </a:schemeClr>
+              </a:solidFill>
+              <a:round/>
+            </a:ln>
+            <a:effectLst/>
+          </c:spPr>
+        </c:majorGridlines>
+        <c:numFmt formatCode="General" sourceLinked="1"/>
+        <c:majorTickMark val="none"/>
+        <c:minorTickMark val="none"/>
+        <c:tickLblPos val="nextTo"/>
+        <c:spPr>
+          <a:noFill/>
+          <a:ln>
+            <a:noFill/>
+          </a:ln>
+          <a:effectLst/>
+        </c:spPr>
+        <c:txPr>
+          <a:bodyPr rot="-60000000" spcFirstLastPara="1" vertOverflow="ellipsis" vert="horz" wrap="square" anchor="ctr" anchorCtr="1"/>
+          <a:lstStyle/>
+          <a:p>
+            <a:pPr>
+              <a:defRPr sz="1197" b="0" i="0" u="none" strike="noStrike" kern="1200" baseline="0">
+                <a:solidFill>
+                  <a:schemeClr val="tx1">
+                    <a:lumMod val="65000"/>
+                    <a:lumOff val="35000"/>
+                  </a:schemeClr>
+                </a:solidFill>
+                <a:latin typeface="+mn-lt"/>
+                <a:ea typeface="+mn-ea"/>
+                <a:cs typeface="+mn-cs"/>
+              </a:defRPr>
+            </a:pPr>
+            <a:endParaRPr lang="hu-HU"/>
+          </a:p>
+        </c:txPr>
+        <c:crossAx val="883931199"/>
+        <c:crosses val="autoZero"/>
+        <c:crossBetween val="between"/>
+      </c:valAx>
+      <c:spPr>
+        <a:noFill/>
+        <a:ln>
+          <a:noFill/>
+        </a:ln>
+        <a:effectLst/>
+      </c:spPr>
+    </c:plotArea>
+    <c:legend>
+      <c:legendPos val="b"/>
+      <c:overlay val="0"/>
+      <c:spPr>
+        <a:noFill/>
+        <a:ln>
+          <a:noFill/>
+        </a:ln>
+        <a:effectLst/>
+      </c:spPr>
+      <c:txPr>
+        <a:bodyPr rot="0" spcFirstLastPara="1" vertOverflow="ellipsis" vert="horz" wrap="square" anchor="ctr" anchorCtr="1"/>
+        <a:lstStyle/>
+        <a:p>
+          <a:pPr>
+            <a:defRPr sz="1197" b="0" i="0" u="none" strike="noStrike" kern="1200" baseline="0">
+              <a:solidFill>
+                <a:schemeClr val="tx1">
+                  <a:lumMod val="65000"/>
+                  <a:lumOff val="35000"/>
+                </a:schemeClr>
+              </a:solidFill>
+              <a:latin typeface="+mn-lt"/>
+              <a:ea typeface="+mn-ea"/>
+              <a:cs typeface="+mn-cs"/>
+            </a:defRPr>
+          </a:pPr>
+          <a:endParaRPr lang="hu-HU"/>
+        </a:p>
+      </c:txPr>
+    </c:legend>
+    <c:plotVisOnly val="1"/>
+    <c:dispBlanksAs val="gap"/>
+    <c:showDLblsOverMax val="0"/>
+    <c:extLst>
+      <c:ext xmlns:c16r3="http://schemas.microsoft.com/office/drawing/2017/03/chart" uri="{56B9EC1D-385E-4148-901F-78D8002777C0}">
+        <c16r3:dataDisplayOptions16>
+          <c16r3:dispNaAsBlank val="1"/>
+        </c16r3:dataDisplayOptions16>
+      </c:ext>
+    </c:extLst>
+  </c:chart>
+  <c:spPr>
+    <a:solidFill>
+      <a:schemeClr val="bg2">
+        <a:lumMod val="75000"/>
+        <a:alpha val="80000"/>
+      </a:schemeClr>
+    </a:solidFill>
+    <a:ln>
+      <a:solidFill>
+        <a:schemeClr val="bg1"/>
+      </a:solidFill>
+    </a:ln>
+    <a:effectLst/>
+  </c:spPr>
+  <c:txPr>
+    <a:bodyPr/>
+    <a:lstStyle/>
+    <a:p>
+      <a:pPr>
+        <a:defRPr/>
+      </a:pPr>
+      <a:endParaRPr lang="hu-HU"/>
+    </a:p>
+  </c:txPr>
+  <c:externalData r:id="rId3">
+    <c:autoUpdate val="0"/>
+  </c:externalData>
+</c:chartSpace>
+</file>
+
+<file path=ppt/charts/colors1.xml><?xml version="1.0" encoding="utf-8"?>
+<cs:colorStyle xmlns:cs="http://schemas.microsoft.com/office/drawing/2012/chartStyle" xmlns:a="http://schemas.openxmlformats.org/drawingml/2006/main" meth="cycle" id="10">
+  <a:schemeClr val="accent1"/>
+  <a:schemeClr val="accent2"/>
+  <a:schemeClr val="accent3"/>
+  <a:schemeClr val="accent4"/>
+  <a:schemeClr val="accent5"/>
+  <a:schemeClr val="accent6"/>
+  <cs:variation/>
+  <cs:variation>
+    <a:lumMod val="60000"/>
+  </cs:variation>
+  <cs:variation>
+    <a:lumMod val="80000"/>
+    <a:lumOff val="20000"/>
+  </cs:variation>
+  <cs:variation>
+    <a:lumMod val="80000"/>
+  </cs:variation>
+  <cs:variation>
+    <a:lumMod val="60000"/>
+    <a:lumOff val="40000"/>
+  </cs:variation>
+  <cs:variation>
+    <a:lumMod val="50000"/>
+  </cs:variation>
+  <cs:variation>
+    <a:lumMod val="70000"/>
+    <a:lumOff val="30000"/>
+  </cs:variation>
+  <cs:variation>
+    <a:lumMod val="70000"/>
+  </cs:variation>
+  <cs:variation>
+    <a:lumMod val="50000"/>
+    <a:lumOff val="50000"/>
+  </cs:variation>
+</cs:colorStyle>
+</file>
+
+<file path=ppt/charts/style1.xml><?xml version="1.0" encoding="utf-8"?>
+<cs:chartStyle xmlns:cs="http://schemas.microsoft.com/office/drawing/2012/chartStyle" xmlns:a="http://schemas.openxmlformats.org/drawingml/2006/main" id="227">
+  <cs:axisTitle>
+    <cs:lnRef idx="0"/>
+    <cs:fillRef idx="0"/>
+    <cs:effectRef idx="0"/>
+    <cs:fontRef idx="minor">
+      <a:schemeClr val="tx1">
+        <a:lumMod val="65000"/>
+        <a:lumOff val="35000"/>
+      </a:schemeClr>
+    </cs:fontRef>
+    <cs:defRPr sz="1330" kern="1200"/>
+  </cs:axisTitle>
+  <cs:categoryAxis>
+    <cs:lnRef idx="0"/>
+    <cs:fillRef idx="0"/>
+    <cs:effectRef idx="0"/>
+    <cs:fontRef idx="minor">
+      <a:schemeClr val="tx1">
+        <a:lumMod val="65000"/>
+        <a:lumOff val="35000"/>
+      </a:schemeClr>
+    </cs:fontRef>
+    <cs:spPr>
+      <a:ln w="9525" cap="flat" cmpd="sng" algn="ctr">
+        <a:solidFill>
+          <a:schemeClr val="tx1">
+            <a:lumMod val="15000"/>
+            <a:lumOff val="85000"/>
+          </a:schemeClr>
+        </a:solidFill>
+        <a:round/>
+      </a:ln>
+    </cs:spPr>
+    <cs:defRPr sz="1197" kern="1200"/>
+  </cs:categoryAxis>
+  <cs:chartArea mods="allowNoFillOverride allowNoLineOverride">
+    <cs:lnRef idx="0"/>
+    <cs:fillRef idx="0"/>
+    <cs:effectRef idx="0"/>
+    <cs:fontRef idx="minor">
+      <a:schemeClr val="tx1"/>
+    </cs:fontRef>
+    <cs:spPr>
+      <a:solidFill>
+        <a:schemeClr val="bg1"/>
+      </a:solidFill>
+      <a:ln w="9525" cap="flat" cmpd="sng" algn="ctr">
+        <a:solidFill>
+          <a:schemeClr val="tx1">
+            <a:lumMod val="15000"/>
+            <a:lumOff val="85000"/>
+          </a:schemeClr>
+        </a:solidFill>
+        <a:round/>
+      </a:ln>
+    </cs:spPr>
+    <cs:defRPr sz="1330" kern="1200"/>
+  </cs:chartArea>
+  <cs:dataLabel>
+    <cs:lnRef idx="0"/>
+    <cs:fillRef idx="0"/>
+    <cs:effectRef idx="0"/>
+    <cs:fontRef idx="minor">
+      <a:schemeClr val="tx1">
+        <a:lumMod val="75000"/>
+        <a:lumOff val="25000"/>
+      </a:schemeClr>
+    </cs:fontRef>
+    <cs:defRPr sz="1197" kern="1200"/>
+  </cs:dataLabel>
+  <cs:dataLabelCallout>
+    <cs:lnRef idx="0"/>
+    <cs:fillRef idx="0"/>
+    <cs:effectRef idx="0"/>
+    <cs:fontRef idx="minor">
+      <a:schemeClr val="dk1">
+        <a:lumMod val="65000"/>
+        <a:lumOff val="35000"/>
+      </a:schemeClr>
+    </cs:fontRef>
+    <cs:spPr>
+      <a:solidFill>
+        <a:schemeClr val="lt1"/>
+      </a:solidFill>
+      <a:ln>
+        <a:solidFill>
+          <a:schemeClr val="dk1">
+            <a:lumMod val="25000"/>
+            <a:lumOff val="75000"/>
+          </a:schemeClr>
+        </a:solidFill>
+      </a:ln>
+    </cs:spPr>
+    <cs:defRPr sz="1197" kern="1200"/>
+    <cs:bodyPr rot="0" spcFirstLastPara="1" vertOverflow="clip" horzOverflow="clip" vert="horz" wrap="square" lIns="36576" tIns="18288" rIns="36576" bIns="18288" anchor="ctr" anchorCtr="1">
+      <a:spAutoFit/>
+    </cs:bodyPr>
+  </cs:dataLabelCallout>
+  <cs:dataPoint>
+    <cs:lnRef idx="0"/>
+    <cs:fillRef idx="1">
+      <cs:styleClr val="auto"/>
+    </cs:fillRef>
+    <cs:effectRef idx="0"/>
+    <cs:fontRef idx="minor">
+      <a:schemeClr val="tx1"/>
+    </cs:fontRef>
+    <cs:spPr>
+      <a:solidFill>
+        <a:schemeClr val="phClr"/>
+      </a:solidFill>
+    </cs:spPr>
+  </cs:dataPoint>
+  <cs:dataPoint3D>
+    <cs:lnRef idx="0"/>
+    <cs:fillRef idx="1">
+      <cs:styleClr val="auto"/>
+    </cs:fillRef>
+    <cs:effectRef idx="0"/>
+    <cs:fontRef idx="minor">
+      <a:schemeClr val="tx1"/>
+    </cs:fontRef>
+    <cs:spPr>
+      <a:solidFill>
+        <a:schemeClr val="phClr"/>
+      </a:solidFill>
+    </cs:spPr>
+  </cs:dataPoint3D>
+  <cs:dataPointLine>
+    <cs:lnRef idx="0">
+      <cs:styleClr val="auto"/>
+    </cs:lnRef>
+    <cs:fillRef idx="1"/>
+    <cs:effectRef idx="0"/>
+    <cs:fontRef idx="minor">
+      <a:schemeClr val="tx1"/>
+    </cs:fontRef>
+    <cs:spPr>
+      <a:ln w="28575" cap="rnd">
+        <a:solidFill>
+          <a:schemeClr val="phClr"/>
+        </a:solidFill>
+        <a:round/>
+      </a:ln>
+    </cs:spPr>
+  </cs:dataPointLine>
+  <cs:dataPointMarker>
+    <cs:lnRef idx="0">
+      <cs:styleClr val="auto"/>
+    </cs:lnRef>
+    <cs:fillRef idx="1">
+      <cs:styleClr val="auto"/>
+    </cs:fillRef>
+    <cs:effectRef idx="0"/>
+    <cs:fontRef idx="minor">
+      <a:schemeClr val="tx1"/>
+    </cs:fontRef>
+    <cs:spPr>
+      <a:solidFill>
+        <a:schemeClr val="phClr"/>
+      </a:solidFill>
+      <a:ln w="9525">
+        <a:solidFill>
+          <a:schemeClr val="phClr"/>
+        </a:solidFill>
+      </a:ln>
+    </cs:spPr>
+  </cs:dataPointMarker>
+  <cs:dataPointMarkerLayout symbol="circle" size="5"/>
+  <cs:dataPointWireframe>
+    <cs:lnRef idx="0">
+      <cs:styleClr val="auto"/>
+    </cs:lnRef>
+    <cs:fillRef idx="1"/>
+    <cs:effectRef idx="0"/>
+    <cs:fontRef idx="minor">
+      <a:schemeClr val="tx1"/>
+    </cs:fontRef>
+    <cs:spPr>
+      <a:ln w="9525" cap="rnd">
+        <a:solidFill>
+          <a:schemeClr val="phClr"/>
+        </a:solidFill>
+        <a:round/>
+      </a:ln>
+    </cs:spPr>
+  </cs:dataPointWireframe>
+  <cs:dataTable>
+    <cs:lnRef idx="0"/>
+    <cs:fillRef idx="0"/>
+    <cs:effectRef idx="0"/>
+    <cs:fontRef idx="minor">
+      <a:schemeClr val="tx1">
+        <a:lumMod val="65000"/>
+        <a:lumOff val="35000"/>
+      </a:schemeClr>
+    </cs:fontRef>
+    <cs:spPr>
+      <a:noFill/>
+      <a:ln w="9525" cap="flat" cmpd="sng" algn="ctr">
+        <a:solidFill>
+          <a:schemeClr val="tx1">
+            <a:lumMod val="15000"/>
+            <a:lumOff val="85000"/>
+          </a:schemeClr>
+        </a:solidFill>
+        <a:round/>
+      </a:ln>
+    </cs:spPr>
+    <cs:defRPr sz="1197" kern="1200"/>
+  </cs:dataTable>
+  <cs:downBar>
+    <cs:lnRef idx="0"/>
+    <cs:fillRef idx="0"/>
+    <cs:effectRef idx="0"/>
+    <cs:fontRef idx="minor">
+      <a:schemeClr val="dk1"/>
+    </cs:fontRef>
+    <cs:spPr>
+      <a:solidFill>
+        <a:schemeClr val="dk1">
+          <a:lumMod val="65000"/>
+          <a:lumOff val="35000"/>
+        </a:schemeClr>
+      </a:solidFill>
+      <a:ln w="9525">
+        <a:solidFill>
+          <a:schemeClr val="tx1">
+            <a:lumMod val="65000"/>
+            <a:lumOff val="35000"/>
+          </a:schemeClr>
+        </a:solidFill>
+      </a:ln>
+    </cs:spPr>
+  </cs:downBar>
+  <cs:dropLine>
+    <cs:lnRef idx="0"/>
+    <cs:fillRef idx="0"/>
+    <cs:effectRef idx="0"/>
+    <cs:fontRef idx="minor">
+      <a:schemeClr val="tx1"/>
+    </cs:fontRef>
+    <cs:spPr>
+      <a:ln w="9525" cap="flat" cmpd="sng" algn="ctr">
+        <a:solidFill>
+          <a:schemeClr val="tx1">
+            <a:lumMod val="35000"/>
+            <a:lumOff val="65000"/>
+          </a:schemeClr>
+        </a:solidFill>
+        <a:round/>
+      </a:ln>
+    </cs:spPr>
+  </cs:dropLine>
+  <cs:errorBar>
+    <cs:lnRef idx="0"/>
+    <cs:fillRef idx="0"/>
+    <cs:effectRef idx="0"/>
+    <cs:fontRef idx="minor">
+      <a:schemeClr val="tx1"/>
+    </cs:fontRef>
+    <cs:spPr>
+      <a:ln w="9525" cap="flat" cmpd="sng" algn="ctr">
+        <a:solidFill>
+          <a:schemeClr val="tx1">
+            <a:lumMod val="65000"/>
+            <a:lumOff val="35000"/>
+          </a:schemeClr>
+        </a:solidFill>
+        <a:round/>
+      </a:ln>
+    </cs:spPr>
+  </cs:errorBar>
+  <cs:floor>
+    <cs:lnRef idx="0"/>
+    <cs:fillRef idx="0"/>
+    <cs:effectRef idx="0"/>
+    <cs:fontRef idx="minor">
+      <a:schemeClr val="tx1"/>
+    </cs:fontRef>
+    <cs:spPr>
+      <a:noFill/>
+      <a:ln>
+        <a:noFill/>
+      </a:ln>
+    </cs:spPr>
+  </cs:floor>
+  <cs:gridlineMajor>
+    <cs:lnRef idx="0"/>
+    <cs:fillRef idx="0"/>
+    <cs:effectRef idx="0"/>
+    <cs:fontRef idx="minor">
+      <a:schemeClr val="tx1"/>
+    </cs:fontRef>
+    <cs:spPr>
+      <a:ln w="9525" cap="flat" cmpd="sng" algn="ctr">
+        <a:solidFill>
+          <a:schemeClr val="tx1">
+            <a:lumMod val="15000"/>
+            <a:lumOff val="85000"/>
+          </a:schemeClr>
+        </a:solidFill>
+        <a:round/>
+      </a:ln>
+    </cs:spPr>
+  </cs:gridlineMajor>
+  <cs:gridlineMinor>
+    <cs:lnRef idx="0"/>
+    <cs:fillRef idx="0"/>
+    <cs:effectRef idx="0"/>
+    <cs:fontRef idx="minor">
+      <a:schemeClr val="tx1"/>
+    </cs:fontRef>
+    <cs:spPr>
+      <a:ln w="9525" cap="flat" cmpd="sng" algn="ctr">
+        <a:solidFill>
+          <a:schemeClr val="tx1">
+            <a:lumMod val="5000"/>
+            <a:lumOff val="95000"/>
+          </a:schemeClr>
+        </a:solidFill>
+        <a:round/>
+      </a:ln>
+    </cs:spPr>
+  </cs:gridlineMinor>
+  <cs:hiLoLine>
+    <cs:lnRef idx="0"/>
+    <cs:fillRef idx="0"/>
+    <cs:effectRef idx="0"/>
+    <cs:fontRef idx="minor">
+      <a:schemeClr val="tx1"/>
+    </cs:fontRef>
+    <cs:spPr>
+      <a:ln w="9525" cap="flat" cmpd="sng" algn="ctr">
+        <a:solidFill>
+          <a:schemeClr val="tx1">
+            <a:lumMod val="75000"/>
+            <a:lumOff val="25000"/>
+          </a:schemeClr>
+        </a:solidFill>
+        <a:round/>
+      </a:ln>
+    </cs:spPr>
+  </cs:hiLoLine>
+  <cs:leaderLine>
+    <cs:lnRef idx="0"/>
+    <cs:fillRef idx="0"/>
+    <cs:effectRef idx="0"/>
+    <cs:fontRef idx="minor">
+      <a:schemeClr val="tx1"/>
+    </cs:fontRef>
+    <cs:spPr>
+      <a:ln w="9525" cap="flat" cmpd="sng" algn="ctr">
+        <a:solidFill>
+          <a:schemeClr val="tx1">
+            <a:lumMod val="35000"/>
+            <a:lumOff val="65000"/>
+          </a:schemeClr>
+        </a:solidFill>
+        <a:round/>
+      </a:ln>
+    </cs:spPr>
+  </cs:leaderLine>
+  <cs:legend>
+    <cs:lnRef idx="0"/>
+    <cs:fillRef idx="0"/>
+    <cs:effectRef idx="0"/>
+    <cs:fontRef idx="minor">
+      <a:schemeClr val="tx1">
+        <a:lumMod val="65000"/>
+        <a:lumOff val="35000"/>
+      </a:schemeClr>
+    </cs:fontRef>
+    <cs:defRPr sz="1197" kern="1200"/>
+  </cs:legend>
+  <cs:plotArea mods="allowNoFillOverride allowNoLineOverride">
+    <cs:lnRef idx="0"/>
+    <cs:fillRef idx="0"/>
+    <cs:effectRef idx="0"/>
+    <cs:fontRef idx="minor">
+      <a:schemeClr val="tx1"/>
+    </cs:fontRef>
+  </cs:plotArea>
+  <cs:plotArea3D mods="allowNoFillOverride allowNoLineOverride">
+    <cs:lnRef idx="0"/>
+    <cs:fillRef idx="0"/>
+    <cs:effectRef idx="0"/>
+    <cs:fontRef idx="minor">
+      <a:schemeClr val="tx1"/>
+    </cs:fontRef>
+  </cs:plotArea3D>
+  <cs:seriesAxis>
+    <cs:lnRef idx="0"/>
+    <cs:fillRef idx="0"/>
+    <cs:effectRef idx="0"/>
+    <cs:fontRef idx="minor">
+      <a:schemeClr val="tx1">
+        <a:lumMod val="65000"/>
+        <a:lumOff val="35000"/>
+      </a:schemeClr>
+    </cs:fontRef>
+    <cs:defRPr sz="1197" kern="1200"/>
+  </cs:seriesAxis>
+  <cs:seriesLine>
+    <cs:lnRef idx="0"/>
+    <cs:fillRef idx="0"/>
+    <cs:effectRef idx="0"/>
+    <cs:fontRef idx="minor">
+      <a:schemeClr val="tx1"/>
+    </cs:fontRef>
+    <cs:spPr>
+      <a:ln w="9525" cap="flat" cmpd="sng" algn="ctr">
+        <a:solidFill>
+          <a:schemeClr val="tx1">
+            <a:lumMod val="35000"/>
+            <a:lumOff val="65000"/>
+          </a:schemeClr>
+        </a:solidFill>
+        <a:round/>
+      </a:ln>
+    </cs:spPr>
+  </cs:seriesLine>
+  <cs:title>
+    <cs:lnRef idx="0"/>
+    <cs:fillRef idx="0"/>
+    <cs:effectRef idx="0"/>
+    <cs:fontRef idx="minor">
+      <a:schemeClr val="tx1">
+        <a:lumMod val="65000"/>
+        <a:lumOff val="35000"/>
+      </a:schemeClr>
+    </cs:fontRef>
+    <cs:defRPr sz="1862" b="0" kern="1200" spc="0" baseline="0"/>
+  </cs:title>
+  <cs:trendline>
+    <cs:lnRef idx="0">
+      <cs:styleClr val="auto"/>
+    </cs:lnRef>
+    <cs:fillRef idx="0"/>
+    <cs:effectRef idx="0"/>
+    <cs:fontRef idx="minor">
+      <a:schemeClr val="tx1"/>
+    </cs:fontRef>
+    <cs:spPr>
+      <a:ln w="19050" cap="rnd">
+        <a:solidFill>
+          <a:schemeClr val="phClr"/>
+        </a:solidFill>
+        <a:prstDash val="sysDot"/>
+      </a:ln>
+    </cs:spPr>
+  </cs:trendline>
+  <cs:trendlineLabel>
+    <cs:lnRef idx="0"/>
+    <cs:fillRef idx="0"/>
+    <cs:effectRef idx="0"/>
+    <cs:fontRef idx="minor">
+      <a:schemeClr val="tx1">
+        <a:lumMod val="65000"/>
+        <a:lumOff val="35000"/>
+      </a:schemeClr>
+    </cs:fontRef>
+    <cs:defRPr sz="1197" kern="1200"/>
+  </cs:trendlineLabel>
+  <cs:upBar>
+    <cs:lnRef idx="0"/>
+    <cs:fillRef idx="0"/>
+    <cs:effectRef idx="0"/>
+    <cs:fontRef idx="minor">
+      <a:schemeClr val="dk1"/>
+    </cs:fontRef>
+    <cs:spPr>
+      <a:solidFill>
+        <a:schemeClr val="lt1"/>
+      </a:solidFill>
+      <a:ln w="9525">
+        <a:solidFill>
+          <a:schemeClr val="tx1">
+            <a:lumMod val="15000"/>
+            <a:lumOff val="85000"/>
+          </a:schemeClr>
+        </a:solidFill>
+      </a:ln>
+    </cs:spPr>
+  </cs:upBar>
+  <cs:valueAxis>
+    <cs:lnRef idx="0"/>
+    <cs:fillRef idx="0"/>
+    <cs:effectRef idx="0"/>
+    <cs:fontRef idx="minor">
+      <a:schemeClr val="tx1">
+        <a:lumMod val="65000"/>
+        <a:lumOff val="35000"/>
+      </a:schemeClr>
+    </cs:fontRef>
+    <cs:defRPr sz="1197" kern="1200"/>
+  </cs:valueAxis>
+  <cs:wall>
+    <cs:lnRef idx="0"/>
+    <cs:fillRef idx="0"/>
+    <cs:effectRef idx="0"/>
+    <cs:fontRef idx="minor">
+      <a:schemeClr val="tx1"/>
+    </cs:fontRef>
+    <cs:spPr>
+      <a:noFill/>
+      <a:ln>
+        <a:noFill/>
+      </a:ln>
+    </cs:spPr>
+  </cs:wall>
+</cs:chartStyle>
 </file>
 
 <file path=ppt/slideLayouts/slideLayout1.xml><?xml version="1.0" encoding="utf-8"?>
@@ -256,7 +1189,7 @@
           <a:p>
             <a:fld id="{B1DEA063-3AA9-4E46-8E09-26CB67C754C8}" type="datetimeFigureOut">
               <a:rPr lang="hu-HU" smtClean="0"/>
-              <a:t>2026. 10. 08.</a:t>
+              <a:t>2026. 10. 11.</a:t>
             </a:fld>
             <a:endParaRPr lang="hu-HU"/>
           </a:p>
@@ -454,7 +1387,7 @@
           <a:p>
             <a:fld id="{B1DEA063-3AA9-4E46-8E09-26CB67C754C8}" type="datetimeFigureOut">
               <a:rPr lang="hu-HU" smtClean="0"/>
-              <a:t>2026. 10. 08.</a:t>
+              <a:t>2026. 10. 11.</a:t>
             </a:fld>
             <a:endParaRPr lang="hu-HU"/>
           </a:p>
@@ -662,7 +1595,7 @@
           <a:p>
             <a:fld id="{B1DEA063-3AA9-4E46-8E09-26CB67C754C8}" type="datetimeFigureOut">
               <a:rPr lang="hu-HU" smtClean="0"/>
-              <a:t>2026. 10. 08.</a:t>
+              <a:t>2026. 10. 11.</a:t>
             </a:fld>
             <a:endParaRPr lang="hu-HU"/>
           </a:p>
@@ -860,7 +1793,7 @@
           <a:p>
             <a:fld id="{B1DEA063-3AA9-4E46-8E09-26CB67C754C8}" type="datetimeFigureOut">
               <a:rPr lang="hu-HU" smtClean="0"/>
-              <a:t>2026. 10. 08.</a:t>
+              <a:t>2026. 10. 11.</a:t>
             </a:fld>
             <a:endParaRPr lang="hu-HU"/>
           </a:p>
@@ -1135,7 +2068,7 @@
           <a:p>
             <a:fld id="{B1DEA063-3AA9-4E46-8E09-26CB67C754C8}" type="datetimeFigureOut">
               <a:rPr lang="hu-HU" smtClean="0"/>
-              <a:t>2026. 10. 08.</a:t>
+              <a:t>2026. 10. 11.</a:t>
             </a:fld>
             <a:endParaRPr lang="hu-HU"/>
           </a:p>
@@ -1400,7 +2333,7 @@
           <a:p>
             <a:fld id="{B1DEA063-3AA9-4E46-8E09-26CB67C754C8}" type="datetimeFigureOut">
               <a:rPr lang="hu-HU" smtClean="0"/>
-              <a:t>2026. 10. 08.</a:t>
+              <a:t>2026. 10. 11.</a:t>
             </a:fld>
             <a:endParaRPr lang="hu-HU"/>
           </a:p>
@@ -1812,7 +2745,7 @@
           <a:p>
             <a:fld id="{B1DEA063-3AA9-4E46-8E09-26CB67C754C8}" type="datetimeFigureOut">
               <a:rPr lang="hu-HU" smtClean="0"/>
-              <a:t>2026. 10. 08.</a:t>
+              <a:t>2026. 10. 11.</a:t>
             </a:fld>
             <a:endParaRPr lang="hu-HU"/>
           </a:p>
@@ -1953,7 +2886,7 @@
           <a:p>
             <a:fld id="{B1DEA063-3AA9-4E46-8E09-26CB67C754C8}" type="datetimeFigureOut">
               <a:rPr lang="hu-HU" smtClean="0"/>
-              <a:t>2026. 10. 08.</a:t>
+              <a:t>2026. 10. 11.</a:t>
             </a:fld>
             <a:endParaRPr lang="hu-HU"/>
           </a:p>
@@ -2066,7 +2999,7 @@
           <a:p>
             <a:fld id="{B1DEA063-3AA9-4E46-8E09-26CB67C754C8}" type="datetimeFigureOut">
               <a:rPr lang="hu-HU" smtClean="0"/>
-              <a:t>2026. 10. 08.</a:t>
+              <a:t>2026. 10. 11.</a:t>
             </a:fld>
             <a:endParaRPr lang="hu-HU"/>
           </a:p>
@@ -2377,7 +3310,7 @@
           <a:p>
             <a:fld id="{B1DEA063-3AA9-4E46-8E09-26CB67C754C8}" type="datetimeFigureOut">
               <a:rPr lang="hu-HU" smtClean="0"/>
-              <a:t>2026. 10. 08.</a:t>
+              <a:t>2026. 10. 11.</a:t>
             </a:fld>
             <a:endParaRPr lang="hu-HU"/>
           </a:p>
@@ -2665,7 +3598,7 @@
           <a:p>
             <a:fld id="{B1DEA063-3AA9-4E46-8E09-26CB67C754C8}" type="datetimeFigureOut">
               <a:rPr lang="hu-HU" smtClean="0"/>
-              <a:t>2026. 10. 08.</a:t>
+              <a:t>2026. 10. 11.</a:t>
             </a:fld>
             <a:endParaRPr lang="hu-HU"/>
           </a:p>
@@ -2906,7 +3839,7 @@
           <a:p>
             <a:fld id="{B1DEA063-3AA9-4E46-8E09-26CB67C754C8}" type="datetimeFigureOut">
               <a:rPr lang="hu-HU" smtClean="0"/>
-              <a:t>2026. 10. 08.</a:t>
+              <a:t>2026. 10. 11.</a:t>
             </a:fld>
             <a:endParaRPr lang="hu-HU"/>
           </a:p>
@@ -3466,6 +4399,162 @@
 </p:sld>
 </file>
 
+<file path=ppt/slides/slide10.xml><?xml version="1.0" encoding="utf-8"?>
+<p:sld xmlns:a="http://schemas.openxmlformats.org/drawingml/2006/main" xmlns:r="http://schemas.openxmlformats.org/officeDocument/2006/relationships" xmlns:p="http://schemas.openxmlformats.org/presentationml/2006/main">
+  <p:cSld>
+    <p:bg>
+      <p:bgPr>
+        <a:gradFill>
+          <a:gsLst>
+            <a:gs pos="20000">
+              <a:srgbClr val="296075"/>
+            </a:gs>
+            <a:gs pos="80000">
+              <a:srgbClr val="296075"/>
+            </a:gs>
+            <a:gs pos="64190">
+              <a:srgbClr val="27383D"/>
+            </a:gs>
+            <a:gs pos="46000">
+              <a:srgbClr val="27383D"/>
+            </a:gs>
+            <a:gs pos="4000">
+              <a:srgbClr val="57C785"/>
+            </a:gs>
+            <a:gs pos="100000">
+              <a:srgbClr val="57C785"/>
+            </a:gs>
+          </a:gsLst>
+          <a:lin ang="7800000" scaled="0"/>
+        </a:gradFill>
+        <a:effectLst/>
+      </p:bgPr>
+    </p:bg>
+    <p:spTree>
+      <p:nvGrpSpPr>
+        <p:cNvPr id="1" name="">
+          <a:extLst>
+            <a:ext uri="{FF2B5EF4-FFF2-40B4-BE49-F238E27FC236}">
+              <a16:creationId xmlns:a16="http://schemas.microsoft.com/office/drawing/2014/main" id="{908260A2-C5F3-2449-DF28-318F2BAA1942}"/>
+            </a:ext>
+          </a:extLst>
+        </p:cNvPr>
+        <p:cNvGrpSpPr/>
+        <p:nvPr/>
+      </p:nvGrpSpPr>
+      <p:grpSpPr>
+        <a:xfrm>
+          <a:off x="0" y="0"/>
+          <a:ext cx="0" cy="0"/>
+          <a:chOff x="0" y="0"/>
+          <a:chExt cx="0" cy="0"/>
+        </a:xfrm>
+      </p:grpSpPr>
+      <p:sp>
+        <p:nvSpPr>
+          <p:cNvPr id="2" name="Cím 1">
+            <a:extLst>
+              <a:ext uri="{FF2B5EF4-FFF2-40B4-BE49-F238E27FC236}">
+                <a16:creationId xmlns:a16="http://schemas.microsoft.com/office/drawing/2014/main" id="{55EB9096-79CE-7CC0-E18C-03D511AFD136}"/>
+              </a:ext>
+            </a:extLst>
+          </p:cNvPr>
+          <p:cNvSpPr>
+            <a:spLocks noGrp="1"/>
+          </p:cNvSpPr>
+          <p:nvPr>
+            <p:ph type="ctrTitle"/>
+          </p:nvPr>
+        </p:nvSpPr>
+        <p:spPr>
+          <a:xfrm>
+            <a:off x="1524000" y="2489199"/>
+            <a:ext cx="9144000" cy="1020763"/>
+          </a:xfrm>
+          <a:effectLst>
+            <a:glow rad="101600">
+              <a:schemeClr val="accent1">
+                <a:satMod val="175000"/>
+                <a:alpha val="40000"/>
+              </a:schemeClr>
+            </a:glow>
+          </a:effectLst>
+        </p:spPr>
+        <p:txBody>
+          <a:bodyPr>
+            <a:normAutofit/>
+          </a:bodyPr>
+          <a:lstStyle/>
+          <a:p>
+            <a:r>
+              <a:rPr lang="hu-HU" dirty="0">
+                <a:solidFill>
+                  <a:srgbClr val="57C785"/>
+                </a:solidFill>
+                <a:latin typeface="Lucida Fax" panose="02060602050505020204" pitchFamily="18" charset="0"/>
+              </a:rPr>
+              <a:t>Köszönjük a figyelmet</a:t>
+            </a:r>
+          </a:p>
+        </p:txBody>
+      </p:sp>
+      <p:sp>
+        <p:nvSpPr>
+          <p:cNvPr id="3" name="Alcím 2">
+            <a:extLst>
+              <a:ext uri="{FF2B5EF4-FFF2-40B4-BE49-F238E27FC236}">
+                <a16:creationId xmlns:a16="http://schemas.microsoft.com/office/drawing/2014/main" id="{91799A99-412B-7B59-1F7D-5D5EBC113219}"/>
+              </a:ext>
+            </a:extLst>
+          </p:cNvPr>
+          <p:cNvSpPr>
+            <a:spLocks noGrp="1"/>
+          </p:cNvSpPr>
+          <p:nvPr>
+            <p:ph type="subTitle" idx="1"/>
+          </p:nvPr>
+        </p:nvSpPr>
+        <p:spPr/>
+        <p:txBody>
+          <a:bodyPr/>
+          <a:lstStyle/>
+          <a:p>
+            <a:r>
+              <a:rPr lang="hu-HU" dirty="0">
+                <a:solidFill>
+                  <a:srgbClr val="296075"/>
+                </a:solidFill>
+              </a:rPr>
+              <a:t>Készítette: Tóth Tihamér &amp; Szilágyi Levente</a:t>
+            </a:r>
+          </a:p>
+        </p:txBody>
+      </p:sp>
+    </p:spTree>
+    <p:extLst>
+      <p:ext uri="{BB962C8B-B14F-4D97-AF65-F5344CB8AC3E}">
+        <p14:creationId xmlns:p14="http://schemas.microsoft.com/office/powerpoint/2010/main" val="1133813027"/>
+      </p:ext>
+    </p:extLst>
+  </p:cSld>
+  <p:clrMapOvr>
+    <a:masterClrMapping/>
+  </p:clrMapOvr>
+  <mc:AlternateContent xmlns:mc="http://schemas.openxmlformats.org/markup-compatibility/2006">
+    <mc:Choice xmlns:p15="http://schemas.microsoft.com/office/powerpoint/2012/main" Requires="p15">
+      <p:transition xmlns:p14="http://schemas.microsoft.com/office/powerpoint/2010/main" spd="slow" p14:dur="2000">
+        <p15:prstTrans prst="drape"/>
+      </p:transition>
+    </mc:Choice>
+    <mc:Fallback>
+      <p:transition spd="slow">
+        <p:fade/>
+      </p:transition>
+    </mc:Fallback>
+  </mc:AlternateContent>
+</p:sld>
+</file>
+
 <file path=ppt/slides/slide2.xml><?xml version="1.0" encoding="utf-8"?>
 <p:sld xmlns:a="http://schemas.openxmlformats.org/drawingml/2006/main" xmlns:r="http://schemas.openxmlformats.org/officeDocument/2006/relationships" xmlns:p="http://schemas.openxmlformats.org/presentationml/2006/main">
   <p:cSld>
@@ -3513,7 +4602,7 @@
       </p:grpSpPr>
       <p:sp>
         <p:nvSpPr>
-          <p:cNvPr id="2" name="Téglalap: lekerekített 1">
+          <p:cNvPr id="2" name="!!feladat_megoszt">
             <a:extLst>
               <a:ext uri="{FF2B5EF4-FFF2-40B4-BE49-F238E27FC236}">
                 <a16:creationId xmlns:a16="http://schemas.microsoft.com/office/drawing/2014/main" id="{9A307570-4965-47D6-ACCD-734F1E02C0C3}"/>
@@ -3583,7 +4672,9 @@
           <a:p>
             <a:pPr algn="ctr"/>
             <a:r>
-              <a:rPr lang="hu-HU" dirty="0"/>
+              <a:rPr lang="hu-HU" dirty="0">
+                <a:latin typeface="Lucida Fax" panose="02060602050505020204" pitchFamily="18" charset="0"/>
+              </a:rPr>
               <a:t>Feladat Megosztás</a:t>
             </a:r>
           </a:p>
@@ -3670,7 +4761,14 @@
           <a:p>
             <a:pPr algn="ctr"/>
             <a:r>
-              <a:rPr lang="hu-HU" dirty="0"/>
+              <a:rPr lang="hu-HU" dirty="0">
+                <a:solidFill>
+                  <a:schemeClr val="bg2">
+                    <a:lumMod val="50000"/>
+                  </a:schemeClr>
+                </a:solidFill>
+                <a:latin typeface="Lucida Fax" panose="02060602050505020204" pitchFamily="18" charset="0"/>
+              </a:rPr>
               <a:t>Időbeosztás</a:t>
             </a:r>
           </a:p>
@@ -3696,6 +4794,26 @@
           <a:prstGeom prst="roundRect">
             <a:avLst/>
           </a:prstGeom>
+          <a:gradFill>
+            <a:gsLst>
+              <a:gs pos="4000">
+                <a:srgbClr val="7030A0"/>
+              </a:gs>
+              <a:gs pos="93578">
+                <a:srgbClr val="7030A0"/>
+              </a:gs>
+              <a:gs pos="64000">
+                <a:srgbClr val="FFCC66"/>
+              </a:gs>
+              <a:gs pos="55000">
+                <a:srgbClr val="FFFF00"/>
+              </a:gs>
+              <a:gs pos="44000">
+                <a:srgbClr val="FFCC66"/>
+              </a:gs>
+            </a:gsLst>
+            <a:lin ang="7800000" scaled="0"/>
+          </a:gradFill>
           <a:ln w="19050">
             <a:solidFill>
               <a:schemeClr val="bg1"/>
@@ -3731,7 +4849,14 @@
           <a:p>
             <a:pPr algn="ctr"/>
             <a:r>
-              <a:rPr lang="hu-HU" dirty="0"/>
+              <a:rPr lang="hu-HU" dirty="0">
+                <a:solidFill>
+                  <a:schemeClr val="bg2">
+                    <a:lumMod val="50000"/>
+                  </a:schemeClr>
+                </a:solidFill>
+                <a:latin typeface="Lucida Fax" panose="02060602050505020204" pitchFamily="18" charset="0"/>
+              </a:rPr>
               <a:t>Tapasztalatok</a:t>
             </a:r>
           </a:p>
@@ -3757,6 +4882,38 @@
           <a:prstGeom prst="roundRect">
             <a:avLst/>
           </a:prstGeom>
+          <a:gradFill flip="none" rotWithShape="1">
+            <a:gsLst>
+              <a:gs pos="38528">
+                <a:schemeClr val="bg2">
+                  <a:lumMod val="50000"/>
+                </a:schemeClr>
+              </a:gs>
+              <a:gs pos="63000">
+                <a:schemeClr val="bg2">
+                  <a:lumMod val="50000"/>
+                </a:schemeClr>
+              </a:gs>
+              <a:gs pos="76000">
+                <a:schemeClr val="bg2">
+                  <a:lumMod val="75000"/>
+                </a:schemeClr>
+              </a:gs>
+              <a:gs pos="25000">
+                <a:schemeClr val="bg2">
+                  <a:lumMod val="75000"/>
+                </a:schemeClr>
+              </a:gs>
+              <a:gs pos="4000">
+                <a:schemeClr val="bg1"/>
+              </a:gs>
+              <a:gs pos="100000">
+                <a:schemeClr val="bg1"/>
+              </a:gs>
+            </a:gsLst>
+            <a:lin ang="7800000" scaled="0"/>
+            <a:tileRect/>
+          </a:gradFill>
           <a:ln w="19050">
             <a:solidFill>
               <a:schemeClr val="bg1"/>
@@ -3792,7 +4949,9 @@
           <a:p>
             <a:pPr algn="ctr"/>
             <a:r>
-              <a:rPr lang="hu-HU" dirty="0"/>
+              <a:rPr lang="hu-HU" dirty="0">
+                <a:latin typeface="Lucida Fax" panose="02060602050505020204" pitchFamily="18" charset="0"/>
+              </a:rPr>
               <a:t>Források</a:t>
             </a:r>
           </a:p>
@@ -3849,6 +5008,9 @@
   <p:clrMapOvr>
     <a:masterClrMapping/>
   </p:clrMapOvr>
+  <p:transition spd="slow">
+    <p:split orient="vert"/>
+  </p:transition>
   <p:timing>
     <p:tnLst>
       <p:par>
@@ -3875,7 +5037,7 @@
                               <p:par>
                                 <p:cTn id="5" presetID="26" presetClass="entr" presetSubtype="0" fill="hold" grpId="0" nodeType="afterEffect">
                                   <p:stCondLst>
-                                    <p:cond delay="0"/>
+                                    <p:cond delay="1000"/>
                                   </p:stCondLst>
                                   <p:childTnLst>
                                     <p:set>
@@ -3898,7 +5060,7 @@
                                     </p:set>
                                     <p:animEffect transition="in" filter="wipe(down)">
                                       <p:cBhvr>
-                                        <p:cTn id="7" dur="580">
+                                        <p:cTn id="7" dur="290">
                                           <p:stCondLst>
                                             <p:cond delay="0"/>
                                           </p:stCondLst>
@@ -3910,7 +5072,7 @@
                                     </p:animEffect>
                                     <p:anim calcmode="lin" valueType="num">
                                       <p:cBhvr>
-                                        <p:cTn id="8" dur="1822" tmFilter="0,0; 0.14,0.36; 0.43,0.73; 0.71,0.91; 1.0,1.0">
+                                        <p:cTn id="8" dur="911" tmFilter="0,0; 0.14,0.36; 0.43,0.73; 0.71,0.91; 1.0,1.0">
                                           <p:stCondLst>
                                             <p:cond delay="0"/>
                                           </p:stCondLst>
@@ -3937,7 +5099,7 @@
                                     </p:anim>
                                     <p:anim calcmode="lin" valueType="num">
                                       <p:cBhvr>
-                                        <p:cTn id="9" dur="664" tmFilter="0.0,0.0; 0.25,0.07; 0.50,0.2; 0.75,0.467; 1.0,1.0">
+                                        <p:cTn id="9" dur="332" tmFilter="0.0,0.0; 0.25,0.07; 0.50,0.2; 0.75,0.467; 1.0,1.0">
                                           <p:stCondLst>
                                             <p:cond delay="0"/>
                                           </p:stCondLst>
@@ -3964,9 +5126,9 @@
                                     </p:anim>
                                     <p:anim calcmode="lin" valueType="num">
                                       <p:cBhvr>
-                                        <p:cTn id="10" dur="664" tmFilter="0, 0; 0.125,0.2665; 0.25,0.4; 0.375,0.465; 0.5,0.5;  0.625,0.535; 0.75,0.6; 0.875,0.7335; 1,1">
+                                        <p:cTn id="10" dur="332" tmFilter="0, 0; 0.125,0.2665; 0.25,0.4; 0.375,0.465; 0.5,0.5;  0.625,0.535; 0.75,0.6; 0.875,0.7335; 1,1">
                                           <p:stCondLst>
-                                            <p:cond delay="664"/>
+                                            <p:cond delay="332"/>
                                           </p:stCondLst>
                                         </p:cTn>
                                         <p:tgtEl>
@@ -3991,9 +5153,9 @@
                                     </p:anim>
                                     <p:anim calcmode="lin" valueType="num">
                                       <p:cBhvr>
-                                        <p:cTn id="11" dur="332" tmFilter="0, 0; 0.125,0.2665; 0.25,0.4; 0.375,0.465; 0.5,0.5;  0.625,0.535; 0.75,0.6; 0.875,0.7335; 1,1">
+                                        <p:cTn id="11" dur="166" tmFilter="0, 0; 0.125,0.2665; 0.25,0.4; 0.375,0.465; 0.5,0.5;  0.625,0.535; 0.75,0.6; 0.875,0.7335; 1,1">
                                           <p:stCondLst>
-                                            <p:cond delay="1324"/>
+                                            <p:cond delay="662"/>
                                           </p:stCondLst>
                                         </p:cTn>
                                         <p:tgtEl>
@@ -4018,9 +5180,9 @@
                                     </p:anim>
                                     <p:anim calcmode="lin" valueType="num">
                                       <p:cBhvr>
-                                        <p:cTn id="12" dur="164" tmFilter="0, 0; 0.125,0.2665; 0.25,0.4; 0.375,0.465; 0.5,0.5;  0.625,0.535; 0.75,0.6; 0.875,0.7335; 1,1">
+                                        <p:cTn id="12" dur="82" tmFilter="0, 0; 0.125,0.2665; 0.25,0.4; 0.375,0.465; 0.5,0.5;  0.625,0.535; 0.75,0.6; 0.875,0.7335; 1,1">
                                           <p:stCondLst>
-                                            <p:cond delay="1656"/>
+                                            <p:cond delay="828"/>
                                           </p:stCondLst>
                                         </p:cTn>
                                         <p:tgtEl>
@@ -4045,9 +5207,9 @@
                                     </p:anim>
                                     <p:animScale>
                                       <p:cBhvr>
-                                        <p:cTn id="13" dur="26">
+                                        <p:cTn id="13" dur="13">
                                           <p:stCondLst>
-                                            <p:cond delay="650"/>
+                                            <p:cond delay="325"/>
                                           </p:stCondLst>
                                         </p:cTn>
                                         <p:tgtEl>
@@ -4058,9 +5220,9 @@
                                     </p:animScale>
                                     <p:animScale>
                                       <p:cBhvr>
-                                        <p:cTn id="14" dur="166" decel="50000">
+                                        <p:cTn id="14" dur="83" decel="50000">
                                           <p:stCondLst>
-                                            <p:cond delay="676"/>
+                                            <p:cond delay="338"/>
                                           </p:stCondLst>
                                         </p:cTn>
                                         <p:tgtEl>
@@ -4071,9 +5233,9 @@
                                     </p:animScale>
                                     <p:animScale>
                                       <p:cBhvr>
-                                        <p:cTn id="15" dur="26">
+                                        <p:cTn id="15" dur="13">
                                           <p:stCondLst>
-                                            <p:cond delay="1312"/>
+                                            <p:cond delay="656"/>
                                           </p:stCondLst>
                                         </p:cTn>
                                         <p:tgtEl>
@@ -4084,9 +5246,9 @@
                                     </p:animScale>
                                     <p:animScale>
                                       <p:cBhvr>
-                                        <p:cTn id="16" dur="166" decel="50000">
+                                        <p:cTn id="16" dur="83" decel="50000">
                                           <p:stCondLst>
-                                            <p:cond delay="1338"/>
+                                            <p:cond delay="669"/>
                                           </p:stCondLst>
                                         </p:cTn>
                                         <p:tgtEl>
@@ -4097,9 +5259,9 @@
                                     </p:animScale>
                                     <p:animScale>
                                       <p:cBhvr>
-                                        <p:cTn id="17" dur="26">
+                                        <p:cTn id="17" dur="13">
                                           <p:stCondLst>
-                                            <p:cond delay="1642"/>
+                                            <p:cond delay="821"/>
                                           </p:stCondLst>
                                         </p:cTn>
                                         <p:tgtEl>
@@ -4110,9 +5272,9 @@
                                     </p:animScale>
                                     <p:animScale>
                                       <p:cBhvr>
-                                        <p:cTn id="18" dur="166" decel="50000">
+                                        <p:cTn id="18" dur="83" decel="50000">
                                           <p:stCondLst>
-                                            <p:cond delay="1668"/>
+                                            <p:cond delay="834"/>
                                           </p:stCondLst>
                                         </p:cTn>
                                         <p:tgtEl>
@@ -4123,9 +5285,9 @@
                                     </p:animScale>
                                     <p:animScale>
                                       <p:cBhvr>
-                                        <p:cTn id="19" dur="26">
+                                        <p:cTn id="19" dur="13">
                                           <p:stCondLst>
-                                            <p:cond delay="1808"/>
+                                            <p:cond delay="904"/>
                                           </p:stCondLst>
                                         </p:cTn>
                                         <p:tgtEl>
@@ -4136,9 +5298,9 @@
                                     </p:animScale>
                                     <p:animScale>
                                       <p:cBhvr>
-                                        <p:cTn id="20" dur="166" decel="50000">
+                                        <p:cTn id="20" dur="83" decel="50000">
                                           <p:stCondLst>
-                                            <p:cond delay="1834"/>
+                                            <p:cond delay="917"/>
                                           </p:stCondLst>
                                         </p:cTn>
                                         <p:tgtEl>
@@ -4185,7 +5347,7 @@
                                     </p:set>
                                     <p:anim calcmode="lin" valueType="num">
                                       <p:cBhvr>
-                                        <p:cTn id="24" dur="1000" fill="hold"/>
+                                        <p:cTn id="24" dur="500" fill="hold"/>
                                         <p:tgtEl>
                                           <p:spTgt spid="2"/>
                                         </p:tgtEl>
@@ -4208,7 +5370,7 @@
                                     </p:anim>
                                     <p:anim calcmode="lin" valueType="num">
                                       <p:cBhvr>
-                                        <p:cTn id="25" dur="1000" fill="hold"/>
+                                        <p:cTn id="25" dur="500" fill="hold"/>
                                         <p:tgtEl>
                                           <p:spTgt spid="2"/>
                                         </p:tgtEl>
@@ -4231,7 +5393,7 @@
                                     </p:anim>
                                     <p:anim calcmode="lin" valueType="num">
                                       <p:cBhvr>
-                                        <p:cTn id="26" dur="1000" fill="hold"/>
+                                        <p:cTn id="26" dur="500" fill="hold"/>
                                         <p:tgtEl>
                                           <p:spTgt spid="2"/>
                                         </p:tgtEl>
@@ -4254,7 +5416,7 @@
                                     </p:anim>
                                     <p:animEffect transition="in" filter="fade">
                                       <p:cBhvr>
-                                        <p:cTn id="27" dur="1000"/>
+                                        <p:cTn id="27" dur="500"/>
                                         <p:tgtEl>
                                           <p:spTgt spid="2"/>
                                         </p:tgtEl>
@@ -4269,7 +5431,7 @@
                         <p:par>
                           <p:cTn id="28" fill="hold">
                             <p:stCondLst>
-                              <p:cond delay="3000"/>
+                              <p:cond delay="2500"/>
                             </p:stCondLst>
                             <p:childTnLst>
                               <p:par>
@@ -4298,7 +5460,7 @@
                                     </p:set>
                                     <p:anim calcmode="lin" valueType="num">
                                       <p:cBhvr>
-                                        <p:cTn id="31" dur="1000" fill="hold"/>
+                                        <p:cTn id="31" dur="500" fill="hold"/>
                                         <p:tgtEl>
                                           <p:spTgt spid="3"/>
                                         </p:tgtEl>
@@ -4321,7 +5483,7 @@
                                     </p:anim>
                                     <p:anim calcmode="lin" valueType="num">
                                       <p:cBhvr>
-                                        <p:cTn id="32" dur="1000" fill="hold"/>
+                                        <p:cTn id="32" dur="500" fill="hold"/>
                                         <p:tgtEl>
                                           <p:spTgt spid="3"/>
                                         </p:tgtEl>
@@ -4344,7 +5506,7 @@
                                     </p:anim>
                                     <p:anim calcmode="lin" valueType="num">
                                       <p:cBhvr>
-                                        <p:cTn id="33" dur="1000" fill="hold"/>
+                                        <p:cTn id="33" dur="500" fill="hold"/>
                                         <p:tgtEl>
                                           <p:spTgt spid="3"/>
                                         </p:tgtEl>
@@ -4367,7 +5529,7 @@
                                     </p:anim>
                                     <p:animEffect transition="in" filter="fade">
                                       <p:cBhvr>
-                                        <p:cTn id="34" dur="1000"/>
+                                        <p:cTn id="34" dur="500"/>
                                         <p:tgtEl>
                                           <p:spTgt spid="3"/>
                                         </p:tgtEl>
@@ -4382,7 +5544,7 @@
                         <p:par>
                           <p:cTn id="35" fill="hold">
                             <p:stCondLst>
-                              <p:cond delay="4000"/>
+                              <p:cond delay="3000"/>
                             </p:stCondLst>
                             <p:childTnLst>
                               <p:par>
@@ -4411,7 +5573,7 @@
                                     </p:set>
                                     <p:anim calcmode="lin" valueType="num">
                                       <p:cBhvr>
-                                        <p:cTn id="38" dur="1000" fill="hold"/>
+                                        <p:cTn id="38" dur="500" fill="hold"/>
                                         <p:tgtEl>
                                           <p:spTgt spid="4"/>
                                         </p:tgtEl>
@@ -4434,7 +5596,7 @@
                                     </p:anim>
                                     <p:anim calcmode="lin" valueType="num">
                                       <p:cBhvr>
-                                        <p:cTn id="39" dur="1000" fill="hold"/>
+                                        <p:cTn id="39" dur="500" fill="hold"/>
                                         <p:tgtEl>
                                           <p:spTgt spid="4"/>
                                         </p:tgtEl>
@@ -4457,7 +5619,7 @@
                                     </p:anim>
                                     <p:anim calcmode="lin" valueType="num">
                                       <p:cBhvr>
-                                        <p:cTn id="40" dur="1000" fill="hold"/>
+                                        <p:cTn id="40" dur="500" fill="hold"/>
                                         <p:tgtEl>
                                           <p:spTgt spid="4"/>
                                         </p:tgtEl>
@@ -4480,7 +5642,7 @@
                                     </p:anim>
                                     <p:animEffect transition="in" filter="fade">
                                       <p:cBhvr>
-                                        <p:cTn id="41" dur="1000"/>
+                                        <p:cTn id="41" dur="500"/>
                                         <p:tgtEl>
                                           <p:spTgt spid="4"/>
                                         </p:tgtEl>
@@ -4495,7 +5657,7 @@
                         <p:par>
                           <p:cTn id="42" fill="hold">
                             <p:stCondLst>
-                              <p:cond delay="5000"/>
+                              <p:cond delay="3500"/>
                             </p:stCondLst>
                             <p:childTnLst>
                               <p:par>
@@ -4524,7 +5686,7 @@
                                     </p:set>
                                     <p:anim calcmode="lin" valueType="num">
                                       <p:cBhvr>
-                                        <p:cTn id="45" dur="1000" fill="hold"/>
+                                        <p:cTn id="45" dur="500" fill="hold"/>
                                         <p:tgtEl>
                                           <p:spTgt spid="5"/>
                                         </p:tgtEl>
@@ -4547,7 +5709,7 @@
                                     </p:anim>
                                     <p:anim calcmode="lin" valueType="num">
                                       <p:cBhvr>
-                                        <p:cTn id="46" dur="1000" fill="hold"/>
+                                        <p:cTn id="46" dur="500" fill="hold"/>
                                         <p:tgtEl>
                                           <p:spTgt spid="5"/>
                                         </p:tgtEl>
@@ -4570,7 +5732,7 @@
                                     </p:anim>
                                     <p:anim calcmode="lin" valueType="num">
                                       <p:cBhvr>
-                                        <p:cTn id="47" dur="1000" fill="hold"/>
+                                        <p:cTn id="47" dur="500" fill="hold"/>
                                         <p:tgtEl>
                                           <p:spTgt spid="5"/>
                                         </p:tgtEl>
@@ -4593,7 +5755,7 @@
                                     </p:anim>
                                     <p:animEffect transition="in" filter="fade">
                                       <p:cBhvr>
-                                        <p:cTn id="48" dur="1000"/>
+                                        <p:cTn id="48" dur="500"/>
                                         <p:tgtEl>
                                           <p:spTgt spid="5"/>
                                         </p:tgtEl>
@@ -4687,10 +5849,10 @@
       </p:grpSpPr>
       <p:sp>
         <p:nvSpPr>
-          <p:cNvPr id="7" name="Téglalap: lekerekített 6">
+          <p:cNvPr id="5" name="!!feladat_megoszt">
             <a:extLst>
               <a:ext uri="{FF2B5EF4-FFF2-40B4-BE49-F238E27FC236}">
-                <a16:creationId xmlns:a16="http://schemas.microsoft.com/office/drawing/2014/main" id="{0E475EA2-92D6-4419-96AA-AA50A27B83E4}"/>
+                <a16:creationId xmlns:a16="http://schemas.microsoft.com/office/drawing/2014/main" id="{53A7DC45-763E-0A24-720B-4BA52A5472CE}"/>
               </a:ext>
             </a:extLst>
           </p:cNvPr>
@@ -4699,12 +5861,41 @@
         </p:nvSpPr>
         <p:spPr>
           <a:xfrm>
-            <a:off x="347132" y="355599"/>
+            <a:off x="347132" y="341346"/>
             <a:ext cx="11206239" cy="6193862"/>
           </a:xfrm>
           <a:prstGeom prst="roundRect">
             <a:avLst/>
           </a:prstGeom>
+          <a:gradFill>
+            <a:gsLst>
+              <a:gs pos="90000">
+                <a:srgbClr val="296075"/>
+              </a:gs>
+              <a:gs pos="8000">
+                <a:srgbClr val="296075"/>
+              </a:gs>
+              <a:gs pos="41000">
+                <a:srgbClr val="57C785"/>
+              </a:gs>
+              <a:gs pos="62000">
+                <a:srgbClr val="57C785"/>
+              </a:gs>
+            </a:gsLst>
+            <a:lin ang="2400000" scaled="0"/>
+          </a:gradFill>
+          <a:ln w="19050">
+            <a:solidFill>
+              <a:schemeClr val="bg1"/>
+            </a:solidFill>
+          </a:ln>
+          <a:effectLst>
+            <a:glow rad="101600">
+              <a:schemeClr val="bg1">
+                <a:alpha val="40000"/>
+              </a:schemeClr>
+            </a:glow>
+          </a:effectLst>
         </p:spPr>
         <p:style>
           <a:lnRef idx="2">
@@ -4727,7 +5918,9 @@
           <a:lstStyle/>
           <a:p>
             <a:pPr algn="ctr"/>
-            <a:endParaRPr lang="hu-HU" dirty="0"/>
+            <a:endParaRPr lang="hu-HU" dirty="0">
+              <a:latin typeface="Lucida Fax" panose="02060602050505020204" pitchFamily="18" charset="0"/>
+            </a:endParaRPr>
           </a:p>
         </p:txBody>
       </p:sp>
@@ -4757,7 +5950,15 @@
           <a:bodyPr/>
           <a:lstStyle/>
           <a:p>
-            <a:endParaRPr lang="hu-HU" dirty="0"/>
+            <a:r>
+              <a:rPr lang="hu-HU" dirty="0">
+                <a:solidFill>
+                  <a:schemeClr val="bg1"/>
+                </a:solidFill>
+                <a:latin typeface="Lucida Fax" panose="02060602050505020204" pitchFamily="18" charset="0"/>
+              </a:rPr>
+              <a:t>Feladat Megosztás:</a:t>
+            </a:r>
           </a:p>
         </p:txBody>
       </p:sp>
@@ -4779,8 +5980,8 @@
         </p:nvSpPr>
         <p:spPr>
           <a:xfrm>
-            <a:off x="838200" y="2872595"/>
-            <a:ext cx="5019135" cy="3304367"/>
+            <a:off x="2413000" y="2886848"/>
+            <a:ext cx="3683000" cy="3304367"/>
           </a:xfrm>
         </p:spPr>
         <p:txBody>
@@ -4791,21 +5992,83 @@
               <a:buNone/>
             </a:pPr>
             <a:r>
-              <a:rPr lang="hu-HU" dirty="0"/>
+              <a:rPr lang="hu-HU" dirty="0">
+                <a:solidFill>
+                  <a:schemeClr val="bg1"/>
+                </a:solidFill>
+                <a:latin typeface="Lucida Fax" panose="02060602050505020204" pitchFamily="18" charset="0"/>
+              </a:rPr>
               <a:t>Tihamér:</a:t>
             </a:r>
           </a:p>
           <a:p>
             <a:pPr>
-              <a:buBlip>
-                <a:blip r:embed="rId2"/>
-              </a:buBlip>
+              <a:buClr>
+                <a:schemeClr val="bg1"/>
+              </a:buClr>
+              <a:buFont typeface="Lucida Fax" panose="02060602050505020204" pitchFamily="18" charset="0"/>
+              <a:buChar char="»"/>
             </a:pPr>
             <a:r>
-              <a:rPr lang="hu-HU" dirty="0" err="1"/>
-              <a:t>asd</a:t>
+              <a:rPr lang="hu-HU" dirty="0">
+                <a:solidFill>
+                  <a:schemeClr val="bg1"/>
+                </a:solidFill>
+                <a:latin typeface="Lucida Fax" panose="02060602050505020204" pitchFamily="18" charset="0"/>
+              </a:rPr>
+              <a:t>Html</a:t>
             </a:r>
-            <a:endParaRPr lang="hu-HU" dirty="0"/>
+          </a:p>
+          <a:p>
+            <a:pPr>
+              <a:buClr>
+                <a:schemeClr val="bg1"/>
+              </a:buClr>
+              <a:buFont typeface="Lucida Fax" panose="02060602050505020204" pitchFamily="18" charset="0"/>
+              <a:buChar char="»"/>
+            </a:pPr>
+            <a:r>
+              <a:rPr lang="hu-HU" dirty="0">
+                <a:solidFill>
+                  <a:schemeClr val="bg1"/>
+                </a:solidFill>
+                <a:latin typeface="Lucida Fax" panose="02060602050505020204" pitchFamily="18" charset="0"/>
+              </a:rPr>
+              <a:t>Css</a:t>
+            </a:r>
+          </a:p>
+          <a:p>
+            <a:pPr>
+              <a:buClr>
+                <a:schemeClr val="bg1"/>
+              </a:buClr>
+              <a:buFont typeface="Lucida Fax" panose="02060602050505020204" pitchFamily="18" charset="0"/>
+              <a:buChar char="»"/>
+            </a:pPr>
+            <a:r>
+              <a:rPr lang="hu-HU" dirty="0">
+                <a:solidFill>
+                  <a:schemeClr val="bg1"/>
+                </a:solidFill>
+                <a:latin typeface="Lucida Fax" panose="02060602050505020204" pitchFamily="18" charset="0"/>
+              </a:rPr>
+              <a:t>Github</a:t>
+            </a:r>
+          </a:p>
+          <a:p>
+            <a:pPr>
+              <a:buClr>
+                <a:schemeClr val="bg1"/>
+              </a:buClr>
+              <a:buFont typeface="Lucida Fax" panose="02060602050505020204" pitchFamily="18" charset="0"/>
+              <a:buChar char="»"/>
+            </a:pPr>
+            <a:endParaRPr lang="hu-HU" dirty="0">
+              <a:solidFill>
+                <a:schemeClr val="bg1"/>
+              </a:solidFill>
+              <a:latin typeface="Lucida Fax" panose="02060602050505020204" pitchFamily="18" charset="0"/>
+            </a:endParaRPr>
           </a:p>
         </p:txBody>
       </p:sp>
@@ -4827,8 +6090,8 @@
         </p:nvSpPr>
         <p:spPr>
           <a:xfrm>
-            <a:off x="5857335" y="2872595"/>
-            <a:ext cx="5204961" cy="3304368"/>
+            <a:off x="6334664" y="2886848"/>
+            <a:ext cx="3683000" cy="3304368"/>
           </a:xfrm>
         </p:spPr>
         <p:txBody>
@@ -4839,8 +6102,67 @@
               <a:buNone/>
             </a:pPr>
             <a:r>
-              <a:rPr lang="hu-HU" dirty="0"/>
+              <a:rPr lang="hu-HU" dirty="0">
+                <a:solidFill>
+                  <a:schemeClr val="bg1"/>
+                </a:solidFill>
+                <a:latin typeface="Lucida Fax" panose="02060602050505020204" pitchFamily="18" charset="0"/>
+              </a:rPr>
               <a:t>Levente:</a:t>
+            </a:r>
+          </a:p>
+          <a:p>
+            <a:pPr>
+              <a:buClr>
+                <a:schemeClr val="bg1"/>
+              </a:buClr>
+              <a:buFont typeface="Lucida Fax" panose="02060602050505020204" pitchFamily="18" charset="0"/>
+              <a:buChar char="»"/>
+            </a:pPr>
+            <a:r>
+              <a:rPr lang="hu-HU" dirty="0">
+                <a:solidFill>
+                  <a:schemeClr val="bg1"/>
+                </a:solidFill>
+                <a:latin typeface="Lucida Fax" panose="02060602050505020204" pitchFamily="18" charset="0"/>
+              </a:rPr>
+              <a:t>Java</a:t>
+            </a:r>
+          </a:p>
+          <a:p>
+            <a:pPr>
+              <a:buClr>
+                <a:schemeClr val="bg1"/>
+              </a:buClr>
+              <a:buFont typeface="Lucida Fax" panose="02060602050505020204" pitchFamily="18" charset="0"/>
+              <a:buChar char="»"/>
+            </a:pPr>
+            <a:r>
+              <a:rPr lang="hu-HU" dirty="0">
+                <a:solidFill>
+                  <a:schemeClr val="bg1"/>
+                </a:solidFill>
+                <a:latin typeface="Lucida Fax" panose="02060602050505020204" pitchFamily="18" charset="0"/>
+              </a:rPr>
+              <a:t>Css</a:t>
+            </a:r>
+          </a:p>
+          <a:p>
+            <a:pPr>
+              <a:buClr>
+                <a:schemeClr val="bg1"/>
+              </a:buClr>
+              <a:buFont typeface="Lucida Fax" panose="02060602050505020204" pitchFamily="18" charset="0"/>
+              <a:buChar char="»"/>
+            </a:pPr>
+            <a:r>
+              <a:rPr lang="hu-HU" dirty="0">
+                <a:solidFill>
+                  <a:schemeClr val="bg1"/>
+                </a:solidFill>
+                <a:latin typeface="Lucida Fax" panose="02060602050505020204" pitchFamily="18" charset="0"/>
+              </a:rPr>
+              <a:t>Figma</a:t>
             </a:r>
           </a:p>
         </p:txBody>
@@ -4867,6 +6189,4664 @@
       </p:transition>
     </mc:Fallback>
   </mc:AlternateContent>
+  <p:timing>
+    <p:tnLst>
+      <p:par>
+        <p:cTn id="1" dur="indefinite" restart="never" nodeType="tmRoot">
+          <p:childTnLst>
+            <p:seq concurrent="1" nextAc="seek">
+              <p:cTn id="2" dur="indefinite" nodeType="mainSeq">
+                <p:childTnLst>
+                  <p:par>
+                    <p:cTn id="3" fill="hold">
+                      <p:stCondLst>
+                        <p:cond delay="indefinite"/>
+                        <p:cond evt="onBegin" delay="0">
+                          <p:tn val="2"/>
+                        </p:cond>
+                      </p:stCondLst>
+                      <p:childTnLst>
+                        <p:par>
+                          <p:cTn id="4" fill="hold">
+                            <p:stCondLst>
+                              <p:cond delay="0"/>
+                            </p:stCondLst>
+                            <p:childTnLst>
+                              <p:par>
+                                <p:cTn id="5" presetID="10" presetClass="entr" presetSubtype="0" fill="hold" grpId="0" nodeType="afterEffect">
+                                  <p:stCondLst>
+                                    <p:cond delay="0"/>
+                                  </p:stCondLst>
+                                  <p:childTnLst>
+                                    <p:set>
+                                      <p:cBhvr>
+                                        <p:cTn id="6" dur="1" fill="hold">
+                                          <p:stCondLst>
+                                            <p:cond delay="0"/>
+                                          </p:stCondLst>
+                                        </p:cTn>
+                                        <p:tgtEl>
+                                          <p:spTgt spid="2"/>
+                                        </p:tgtEl>
+                                        <p:attrNameLst>
+                                          <p:attrName>style.visibility</p:attrName>
+                                        </p:attrNameLst>
+                                      </p:cBhvr>
+                                      <p:to>
+                                        <p:strVal val="visible"/>
+                                      </p:to>
+                                    </p:set>
+                                    <p:animEffect transition="in" filter="fade">
+                                      <p:cBhvr>
+                                        <p:cTn id="7" dur="500"/>
+                                        <p:tgtEl>
+                                          <p:spTgt spid="2"/>
+                                        </p:tgtEl>
+                                      </p:cBhvr>
+                                    </p:animEffect>
+                                  </p:childTnLst>
+                                </p:cTn>
+                              </p:par>
+                              <p:par>
+                                <p:cTn id="8" presetID="10" presetClass="entr" presetSubtype="0" fill="hold" grpId="0" nodeType="withEffect">
+                                  <p:stCondLst>
+                                    <p:cond delay="0"/>
+                                  </p:stCondLst>
+                                  <p:childTnLst>
+                                    <p:set>
+                                      <p:cBhvr>
+                                        <p:cTn id="9" dur="1" fill="hold">
+                                          <p:stCondLst>
+                                            <p:cond delay="0"/>
+                                          </p:stCondLst>
+                                        </p:cTn>
+                                        <p:tgtEl>
+                                          <p:spTgt spid="3">
+                                            <p:txEl>
+                                              <p:pRg st="0" end="0"/>
+                                            </p:txEl>
+                                          </p:spTgt>
+                                        </p:tgtEl>
+                                        <p:attrNameLst>
+                                          <p:attrName>style.visibility</p:attrName>
+                                        </p:attrNameLst>
+                                      </p:cBhvr>
+                                      <p:to>
+                                        <p:strVal val="visible"/>
+                                      </p:to>
+                                    </p:set>
+                                    <p:animEffect transition="in" filter="fade">
+                                      <p:cBhvr>
+                                        <p:cTn id="10" dur="500"/>
+                                        <p:tgtEl>
+                                          <p:spTgt spid="3">
+                                            <p:txEl>
+                                              <p:pRg st="0" end="0"/>
+                                            </p:txEl>
+                                          </p:spTgt>
+                                        </p:tgtEl>
+                                      </p:cBhvr>
+                                    </p:animEffect>
+                                  </p:childTnLst>
+                                </p:cTn>
+                              </p:par>
+                              <p:par>
+                                <p:cTn id="11" presetID="10" presetClass="entr" presetSubtype="0" fill="hold" grpId="0" nodeType="withEffect">
+                                  <p:stCondLst>
+                                    <p:cond delay="0"/>
+                                  </p:stCondLst>
+                                  <p:childTnLst>
+                                    <p:set>
+                                      <p:cBhvr>
+                                        <p:cTn id="12" dur="1" fill="hold">
+                                          <p:stCondLst>
+                                            <p:cond delay="0"/>
+                                          </p:stCondLst>
+                                        </p:cTn>
+                                        <p:tgtEl>
+                                          <p:spTgt spid="3">
+                                            <p:txEl>
+                                              <p:pRg st="1" end="1"/>
+                                            </p:txEl>
+                                          </p:spTgt>
+                                        </p:tgtEl>
+                                        <p:attrNameLst>
+                                          <p:attrName>style.visibility</p:attrName>
+                                        </p:attrNameLst>
+                                      </p:cBhvr>
+                                      <p:to>
+                                        <p:strVal val="visible"/>
+                                      </p:to>
+                                    </p:set>
+                                    <p:animEffect transition="in" filter="fade">
+                                      <p:cBhvr>
+                                        <p:cTn id="13" dur="500"/>
+                                        <p:tgtEl>
+                                          <p:spTgt spid="3">
+                                            <p:txEl>
+                                              <p:pRg st="1" end="1"/>
+                                            </p:txEl>
+                                          </p:spTgt>
+                                        </p:tgtEl>
+                                      </p:cBhvr>
+                                    </p:animEffect>
+                                  </p:childTnLst>
+                                </p:cTn>
+                              </p:par>
+                              <p:par>
+                                <p:cTn id="14" presetID="10" presetClass="entr" presetSubtype="0" fill="hold" grpId="0" nodeType="withEffect">
+                                  <p:stCondLst>
+                                    <p:cond delay="0"/>
+                                  </p:stCondLst>
+                                  <p:childTnLst>
+                                    <p:set>
+                                      <p:cBhvr>
+                                        <p:cTn id="15" dur="1" fill="hold">
+                                          <p:stCondLst>
+                                            <p:cond delay="0"/>
+                                          </p:stCondLst>
+                                        </p:cTn>
+                                        <p:tgtEl>
+                                          <p:spTgt spid="3">
+                                            <p:txEl>
+                                              <p:pRg st="2" end="2"/>
+                                            </p:txEl>
+                                          </p:spTgt>
+                                        </p:tgtEl>
+                                        <p:attrNameLst>
+                                          <p:attrName>style.visibility</p:attrName>
+                                        </p:attrNameLst>
+                                      </p:cBhvr>
+                                      <p:to>
+                                        <p:strVal val="visible"/>
+                                      </p:to>
+                                    </p:set>
+                                    <p:animEffect transition="in" filter="fade">
+                                      <p:cBhvr>
+                                        <p:cTn id="16" dur="500"/>
+                                        <p:tgtEl>
+                                          <p:spTgt spid="3">
+                                            <p:txEl>
+                                              <p:pRg st="2" end="2"/>
+                                            </p:txEl>
+                                          </p:spTgt>
+                                        </p:tgtEl>
+                                      </p:cBhvr>
+                                    </p:animEffect>
+                                  </p:childTnLst>
+                                </p:cTn>
+                              </p:par>
+                              <p:par>
+                                <p:cTn id="17" presetID="10" presetClass="entr" presetSubtype="0" fill="hold" grpId="0" nodeType="withEffect">
+                                  <p:stCondLst>
+                                    <p:cond delay="0"/>
+                                  </p:stCondLst>
+                                  <p:childTnLst>
+                                    <p:set>
+                                      <p:cBhvr>
+                                        <p:cTn id="18" dur="1" fill="hold">
+                                          <p:stCondLst>
+                                            <p:cond delay="0"/>
+                                          </p:stCondLst>
+                                        </p:cTn>
+                                        <p:tgtEl>
+                                          <p:spTgt spid="3">
+                                            <p:txEl>
+                                              <p:pRg st="3" end="3"/>
+                                            </p:txEl>
+                                          </p:spTgt>
+                                        </p:tgtEl>
+                                        <p:attrNameLst>
+                                          <p:attrName>style.visibility</p:attrName>
+                                        </p:attrNameLst>
+                                      </p:cBhvr>
+                                      <p:to>
+                                        <p:strVal val="visible"/>
+                                      </p:to>
+                                    </p:set>
+                                    <p:animEffect transition="in" filter="fade">
+                                      <p:cBhvr>
+                                        <p:cTn id="19" dur="500"/>
+                                        <p:tgtEl>
+                                          <p:spTgt spid="3">
+                                            <p:txEl>
+                                              <p:pRg st="3" end="3"/>
+                                            </p:txEl>
+                                          </p:spTgt>
+                                        </p:tgtEl>
+                                      </p:cBhvr>
+                                    </p:animEffect>
+                                  </p:childTnLst>
+                                </p:cTn>
+                              </p:par>
+                              <p:par>
+                                <p:cTn id="20" presetID="10" presetClass="entr" presetSubtype="0" fill="hold" grpId="0" nodeType="withEffect">
+                                  <p:stCondLst>
+                                    <p:cond delay="0"/>
+                                  </p:stCondLst>
+                                  <p:childTnLst>
+                                    <p:set>
+                                      <p:cBhvr>
+                                        <p:cTn id="21" dur="1" fill="hold">
+                                          <p:stCondLst>
+                                            <p:cond delay="0"/>
+                                          </p:stCondLst>
+                                        </p:cTn>
+                                        <p:tgtEl>
+                                          <p:spTgt spid="4">
+                                            <p:txEl>
+                                              <p:pRg st="0" end="0"/>
+                                            </p:txEl>
+                                          </p:spTgt>
+                                        </p:tgtEl>
+                                        <p:attrNameLst>
+                                          <p:attrName>style.visibility</p:attrName>
+                                        </p:attrNameLst>
+                                      </p:cBhvr>
+                                      <p:to>
+                                        <p:strVal val="visible"/>
+                                      </p:to>
+                                    </p:set>
+                                    <p:animEffect transition="in" filter="fade">
+                                      <p:cBhvr>
+                                        <p:cTn id="22" dur="500"/>
+                                        <p:tgtEl>
+                                          <p:spTgt spid="4">
+                                            <p:txEl>
+                                              <p:pRg st="0" end="0"/>
+                                            </p:txEl>
+                                          </p:spTgt>
+                                        </p:tgtEl>
+                                      </p:cBhvr>
+                                    </p:animEffect>
+                                  </p:childTnLst>
+                                </p:cTn>
+                              </p:par>
+                              <p:par>
+                                <p:cTn id="23" presetID="10" presetClass="entr" presetSubtype="0" fill="hold" grpId="0" nodeType="withEffect">
+                                  <p:stCondLst>
+                                    <p:cond delay="0"/>
+                                  </p:stCondLst>
+                                  <p:childTnLst>
+                                    <p:set>
+                                      <p:cBhvr>
+                                        <p:cTn id="24" dur="1" fill="hold">
+                                          <p:stCondLst>
+                                            <p:cond delay="0"/>
+                                          </p:stCondLst>
+                                        </p:cTn>
+                                        <p:tgtEl>
+                                          <p:spTgt spid="4">
+                                            <p:txEl>
+                                              <p:pRg st="1" end="1"/>
+                                            </p:txEl>
+                                          </p:spTgt>
+                                        </p:tgtEl>
+                                        <p:attrNameLst>
+                                          <p:attrName>style.visibility</p:attrName>
+                                        </p:attrNameLst>
+                                      </p:cBhvr>
+                                      <p:to>
+                                        <p:strVal val="visible"/>
+                                      </p:to>
+                                    </p:set>
+                                    <p:animEffect transition="in" filter="fade">
+                                      <p:cBhvr>
+                                        <p:cTn id="25" dur="500"/>
+                                        <p:tgtEl>
+                                          <p:spTgt spid="4">
+                                            <p:txEl>
+                                              <p:pRg st="1" end="1"/>
+                                            </p:txEl>
+                                          </p:spTgt>
+                                        </p:tgtEl>
+                                      </p:cBhvr>
+                                    </p:animEffect>
+                                  </p:childTnLst>
+                                </p:cTn>
+                              </p:par>
+                              <p:par>
+                                <p:cTn id="26" presetID="10" presetClass="entr" presetSubtype="0" fill="hold" grpId="0" nodeType="withEffect">
+                                  <p:stCondLst>
+                                    <p:cond delay="0"/>
+                                  </p:stCondLst>
+                                  <p:childTnLst>
+                                    <p:set>
+                                      <p:cBhvr>
+                                        <p:cTn id="27" dur="1" fill="hold">
+                                          <p:stCondLst>
+                                            <p:cond delay="0"/>
+                                          </p:stCondLst>
+                                        </p:cTn>
+                                        <p:tgtEl>
+                                          <p:spTgt spid="4">
+                                            <p:txEl>
+                                              <p:pRg st="2" end="2"/>
+                                            </p:txEl>
+                                          </p:spTgt>
+                                        </p:tgtEl>
+                                        <p:attrNameLst>
+                                          <p:attrName>style.visibility</p:attrName>
+                                        </p:attrNameLst>
+                                      </p:cBhvr>
+                                      <p:to>
+                                        <p:strVal val="visible"/>
+                                      </p:to>
+                                    </p:set>
+                                    <p:animEffect transition="in" filter="fade">
+                                      <p:cBhvr>
+                                        <p:cTn id="28" dur="500"/>
+                                        <p:tgtEl>
+                                          <p:spTgt spid="4">
+                                            <p:txEl>
+                                              <p:pRg st="2" end="2"/>
+                                            </p:txEl>
+                                          </p:spTgt>
+                                        </p:tgtEl>
+                                      </p:cBhvr>
+                                    </p:animEffect>
+                                  </p:childTnLst>
+                                </p:cTn>
+                              </p:par>
+                              <p:par>
+                                <p:cTn id="29" presetID="10" presetClass="entr" presetSubtype="0" fill="hold" grpId="0" nodeType="withEffect">
+                                  <p:stCondLst>
+                                    <p:cond delay="0"/>
+                                  </p:stCondLst>
+                                  <p:childTnLst>
+                                    <p:set>
+                                      <p:cBhvr>
+                                        <p:cTn id="30" dur="1" fill="hold">
+                                          <p:stCondLst>
+                                            <p:cond delay="0"/>
+                                          </p:stCondLst>
+                                        </p:cTn>
+                                        <p:tgtEl>
+                                          <p:spTgt spid="4">
+                                            <p:txEl>
+                                              <p:pRg st="3" end="3"/>
+                                            </p:txEl>
+                                          </p:spTgt>
+                                        </p:tgtEl>
+                                        <p:attrNameLst>
+                                          <p:attrName>style.visibility</p:attrName>
+                                        </p:attrNameLst>
+                                      </p:cBhvr>
+                                      <p:to>
+                                        <p:strVal val="visible"/>
+                                      </p:to>
+                                    </p:set>
+                                    <p:animEffect transition="in" filter="fade">
+                                      <p:cBhvr>
+                                        <p:cTn id="31" dur="500"/>
+                                        <p:tgtEl>
+                                          <p:spTgt spid="4">
+                                            <p:txEl>
+                                              <p:pRg st="3" end="3"/>
+                                            </p:txEl>
+                                          </p:spTgt>
+                                        </p:tgtEl>
+                                      </p:cBhvr>
+                                    </p:animEffect>
+                                  </p:childTnLst>
+                                </p:cTn>
+                              </p:par>
+                            </p:childTnLst>
+                          </p:cTn>
+                        </p:par>
+                      </p:childTnLst>
+                    </p:cTn>
+                  </p:par>
+                </p:childTnLst>
+              </p:cTn>
+              <p:prevCondLst>
+                <p:cond evt="onPrev" delay="0">
+                  <p:tgtEl>
+                    <p:sldTgt/>
+                  </p:tgtEl>
+                </p:cond>
+              </p:prevCondLst>
+              <p:nextCondLst>
+                <p:cond evt="onNext" delay="0">
+                  <p:tgtEl>
+                    <p:sldTgt/>
+                  </p:tgtEl>
+                </p:cond>
+              </p:nextCondLst>
+            </p:seq>
+          </p:childTnLst>
+        </p:cTn>
+      </p:par>
+    </p:tnLst>
+    <p:bldLst>
+      <p:bldP spid="2" grpId="0"/>
+      <p:bldP spid="3" grpId="0" uiExpand="1" build="p"/>
+      <p:bldP spid="4" grpId="0" uiExpand="1" build="p"/>
+    </p:bldLst>
+  </p:timing>
+</p:sld>
+</file>
+
+<file path=ppt/slides/slide4.xml><?xml version="1.0" encoding="utf-8"?>
+<p:sld xmlns:a="http://schemas.openxmlformats.org/drawingml/2006/main" xmlns:r="http://schemas.openxmlformats.org/officeDocument/2006/relationships" xmlns:p="http://schemas.openxmlformats.org/presentationml/2006/main">
+  <p:cSld>
+    <p:bg>
+      <p:bgPr>
+        <a:gradFill>
+          <a:gsLst>
+            <a:gs pos="20000">
+              <a:srgbClr val="296075"/>
+            </a:gs>
+            <a:gs pos="80000">
+              <a:srgbClr val="296075"/>
+            </a:gs>
+            <a:gs pos="64190">
+              <a:srgbClr val="27383D"/>
+            </a:gs>
+            <a:gs pos="41000">
+              <a:srgbClr val="27383D"/>
+            </a:gs>
+            <a:gs pos="4000">
+              <a:srgbClr val="57C785"/>
+            </a:gs>
+            <a:gs pos="100000">
+              <a:srgbClr val="57C785"/>
+            </a:gs>
+          </a:gsLst>
+          <a:lin ang="2400000" scaled="0"/>
+        </a:gradFill>
+        <a:effectLst/>
+      </p:bgPr>
+    </p:bg>
+    <p:spTree>
+      <p:nvGrpSpPr>
+        <p:cNvPr id="1" name="">
+          <a:extLst>
+            <a:ext uri="{FF2B5EF4-FFF2-40B4-BE49-F238E27FC236}">
+              <a16:creationId xmlns:a16="http://schemas.microsoft.com/office/drawing/2014/main" id="{E57DB067-18EE-50E7-7301-B571B29BCCA8}"/>
+            </a:ext>
+          </a:extLst>
+        </p:cNvPr>
+        <p:cNvGrpSpPr/>
+        <p:nvPr/>
+      </p:nvGrpSpPr>
+      <p:grpSpPr>
+        <a:xfrm>
+          <a:off x="0" y="0"/>
+          <a:ext cx="0" cy="0"/>
+          <a:chOff x="0" y="0"/>
+          <a:chExt cx="0" cy="0"/>
+        </a:xfrm>
+      </p:grpSpPr>
+      <p:grpSp>
+        <p:nvGrpSpPr>
+          <p:cNvPr id="17" name="Group 16">
+            <a:extLst>
+              <a:ext uri="{FF2B5EF4-FFF2-40B4-BE49-F238E27FC236}">
+                <a16:creationId xmlns:a16="http://schemas.microsoft.com/office/drawing/2014/main" id="{E90D7666-B849-9252-304B-907AA118D398}"/>
+              </a:ext>
+            </a:extLst>
+          </p:cNvPr>
+          <p:cNvGrpSpPr/>
+          <p:nvPr/>
+        </p:nvGrpSpPr>
+        <p:grpSpPr>
+          <a:xfrm>
+            <a:off x="6239934" y="5066240"/>
+            <a:ext cx="5604934" cy="1468967"/>
+            <a:chOff x="6409266" y="5222874"/>
+            <a:chExt cx="5604934" cy="1468967"/>
+          </a:xfrm>
+        </p:grpSpPr>
+        <p:sp>
+          <p:nvSpPr>
+            <p:cNvPr id="15" name="Téglalap: lekerekített 3">
+              <a:extLst>
+                <a:ext uri="{FF2B5EF4-FFF2-40B4-BE49-F238E27FC236}">
+                  <a16:creationId xmlns:a16="http://schemas.microsoft.com/office/drawing/2014/main" id="{95146B13-B495-1AA7-7F98-DBCB171A1240}"/>
+                </a:ext>
+              </a:extLst>
+            </p:cNvPr>
+            <p:cNvSpPr/>
+            <p:nvPr/>
+          </p:nvSpPr>
+          <p:spPr>
+            <a:xfrm>
+              <a:off x="6409266" y="5227108"/>
+              <a:ext cx="2650067" cy="1464733"/>
+            </a:xfrm>
+            <a:prstGeom prst="roundRect">
+              <a:avLst/>
+            </a:prstGeom>
+            <a:gradFill>
+              <a:gsLst>
+                <a:gs pos="4000">
+                  <a:srgbClr val="7030A0"/>
+                </a:gs>
+                <a:gs pos="93578">
+                  <a:srgbClr val="7030A0"/>
+                </a:gs>
+                <a:gs pos="64000">
+                  <a:srgbClr val="FFCC66"/>
+                </a:gs>
+                <a:gs pos="55000">
+                  <a:srgbClr val="FFFF00"/>
+                </a:gs>
+                <a:gs pos="44000">
+                  <a:srgbClr val="FFCC66"/>
+                </a:gs>
+              </a:gsLst>
+              <a:lin ang="7800000" scaled="0"/>
+            </a:gradFill>
+            <a:ln w="19050">
+              <a:solidFill>
+                <a:schemeClr val="bg1"/>
+              </a:solidFill>
+            </a:ln>
+            <a:effectLst>
+              <a:glow rad="101600">
+                <a:schemeClr val="bg1">
+                  <a:alpha val="40000"/>
+                </a:schemeClr>
+              </a:glow>
+            </a:effectLst>
+          </p:spPr>
+          <p:style>
+            <a:lnRef idx="2">
+              <a:schemeClr val="accent1">
+                <a:shade val="50000"/>
+              </a:schemeClr>
+            </a:lnRef>
+            <a:fillRef idx="1">
+              <a:schemeClr val="accent1"/>
+            </a:fillRef>
+            <a:effectRef idx="0">
+              <a:schemeClr val="accent1"/>
+            </a:effectRef>
+            <a:fontRef idx="minor">
+              <a:schemeClr val="lt1"/>
+            </a:fontRef>
+          </p:style>
+          <p:txBody>
+            <a:bodyPr rtlCol="0" anchor="ctr"/>
+            <a:lstStyle/>
+            <a:p>
+              <a:pPr algn="ctr"/>
+              <a:r>
+                <a:rPr lang="hu-HU" dirty="0">
+                  <a:solidFill>
+                    <a:schemeClr val="bg2">
+                      <a:lumMod val="50000"/>
+                    </a:schemeClr>
+                  </a:solidFill>
+                  <a:latin typeface="Lucida Fax" panose="02060602050505020204" pitchFamily="18" charset="0"/>
+                </a:rPr>
+                <a:t>Tapasztalatok</a:t>
+              </a:r>
+            </a:p>
+          </p:txBody>
+        </p:sp>
+        <p:sp>
+          <p:nvSpPr>
+            <p:cNvPr id="16" name="Téglalap: lekerekített 4">
+              <a:extLst>
+                <a:ext uri="{FF2B5EF4-FFF2-40B4-BE49-F238E27FC236}">
+                  <a16:creationId xmlns:a16="http://schemas.microsoft.com/office/drawing/2014/main" id="{1C9CC352-6EC8-AFE0-DF84-7A588B55C2FC}"/>
+                </a:ext>
+              </a:extLst>
+            </p:cNvPr>
+            <p:cNvSpPr/>
+            <p:nvPr/>
+          </p:nvSpPr>
+          <p:spPr>
+            <a:xfrm>
+              <a:off x="9364133" y="5222874"/>
+              <a:ext cx="2650067" cy="1464733"/>
+            </a:xfrm>
+            <a:prstGeom prst="roundRect">
+              <a:avLst/>
+            </a:prstGeom>
+            <a:gradFill flip="none" rotWithShape="1">
+              <a:gsLst>
+                <a:gs pos="38528">
+                  <a:schemeClr val="bg2">
+                    <a:lumMod val="50000"/>
+                  </a:schemeClr>
+                </a:gs>
+                <a:gs pos="63000">
+                  <a:schemeClr val="bg2">
+                    <a:lumMod val="50000"/>
+                  </a:schemeClr>
+                </a:gs>
+                <a:gs pos="76000">
+                  <a:schemeClr val="bg2">
+                    <a:lumMod val="75000"/>
+                  </a:schemeClr>
+                </a:gs>
+                <a:gs pos="25000">
+                  <a:schemeClr val="bg2">
+                    <a:lumMod val="75000"/>
+                  </a:schemeClr>
+                </a:gs>
+                <a:gs pos="4000">
+                  <a:schemeClr val="bg1"/>
+                </a:gs>
+                <a:gs pos="100000">
+                  <a:schemeClr val="bg1"/>
+                </a:gs>
+              </a:gsLst>
+              <a:lin ang="7800000" scaled="0"/>
+              <a:tileRect/>
+            </a:gradFill>
+            <a:ln w="19050">
+              <a:solidFill>
+                <a:schemeClr val="bg1"/>
+              </a:solidFill>
+            </a:ln>
+            <a:effectLst>
+              <a:glow rad="101600">
+                <a:schemeClr val="bg1">
+                  <a:alpha val="40000"/>
+                </a:schemeClr>
+              </a:glow>
+            </a:effectLst>
+          </p:spPr>
+          <p:style>
+            <a:lnRef idx="2">
+              <a:schemeClr val="accent1">
+                <a:shade val="50000"/>
+              </a:schemeClr>
+            </a:lnRef>
+            <a:fillRef idx="1">
+              <a:schemeClr val="accent1"/>
+            </a:fillRef>
+            <a:effectRef idx="0">
+              <a:schemeClr val="accent1"/>
+            </a:effectRef>
+            <a:fontRef idx="minor">
+              <a:schemeClr val="lt1"/>
+            </a:fontRef>
+          </p:style>
+          <p:txBody>
+            <a:bodyPr rtlCol="0" anchor="ctr"/>
+            <a:lstStyle/>
+            <a:p>
+              <a:pPr algn="ctr"/>
+              <a:r>
+                <a:rPr lang="hu-HU" dirty="0">
+                  <a:latin typeface="Lucida Fax" panose="02060602050505020204" pitchFamily="18" charset="0"/>
+                </a:rPr>
+                <a:t>Források</a:t>
+              </a:r>
+            </a:p>
+          </p:txBody>
+        </p:sp>
+      </p:grpSp>
+      <p:sp>
+        <p:nvSpPr>
+          <p:cNvPr id="2" name="!!feladat_megoszt">
+            <a:extLst>
+              <a:ext uri="{FF2B5EF4-FFF2-40B4-BE49-F238E27FC236}">
+                <a16:creationId xmlns:a16="http://schemas.microsoft.com/office/drawing/2014/main" id="{B9AB2133-CD7C-CC7A-89C1-C45C9F089F64}"/>
+              </a:ext>
+            </a:extLst>
+          </p:cNvPr>
+          <p:cNvSpPr/>
+          <p:nvPr/>
+        </p:nvSpPr>
+        <p:spPr>
+          <a:xfrm>
+            <a:off x="347132" y="5070474"/>
+            <a:ext cx="2650067" cy="1464733"/>
+          </a:xfrm>
+          <a:prstGeom prst="roundRect">
+            <a:avLst/>
+          </a:prstGeom>
+          <a:gradFill>
+            <a:gsLst>
+              <a:gs pos="90000">
+                <a:srgbClr val="296075"/>
+              </a:gs>
+              <a:gs pos="8000">
+                <a:srgbClr val="296075"/>
+              </a:gs>
+              <a:gs pos="41000">
+                <a:srgbClr val="57C785"/>
+              </a:gs>
+              <a:gs pos="62000">
+                <a:srgbClr val="57C785"/>
+              </a:gs>
+            </a:gsLst>
+            <a:lin ang="2400000" scaled="0"/>
+          </a:gradFill>
+          <a:ln w="19050">
+            <a:solidFill>
+              <a:schemeClr val="bg1"/>
+            </a:solidFill>
+          </a:ln>
+          <a:effectLst>
+            <a:glow rad="101600">
+              <a:schemeClr val="bg1">
+                <a:alpha val="40000"/>
+              </a:schemeClr>
+            </a:glow>
+          </a:effectLst>
+        </p:spPr>
+        <p:style>
+          <a:lnRef idx="2">
+            <a:schemeClr val="accent1">
+              <a:shade val="50000"/>
+            </a:schemeClr>
+          </a:lnRef>
+          <a:fillRef idx="1">
+            <a:schemeClr val="accent1"/>
+          </a:fillRef>
+          <a:effectRef idx="0">
+            <a:schemeClr val="accent1"/>
+          </a:effectRef>
+          <a:fontRef idx="minor">
+            <a:schemeClr val="lt1"/>
+          </a:fontRef>
+        </p:style>
+        <p:txBody>
+          <a:bodyPr rtlCol="0" anchor="ctr"/>
+          <a:lstStyle/>
+          <a:p>
+            <a:pPr algn="ctr"/>
+            <a:r>
+              <a:rPr lang="hu-HU" dirty="0">
+                <a:latin typeface="Lucida Fax" panose="02060602050505020204" pitchFamily="18" charset="0"/>
+              </a:rPr>
+              <a:t>Feladat Megosztás</a:t>
+            </a:r>
+          </a:p>
+        </p:txBody>
+      </p:sp>
+      <p:sp>
+        <p:nvSpPr>
+          <p:cNvPr id="3" name="!!idobeosztás">
+            <a:extLst>
+              <a:ext uri="{FF2B5EF4-FFF2-40B4-BE49-F238E27FC236}">
+                <a16:creationId xmlns:a16="http://schemas.microsoft.com/office/drawing/2014/main" id="{19AEAFD9-DA15-1C42-0D77-D39696861966}"/>
+              </a:ext>
+            </a:extLst>
+          </p:cNvPr>
+          <p:cNvSpPr/>
+          <p:nvPr/>
+        </p:nvSpPr>
+        <p:spPr>
+          <a:xfrm>
+            <a:off x="3301999" y="5070475"/>
+            <a:ext cx="2650067" cy="1464733"/>
+          </a:xfrm>
+          <a:prstGeom prst="roundRect">
+            <a:avLst/>
+          </a:prstGeom>
+          <a:gradFill>
+            <a:gsLst>
+              <a:gs pos="4000">
+                <a:srgbClr val="FF0000"/>
+              </a:gs>
+              <a:gs pos="57000">
+                <a:schemeClr val="accent4"/>
+              </a:gs>
+              <a:gs pos="80396">
+                <a:schemeClr val="accent4">
+                  <a:lumMod val="40000"/>
+                  <a:lumOff val="60000"/>
+                </a:schemeClr>
+              </a:gs>
+              <a:gs pos="27000">
+                <a:schemeClr val="accent4">
+                  <a:lumMod val="40000"/>
+                  <a:lumOff val="60000"/>
+                </a:schemeClr>
+              </a:gs>
+              <a:gs pos="100000">
+                <a:srgbClr val="FF0000"/>
+              </a:gs>
+            </a:gsLst>
+            <a:lin ang="2400000" scaled="0"/>
+          </a:gradFill>
+          <a:ln w="19050">
+            <a:solidFill>
+              <a:schemeClr val="bg1"/>
+            </a:solidFill>
+          </a:ln>
+          <a:effectLst>
+            <a:glow rad="101600">
+              <a:schemeClr val="bg1">
+                <a:alpha val="40000"/>
+              </a:schemeClr>
+            </a:glow>
+          </a:effectLst>
+        </p:spPr>
+        <p:style>
+          <a:lnRef idx="2">
+            <a:schemeClr val="accent1">
+              <a:shade val="50000"/>
+            </a:schemeClr>
+          </a:lnRef>
+          <a:fillRef idx="1">
+            <a:schemeClr val="accent1"/>
+          </a:fillRef>
+          <a:effectRef idx="0">
+            <a:schemeClr val="accent1"/>
+          </a:effectRef>
+          <a:fontRef idx="minor">
+            <a:schemeClr val="lt1"/>
+          </a:fontRef>
+        </p:style>
+        <p:txBody>
+          <a:bodyPr rtlCol="0" anchor="ctr"/>
+          <a:lstStyle/>
+          <a:p>
+            <a:pPr algn="ctr"/>
+            <a:r>
+              <a:rPr lang="hu-HU" dirty="0">
+                <a:solidFill>
+                  <a:schemeClr val="bg2">
+                    <a:lumMod val="50000"/>
+                  </a:schemeClr>
+                </a:solidFill>
+                <a:latin typeface="Lucida Fax" panose="02060602050505020204" pitchFamily="18" charset="0"/>
+              </a:rPr>
+              <a:t>Időbeosztás</a:t>
+            </a:r>
+          </a:p>
+        </p:txBody>
+      </p:sp>
+      <p:sp>
+        <p:nvSpPr>
+          <p:cNvPr id="7" name="Szövegdoboz 6">
+            <a:extLst>
+              <a:ext uri="{FF2B5EF4-FFF2-40B4-BE49-F238E27FC236}">
+                <a16:creationId xmlns:a16="http://schemas.microsoft.com/office/drawing/2014/main" id="{EA3F51ED-4298-8E18-DA2A-50B100243BA1}"/>
+              </a:ext>
+            </a:extLst>
+          </p:cNvPr>
+          <p:cNvSpPr txBox="1"/>
+          <p:nvPr/>
+        </p:nvSpPr>
+        <p:spPr>
+          <a:xfrm>
+            <a:off x="1865841" y="600075"/>
+            <a:ext cx="8782050" cy="1015663"/>
+          </a:xfrm>
+          <a:prstGeom prst="rect">
+            <a:avLst/>
+          </a:prstGeom>
+          <a:noFill/>
+        </p:spPr>
+        <p:txBody>
+          <a:bodyPr wrap="square" rtlCol="0">
+            <a:spAutoFit/>
+          </a:bodyPr>
+          <a:lstStyle/>
+          <a:p>
+            <a:pPr algn="ctr"/>
+            <a:r>
+              <a:rPr lang="hu-HU" sz="6000" b="1" u="sng" dirty="0">
+                <a:solidFill>
+                  <a:srgbClr val="57C785"/>
+                </a:solidFill>
+                <a:latin typeface="Lucida Fax" panose="02060602050505020204" pitchFamily="18" charset="0"/>
+              </a:rPr>
+              <a:t>Tartalom:</a:t>
+            </a:r>
+          </a:p>
+        </p:txBody>
+      </p:sp>
+      <p:grpSp>
+        <p:nvGrpSpPr>
+          <p:cNvPr id="20" name="Group 19">
+            <a:extLst>
+              <a:ext uri="{FF2B5EF4-FFF2-40B4-BE49-F238E27FC236}">
+                <a16:creationId xmlns:a16="http://schemas.microsoft.com/office/drawing/2014/main" id="{A1A9A7C1-554E-4273-CCEF-048AE414D53F}"/>
+              </a:ext>
+            </a:extLst>
+          </p:cNvPr>
+          <p:cNvGrpSpPr/>
+          <p:nvPr/>
+        </p:nvGrpSpPr>
+        <p:grpSpPr>
+          <a:xfrm>
+            <a:off x="348946" y="341346"/>
+            <a:ext cx="11206239" cy="6193862"/>
+            <a:chOff x="348946" y="341346"/>
+            <a:chExt cx="11206239" cy="6193862"/>
+          </a:xfrm>
+        </p:grpSpPr>
+        <p:grpSp>
+          <p:nvGrpSpPr>
+            <p:cNvPr id="12" name="Group 11">
+              <a:extLst>
+                <a:ext uri="{FF2B5EF4-FFF2-40B4-BE49-F238E27FC236}">
+                  <a16:creationId xmlns:a16="http://schemas.microsoft.com/office/drawing/2014/main" id="{0ED5EF7D-2CD3-8B0C-B782-82F6678F5BCE}"/>
+                </a:ext>
+              </a:extLst>
+            </p:cNvPr>
+            <p:cNvGrpSpPr/>
+            <p:nvPr/>
+          </p:nvGrpSpPr>
+          <p:grpSpPr>
+            <a:xfrm>
+              <a:off x="348946" y="341346"/>
+              <a:ext cx="11206239" cy="6193862"/>
+              <a:chOff x="12473214" y="341346"/>
+              <a:chExt cx="11206239" cy="6193862"/>
+            </a:xfrm>
+          </p:grpSpPr>
+          <p:sp>
+            <p:nvSpPr>
+              <p:cNvPr id="8" name="!!feladat_megoszt">
+                <a:extLst>
+                  <a:ext uri="{FF2B5EF4-FFF2-40B4-BE49-F238E27FC236}">
+                    <a16:creationId xmlns:a16="http://schemas.microsoft.com/office/drawing/2014/main" id="{6A623061-8195-56E1-67E4-778B98391E87}"/>
+                  </a:ext>
+                </a:extLst>
+              </p:cNvPr>
+              <p:cNvSpPr/>
+              <p:nvPr/>
+            </p:nvSpPr>
+            <p:spPr>
+              <a:xfrm>
+                <a:off x="12473214" y="341346"/>
+                <a:ext cx="11206239" cy="6193862"/>
+              </a:xfrm>
+              <a:prstGeom prst="roundRect">
+                <a:avLst/>
+              </a:prstGeom>
+              <a:gradFill>
+                <a:gsLst>
+                  <a:gs pos="90000">
+                    <a:srgbClr val="296075"/>
+                  </a:gs>
+                  <a:gs pos="8000">
+                    <a:srgbClr val="296075"/>
+                  </a:gs>
+                  <a:gs pos="41000">
+                    <a:srgbClr val="57C785"/>
+                  </a:gs>
+                  <a:gs pos="62000">
+                    <a:srgbClr val="57C785"/>
+                  </a:gs>
+                </a:gsLst>
+                <a:lin ang="2400000" scaled="0"/>
+              </a:gradFill>
+              <a:ln w="19050">
+                <a:solidFill>
+                  <a:schemeClr val="bg1"/>
+                </a:solidFill>
+              </a:ln>
+              <a:effectLst>
+                <a:glow rad="101600">
+                  <a:schemeClr val="bg1">
+                    <a:alpha val="40000"/>
+                  </a:schemeClr>
+                </a:glow>
+              </a:effectLst>
+            </p:spPr>
+            <p:style>
+              <a:lnRef idx="2">
+                <a:schemeClr val="accent1">
+                  <a:shade val="50000"/>
+                </a:schemeClr>
+              </a:lnRef>
+              <a:fillRef idx="1">
+                <a:schemeClr val="accent1"/>
+              </a:fillRef>
+              <a:effectRef idx="0">
+                <a:schemeClr val="accent1"/>
+              </a:effectRef>
+              <a:fontRef idx="minor">
+                <a:schemeClr val="lt1"/>
+              </a:fontRef>
+            </p:style>
+            <p:txBody>
+              <a:bodyPr rtlCol="0" anchor="ctr"/>
+              <a:lstStyle/>
+              <a:p>
+                <a:pPr algn="ctr"/>
+                <a:endParaRPr lang="hu-HU" dirty="0">
+                  <a:latin typeface="Lucida Fax" panose="02060602050505020204" pitchFamily="18" charset="0"/>
+                </a:endParaRPr>
+              </a:p>
+            </p:txBody>
+          </p:sp>
+          <p:sp>
+            <p:nvSpPr>
+              <p:cNvPr id="9" name="Cím 1">
+                <a:extLst>
+                  <a:ext uri="{FF2B5EF4-FFF2-40B4-BE49-F238E27FC236}">
+                    <a16:creationId xmlns:a16="http://schemas.microsoft.com/office/drawing/2014/main" id="{478564C2-C9A6-4C71-62CB-18A4B7CBF7FD}"/>
+                  </a:ext>
+                </a:extLst>
+              </p:cNvPr>
+              <p:cNvSpPr txBox="1">
+                <a:spLocks/>
+              </p:cNvSpPr>
+              <p:nvPr/>
+            </p:nvSpPr>
+            <p:spPr>
+              <a:xfrm>
+                <a:off x="12818533" y="1211886"/>
+                <a:ext cx="10515600" cy="836210"/>
+              </a:xfrm>
+              <a:prstGeom prst="rect">
+                <a:avLst/>
+              </a:prstGeom>
+            </p:spPr>
+            <p:txBody>
+              <a:bodyPr/>
+              <a:lstStyle>
+                <a:lvl1pPr algn="l" defTabSz="914400" rtl="0" eaLnBrk="1" latinLnBrk="0" hangingPunct="1">
+                  <a:lnSpc>
+                    <a:spcPct val="90000"/>
+                  </a:lnSpc>
+                  <a:spcBef>
+                    <a:spcPct val="0"/>
+                  </a:spcBef>
+                  <a:buNone/>
+                  <a:defRPr sz="4400" kern="1200">
+                    <a:solidFill>
+                      <a:schemeClr val="tx1"/>
+                    </a:solidFill>
+                    <a:latin typeface="+mj-lt"/>
+                    <a:ea typeface="+mj-ea"/>
+                    <a:cs typeface="+mj-cs"/>
+                  </a:defRPr>
+                </a:lvl1pPr>
+              </a:lstStyle>
+              <a:p>
+                <a:r>
+                  <a:rPr lang="hu-HU" dirty="0">
+                    <a:solidFill>
+                      <a:schemeClr val="bg1"/>
+                    </a:solidFill>
+                    <a:latin typeface="Lucida Fax" panose="02060602050505020204" pitchFamily="18" charset="0"/>
+                  </a:rPr>
+                  <a:t>Feladat Megosztás:</a:t>
+                </a:r>
+              </a:p>
+            </p:txBody>
+          </p:sp>
+        </p:grpSp>
+        <p:sp>
+          <p:nvSpPr>
+            <p:cNvPr id="18" name="Tartalom helye 2">
+              <a:extLst>
+                <a:ext uri="{FF2B5EF4-FFF2-40B4-BE49-F238E27FC236}">
+                  <a16:creationId xmlns:a16="http://schemas.microsoft.com/office/drawing/2014/main" id="{620062D1-F581-B8B8-B7CC-E0360227D72F}"/>
+                </a:ext>
+              </a:extLst>
+            </p:cNvPr>
+            <p:cNvSpPr txBox="1">
+              <a:spLocks/>
+            </p:cNvSpPr>
+            <p:nvPr/>
+          </p:nvSpPr>
+          <p:spPr>
+            <a:xfrm>
+              <a:off x="2413000" y="2886848"/>
+              <a:ext cx="3683000" cy="3304367"/>
+            </a:xfrm>
+            <a:prstGeom prst="rect">
+              <a:avLst/>
+            </a:prstGeom>
+          </p:spPr>
+          <p:txBody>
+            <a:bodyPr/>
+            <a:lstStyle>
+              <a:lvl1pPr marL="228600" indent="-228600" algn="l" defTabSz="914400" rtl="0" eaLnBrk="1" latinLnBrk="0" hangingPunct="1">
+                <a:lnSpc>
+                  <a:spcPct val="90000"/>
+                </a:lnSpc>
+                <a:spcBef>
+                  <a:spcPts val="1000"/>
+                </a:spcBef>
+                <a:buFont typeface="Arial" panose="020B0604020202020204" pitchFamily="34" charset="0"/>
+                <a:buChar char="•"/>
+                <a:defRPr sz="2800" kern="1200">
+                  <a:solidFill>
+                    <a:schemeClr val="tx1"/>
+                  </a:solidFill>
+                  <a:latin typeface="+mn-lt"/>
+                  <a:ea typeface="+mn-ea"/>
+                  <a:cs typeface="+mn-cs"/>
+                </a:defRPr>
+              </a:lvl1pPr>
+              <a:lvl2pPr marL="685800" indent="-228600" algn="l" defTabSz="914400" rtl="0" eaLnBrk="1" latinLnBrk="0" hangingPunct="1">
+                <a:lnSpc>
+                  <a:spcPct val="90000"/>
+                </a:lnSpc>
+                <a:spcBef>
+                  <a:spcPts val="500"/>
+                </a:spcBef>
+                <a:buFont typeface="Arial" panose="020B0604020202020204" pitchFamily="34" charset="0"/>
+                <a:buChar char="•"/>
+                <a:defRPr sz="2400" kern="1200">
+                  <a:solidFill>
+                    <a:schemeClr val="tx1"/>
+                  </a:solidFill>
+                  <a:latin typeface="+mn-lt"/>
+                  <a:ea typeface="+mn-ea"/>
+                  <a:cs typeface="+mn-cs"/>
+                </a:defRPr>
+              </a:lvl2pPr>
+              <a:lvl3pPr marL="1143000" indent="-228600" algn="l" defTabSz="914400" rtl="0" eaLnBrk="1" latinLnBrk="0" hangingPunct="1">
+                <a:lnSpc>
+                  <a:spcPct val="90000"/>
+                </a:lnSpc>
+                <a:spcBef>
+                  <a:spcPts val="500"/>
+                </a:spcBef>
+                <a:buFont typeface="Arial" panose="020B0604020202020204" pitchFamily="34" charset="0"/>
+                <a:buChar char="•"/>
+                <a:defRPr sz="2000" kern="1200">
+                  <a:solidFill>
+                    <a:schemeClr val="tx1"/>
+                  </a:solidFill>
+                  <a:latin typeface="+mn-lt"/>
+                  <a:ea typeface="+mn-ea"/>
+                  <a:cs typeface="+mn-cs"/>
+                </a:defRPr>
+              </a:lvl3pPr>
+              <a:lvl4pPr marL="1600200" indent="-228600" algn="l" defTabSz="914400" rtl="0" eaLnBrk="1" latinLnBrk="0" hangingPunct="1">
+                <a:lnSpc>
+                  <a:spcPct val="90000"/>
+                </a:lnSpc>
+                <a:spcBef>
+                  <a:spcPts val="500"/>
+                </a:spcBef>
+                <a:buFont typeface="Arial" panose="020B0604020202020204" pitchFamily="34" charset="0"/>
+                <a:buChar char="•"/>
+                <a:defRPr sz="1800" kern="1200">
+                  <a:solidFill>
+                    <a:schemeClr val="tx1"/>
+                  </a:solidFill>
+                  <a:latin typeface="+mn-lt"/>
+                  <a:ea typeface="+mn-ea"/>
+                  <a:cs typeface="+mn-cs"/>
+                </a:defRPr>
+              </a:lvl4pPr>
+              <a:lvl5pPr marL="2057400" indent="-228600" algn="l" defTabSz="914400" rtl="0" eaLnBrk="1" latinLnBrk="0" hangingPunct="1">
+                <a:lnSpc>
+                  <a:spcPct val="90000"/>
+                </a:lnSpc>
+                <a:spcBef>
+                  <a:spcPts val="500"/>
+                </a:spcBef>
+                <a:buFont typeface="Arial" panose="020B0604020202020204" pitchFamily="34" charset="0"/>
+                <a:buChar char="•"/>
+                <a:defRPr sz="1800" kern="1200">
+                  <a:solidFill>
+                    <a:schemeClr val="tx1"/>
+                  </a:solidFill>
+                  <a:latin typeface="+mn-lt"/>
+                  <a:ea typeface="+mn-ea"/>
+                  <a:cs typeface="+mn-cs"/>
+                </a:defRPr>
+              </a:lvl5pPr>
+              <a:lvl6pPr marL="2514600" indent="-228600" algn="l" defTabSz="914400" rtl="0" eaLnBrk="1" latinLnBrk="0" hangingPunct="1">
+                <a:lnSpc>
+                  <a:spcPct val="90000"/>
+                </a:lnSpc>
+                <a:spcBef>
+                  <a:spcPts val="500"/>
+                </a:spcBef>
+                <a:buFont typeface="Arial" panose="020B0604020202020204" pitchFamily="34" charset="0"/>
+                <a:buChar char="•"/>
+                <a:defRPr sz="1800" kern="1200">
+                  <a:solidFill>
+                    <a:schemeClr val="tx1"/>
+                  </a:solidFill>
+                  <a:latin typeface="+mn-lt"/>
+                  <a:ea typeface="+mn-ea"/>
+                  <a:cs typeface="+mn-cs"/>
+                </a:defRPr>
+              </a:lvl6pPr>
+              <a:lvl7pPr marL="2971800" indent="-228600" algn="l" defTabSz="914400" rtl="0" eaLnBrk="1" latinLnBrk="0" hangingPunct="1">
+                <a:lnSpc>
+                  <a:spcPct val="90000"/>
+                </a:lnSpc>
+                <a:spcBef>
+                  <a:spcPts val="500"/>
+                </a:spcBef>
+                <a:buFont typeface="Arial" panose="020B0604020202020204" pitchFamily="34" charset="0"/>
+                <a:buChar char="•"/>
+                <a:defRPr sz="1800" kern="1200">
+                  <a:solidFill>
+                    <a:schemeClr val="tx1"/>
+                  </a:solidFill>
+                  <a:latin typeface="+mn-lt"/>
+                  <a:ea typeface="+mn-ea"/>
+                  <a:cs typeface="+mn-cs"/>
+                </a:defRPr>
+              </a:lvl7pPr>
+              <a:lvl8pPr marL="3429000" indent="-228600" algn="l" defTabSz="914400" rtl="0" eaLnBrk="1" latinLnBrk="0" hangingPunct="1">
+                <a:lnSpc>
+                  <a:spcPct val="90000"/>
+                </a:lnSpc>
+                <a:spcBef>
+                  <a:spcPts val="500"/>
+                </a:spcBef>
+                <a:buFont typeface="Arial" panose="020B0604020202020204" pitchFamily="34" charset="0"/>
+                <a:buChar char="•"/>
+                <a:defRPr sz="1800" kern="1200">
+                  <a:solidFill>
+                    <a:schemeClr val="tx1"/>
+                  </a:solidFill>
+                  <a:latin typeface="+mn-lt"/>
+                  <a:ea typeface="+mn-ea"/>
+                  <a:cs typeface="+mn-cs"/>
+                </a:defRPr>
+              </a:lvl8pPr>
+              <a:lvl9pPr marL="3886200" indent="-228600" algn="l" defTabSz="914400" rtl="0" eaLnBrk="1" latinLnBrk="0" hangingPunct="1">
+                <a:lnSpc>
+                  <a:spcPct val="90000"/>
+                </a:lnSpc>
+                <a:spcBef>
+                  <a:spcPts val="500"/>
+                </a:spcBef>
+                <a:buFont typeface="Arial" panose="020B0604020202020204" pitchFamily="34" charset="0"/>
+                <a:buChar char="•"/>
+                <a:defRPr sz="1800" kern="1200">
+                  <a:solidFill>
+                    <a:schemeClr val="tx1"/>
+                  </a:solidFill>
+                  <a:latin typeface="+mn-lt"/>
+                  <a:ea typeface="+mn-ea"/>
+                  <a:cs typeface="+mn-cs"/>
+                </a:defRPr>
+              </a:lvl9pPr>
+            </a:lstStyle>
+            <a:p>
+              <a:pPr marL="0" indent="0">
+                <a:buFont typeface="Arial" panose="020B0604020202020204" pitchFamily="34" charset="0"/>
+                <a:buNone/>
+              </a:pPr>
+              <a:r>
+                <a:rPr lang="hu-HU">
+                  <a:solidFill>
+                    <a:schemeClr val="bg1"/>
+                  </a:solidFill>
+                  <a:latin typeface="Lucida Fax" panose="02060602050505020204" pitchFamily="18" charset="0"/>
+                </a:rPr>
+                <a:t>Tihamér:</a:t>
+              </a:r>
+            </a:p>
+            <a:p>
+              <a:pPr>
+                <a:buClr>
+                  <a:schemeClr val="bg1"/>
+                </a:buClr>
+                <a:buFont typeface="Lucida Fax" panose="02060602050505020204" pitchFamily="18" charset="0"/>
+                <a:buChar char="»"/>
+              </a:pPr>
+              <a:r>
+                <a:rPr lang="hu-HU">
+                  <a:solidFill>
+                    <a:schemeClr val="bg1"/>
+                  </a:solidFill>
+                  <a:latin typeface="Lucida Fax" panose="02060602050505020204" pitchFamily="18" charset="0"/>
+                </a:rPr>
+                <a:t>Html</a:t>
+              </a:r>
+            </a:p>
+            <a:p>
+              <a:pPr>
+                <a:buClr>
+                  <a:schemeClr val="bg1"/>
+                </a:buClr>
+                <a:buFont typeface="Lucida Fax" panose="02060602050505020204" pitchFamily="18" charset="0"/>
+                <a:buChar char="»"/>
+              </a:pPr>
+              <a:r>
+                <a:rPr lang="hu-HU">
+                  <a:solidFill>
+                    <a:schemeClr val="bg1"/>
+                  </a:solidFill>
+                  <a:latin typeface="Lucida Fax" panose="02060602050505020204" pitchFamily="18" charset="0"/>
+                </a:rPr>
+                <a:t>Css</a:t>
+              </a:r>
+            </a:p>
+            <a:p>
+              <a:pPr>
+                <a:buClr>
+                  <a:schemeClr val="bg1"/>
+                </a:buClr>
+                <a:buFont typeface="Lucida Fax" panose="02060602050505020204" pitchFamily="18" charset="0"/>
+                <a:buChar char="»"/>
+              </a:pPr>
+              <a:r>
+                <a:rPr lang="hu-HU">
+                  <a:solidFill>
+                    <a:schemeClr val="bg1"/>
+                  </a:solidFill>
+                  <a:latin typeface="Lucida Fax" panose="02060602050505020204" pitchFamily="18" charset="0"/>
+                </a:rPr>
+                <a:t>Github</a:t>
+              </a:r>
+            </a:p>
+            <a:p>
+              <a:pPr>
+                <a:buClr>
+                  <a:schemeClr val="bg1"/>
+                </a:buClr>
+                <a:buFont typeface="Lucida Fax" panose="02060602050505020204" pitchFamily="18" charset="0"/>
+                <a:buChar char="»"/>
+              </a:pPr>
+              <a:endParaRPr lang="hu-HU" dirty="0">
+                <a:solidFill>
+                  <a:schemeClr val="bg1"/>
+                </a:solidFill>
+                <a:latin typeface="Lucida Fax" panose="02060602050505020204" pitchFamily="18" charset="0"/>
+              </a:endParaRPr>
+            </a:p>
+          </p:txBody>
+        </p:sp>
+        <p:sp>
+          <p:nvSpPr>
+            <p:cNvPr id="19" name="Tartalom helye 3">
+              <a:extLst>
+                <a:ext uri="{FF2B5EF4-FFF2-40B4-BE49-F238E27FC236}">
+                  <a16:creationId xmlns:a16="http://schemas.microsoft.com/office/drawing/2014/main" id="{094E7BAD-5D9B-A47B-6214-0C524779B1C6}"/>
+                </a:ext>
+              </a:extLst>
+            </p:cNvPr>
+            <p:cNvSpPr txBox="1">
+              <a:spLocks/>
+            </p:cNvSpPr>
+            <p:nvPr/>
+          </p:nvSpPr>
+          <p:spPr>
+            <a:xfrm>
+              <a:off x="6334664" y="2886848"/>
+              <a:ext cx="3683000" cy="3304368"/>
+            </a:xfrm>
+            <a:prstGeom prst="rect">
+              <a:avLst/>
+            </a:prstGeom>
+          </p:spPr>
+          <p:txBody>
+            <a:bodyPr/>
+            <a:lstStyle>
+              <a:lvl1pPr marL="228600" indent="-228600" algn="l" defTabSz="914400" rtl="0" eaLnBrk="1" latinLnBrk="0" hangingPunct="1">
+                <a:lnSpc>
+                  <a:spcPct val="90000"/>
+                </a:lnSpc>
+                <a:spcBef>
+                  <a:spcPts val="1000"/>
+                </a:spcBef>
+                <a:buFont typeface="Arial" panose="020B0604020202020204" pitchFamily="34" charset="0"/>
+                <a:buChar char="•"/>
+                <a:defRPr sz="2800" kern="1200">
+                  <a:solidFill>
+                    <a:schemeClr val="tx1"/>
+                  </a:solidFill>
+                  <a:latin typeface="+mn-lt"/>
+                  <a:ea typeface="+mn-ea"/>
+                  <a:cs typeface="+mn-cs"/>
+                </a:defRPr>
+              </a:lvl1pPr>
+              <a:lvl2pPr marL="685800" indent="-228600" algn="l" defTabSz="914400" rtl="0" eaLnBrk="1" latinLnBrk="0" hangingPunct="1">
+                <a:lnSpc>
+                  <a:spcPct val="90000"/>
+                </a:lnSpc>
+                <a:spcBef>
+                  <a:spcPts val="500"/>
+                </a:spcBef>
+                <a:buFont typeface="Arial" panose="020B0604020202020204" pitchFamily="34" charset="0"/>
+                <a:buChar char="•"/>
+                <a:defRPr sz="2400" kern="1200">
+                  <a:solidFill>
+                    <a:schemeClr val="tx1"/>
+                  </a:solidFill>
+                  <a:latin typeface="+mn-lt"/>
+                  <a:ea typeface="+mn-ea"/>
+                  <a:cs typeface="+mn-cs"/>
+                </a:defRPr>
+              </a:lvl2pPr>
+              <a:lvl3pPr marL="1143000" indent="-228600" algn="l" defTabSz="914400" rtl="0" eaLnBrk="1" latinLnBrk="0" hangingPunct="1">
+                <a:lnSpc>
+                  <a:spcPct val="90000"/>
+                </a:lnSpc>
+                <a:spcBef>
+                  <a:spcPts val="500"/>
+                </a:spcBef>
+                <a:buFont typeface="Arial" panose="020B0604020202020204" pitchFamily="34" charset="0"/>
+                <a:buChar char="•"/>
+                <a:defRPr sz="2000" kern="1200">
+                  <a:solidFill>
+                    <a:schemeClr val="tx1"/>
+                  </a:solidFill>
+                  <a:latin typeface="+mn-lt"/>
+                  <a:ea typeface="+mn-ea"/>
+                  <a:cs typeface="+mn-cs"/>
+                </a:defRPr>
+              </a:lvl3pPr>
+              <a:lvl4pPr marL="1600200" indent="-228600" algn="l" defTabSz="914400" rtl="0" eaLnBrk="1" latinLnBrk="0" hangingPunct="1">
+                <a:lnSpc>
+                  <a:spcPct val="90000"/>
+                </a:lnSpc>
+                <a:spcBef>
+                  <a:spcPts val="500"/>
+                </a:spcBef>
+                <a:buFont typeface="Arial" panose="020B0604020202020204" pitchFamily="34" charset="0"/>
+                <a:buChar char="•"/>
+                <a:defRPr sz="1800" kern="1200">
+                  <a:solidFill>
+                    <a:schemeClr val="tx1"/>
+                  </a:solidFill>
+                  <a:latin typeface="+mn-lt"/>
+                  <a:ea typeface="+mn-ea"/>
+                  <a:cs typeface="+mn-cs"/>
+                </a:defRPr>
+              </a:lvl4pPr>
+              <a:lvl5pPr marL="2057400" indent="-228600" algn="l" defTabSz="914400" rtl="0" eaLnBrk="1" latinLnBrk="0" hangingPunct="1">
+                <a:lnSpc>
+                  <a:spcPct val="90000"/>
+                </a:lnSpc>
+                <a:spcBef>
+                  <a:spcPts val="500"/>
+                </a:spcBef>
+                <a:buFont typeface="Arial" panose="020B0604020202020204" pitchFamily="34" charset="0"/>
+                <a:buChar char="•"/>
+                <a:defRPr sz="1800" kern="1200">
+                  <a:solidFill>
+                    <a:schemeClr val="tx1"/>
+                  </a:solidFill>
+                  <a:latin typeface="+mn-lt"/>
+                  <a:ea typeface="+mn-ea"/>
+                  <a:cs typeface="+mn-cs"/>
+                </a:defRPr>
+              </a:lvl5pPr>
+              <a:lvl6pPr marL="2514600" indent="-228600" algn="l" defTabSz="914400" rtl="0" eaLnBrk="1" latinLnBrk="0" hangingPunct="1">
+                <a:lnSpc>
+                  <a:spcPct val="90000"/>
+                </a:lnSpc>
+                <a:spcBef>
+                  <a:spcPts val="500"/>
+                </a:spcBef>
+                <a:buFont typeface="Arial" panose="020B0604020202020204" pitchFamily="34" charset="0"/>
+                <a:buChar char="•"/>
+                <a:defRPr sz="1800" kern="1200">
+                  <a:solidFill>
+                    <a:schemeClr val="tx1"/>
+                  </a:solidFill>
+                  <a:latin typeface="+mn-lt"/>
+                  <a:ea typeface="+mn-ea"/>
+                  <a:cs typeface="+mn-cs"/>
+                </a:defRPr>
+              </a:lvl6pPr>
+              <a:lvl7pPr marL="2971800" indent="-228600" algn="l" defTabSz="914400" rtl="0" eaLnBrk="1" latinLnBrk="0" hangingPunct="1">
+                <a:lnSpc>
+                  <a:spcPct val="90000"/>
+                </a:lnSpc>
+                <a:spcBef>
+                  <a:spcPts val="500"/>
+                </a:spcBef>
+                <a:buFont typeface="Arial" panose="020B0604020202020204" pitchFamily="34" charset="0"/>
+                <a:buChar char="•"/>
+                <a:defRPr sz="1800" kern="1200">
+                  <a:solidFill>
+                    <a:schemeClr val="tx1"/>
+                  </a:solidFill>
+                  <a:latin typeface="+mn-lt"/>
+                  <a:ea typeface="+mn-ea"/>
+                  <a:cs typeface="+mn-cs"/>
+                </a:defRPr>
+              </a:lvl7pPr>
+              <a:lvl8pPr marL="3429000" indent="-228600" algn="l" defTabSz="914400" rtl="0" eaLnBrk="1" latinLnBrk="0" hangingPunct="1">
+                <a:lnSpc>
+                  <a:spcPct val="90000"/>
+                </a:lnSpc>
+                <a:spcBef>
+                  <a:spcPts val="500"/>
+                </a:spcBef>
+                <a:buFont typeface="Arial" panose="020B0604020202020204" pitchFamily="34" charset="0"/>
+                <a:buChar char="•"/>
+                <a:defRPr sz="1800" kern="1200">
+                  <a:solidFill>
+                    <a:schemeClr val="tx1"/>
+                  </a:solidFill>
+                  <a:latin typeface="+mn-lt"/>
+                  <a:ea typeface="+mn-ea"/>
+                  <a:cs typeface="+mn-cs"/>
+                </a:defRPr>
+              </a:lvl8pPr>
+              <a:lvl9pPr marL="3886200" indent="-228600" algn="l" defTabSz="914400" rtl="0" eaLnBrk="1" latinLnBrk="0" hangingPunct="1">
+                <a:lnSpc>
+                  <a:spcPct val="90000"/>
+                </a:lnSpc>
+                <a:spcBef>
+                  <a:spcPts val="500"/>
+                </a:spcBef>
+                <a:buFont typeface="Arial" panose="020B0604020202020204" pitchFamily="34" charset="0"/>
+                <a:buChar char="•"/>
+                <a:defRPr sz="1800" kern="1200">
+                  <a:solidFill>
+                    <a:schemeClr val="tx1"/>
+                  </a:solidFill>
+                  <a:latin typeface="+mn-lt"/>
+                  <a:ea typeface="+mn-ea"/>
+                  <a:cs typeface="+mn-cs"/>
+                </a:defRPr>
+              </a:lvl9pPr>
+            </a:lstStyle>
+            <a:p>
+              <a:pPr marL="0" indent="0">
+                <a:buFont typeface="Arial" panose="020B0604020202020204" pitchFamily="34" charset="0"/>
+                <a:buNone/>
+              </a:pPr>
+              <a:r>
+                <a:rPr lang="hu-HU">
+                  <a:solidFill>
+                    <a:schemeClr val="bg1"/>
+                  </a:solidFill>
+                  <a:latin typeface="Lucida Fax" panose="02060602050505020204" pitchFamily="18" charset="0"/>
+                </a:rPr>
+                <a:t>Levente:</a:t>
+              </a:r>
+            </a:p>
+            <a:p>
+              <a:pPr>
+                <a:buClr>
+                  <a:schemeClr val="bg1"/>
+                </a:buClr>
+                <a:buFont typeface="Lucida Fax" panose="02060602050505020204" pitchFamily="18" charset="0"/>
+                <a:buChar char="»"/>
+              </a:pPr>
+              <a:r>
+                <a:rPr lang="hu-HU">
+                  <a:solidFill>
+                    <a:schemeClr val="bg1"/>
+                  </a:solidFill>
+                  <a:latin typeface="Lucida Fax" panose="02060602050505020204" pitchFamily="18" charset="0"/>
+                </a:rPr>
+                <a:t>Java</a:t>
+              </a:r>
+            </a:p>
+            <a:p>
+              <a:pPr>
+                <a:buClr>
+                  <a:schemeClr val="bg1"/>
+                </a:buClr>
+                <a:buFont typeface="Lucida Fax" panose="02060602050505020204" pitchFamily="18" charset="0"/>
+                <a:buChar char="»"/>
+              </a:pPr>
+              <a:r>
+                <a:rPr lang="hu-HU">
+                  <a:solidFill>
+                    <a:schemeClr val="bg1"/>
+                  </a:solidFill>
+                  <a:latin typeface="Lucida Fax" panose="02060602050505020204" pitchFamily="18" charset="0"/>
+                </a:rPr>
+                <a:t>Css</a:t>
+              </a:r>
+            </a:p>
+            <a:p>
+              <a:pPr>
+                <a:buClr>
+                  <a:schemeClr val="bg1"/>
+                </a:buClr>
+                <a:buFont typeface="Lucida Fax" panose="02060602050505020204" pitchFamily="18" charset="0"/>
+                <a:buChar char="»"/>
+              </a:pPr>
+              <a:r>
+                <a:rPr lang="hu-HU">
+                  <a:solidFill>
+                    <a:schemeClr val="bg1"/>
+                  </a:solidFill>
+                  <a:latin typeface="Lucida Fax" panose="02060602050505020204" pitchFamily="18" charset="0"/>
+                </a:rPr>
+                <a:t>Figma</a:t>
+              </a:r>
+              <a:endParaRPr lang="hu-HU" dirty="0">
+                <a:solidFill>
+                  <a:schemeClr val="bg1"/>
+                </a:solidFill>
+                <a:latin typeface="Lucida Fax" panose="02060602050505020204" pitchFamily="18" charset="0"/>
+              </a:endParaRPr>
+            </a:p>
+          </p:txBody>
+        </p:sp>
+      </p:grpSp>
+    </p:spTree>
+    <p:extLst>
+      <p:ext uri="{BB962C8B-B14F-4D97-AF65-F5344CB8AC3E}">
+        <p14:creationId xmlns:p14="http://schemas.microsoft.com/office/powerpoint/2010/main" val="1029406870"/>
+      </p:ext>
+    </p:extLst>
+  </p:cSld>
+  <p:clrMapOvr>
+    <a:masterClrMapping/>
+  </p:clrMapOvr>
+  <mc:AlternateContent xmlns:mc="http://schemas.openxmlformats.org/markup-compatibility/2006">
+    <mc:Choice xmlns:p14="http://schemas.microsoft.com/office/powerpoint/2010/main" Requires="p14">
+      <p:transition p14:dur="10" advClick="0" advTm="5000"/>
+    </mc:Choice>
+    <mc:Fallback>
+      <p:transition advClick="0" advTm="5000"/>
+    </mc:Fallback>
+  </mc:AlternateContent>
+  <p:timing>
+    <p:tnLst>
+      <p:par>
+        <p:cTn id="1" dur="indefinite" restart="never" nodeType="tmRoot">
+          <p:childTnLst>
+            <p:seq concurrent="1" nextAc="seek">
+              <p:cTn id="2" dur="indefinite" nodeType="mainSeq">
+                <p:childTnLst>
+                  <p:par>
+                    <p:cTn id="3" fill="hold">
+                      <p:stCondLst>
+                        <p:cond delay="indefinite"/>
+                        <p:cond evt="onBegin" delay="0">
+                          <p:tn val="2"/>
+                        </p:cond>
+                      </p:stCondLst>
+                      <p:childTnLst>
+                        <p:par>
+                          <p:cTn id="4" fill="hold">
+                            <p:stCondLst>
+                              <p:cond delay="0"/>
+                            </p:stCondLst>
+                            <p:childTnLst>
+                              <p:par>
+                                <p:cTn id="5" presetID="31" presetClass="exit" presetSubtype="0" fill="hold" nodeType="afterEffect">
+                                  <p:stCondLst>
+                                    <p:cond delay="0"/>
+                                  </p:stCondLst>
+                                  <p:childTnLst>
+                                    <p:anim calcmode="lin" valueType="num">
+                                      <p:cBhvr>
+                                        <p:cTn id="6" dur="1000"/>
+                                        <p:tgtEl>
+                                          <p:spTgt spid="20"/>
+                                        </p:tgtEl>
+                                        <p:attrNameLst>
+                                          <p:attrName>ppt_w</p:attrName>
+                                        </p:attrNameLst>
+                                      </p:cBhvr>
+                                      <p:tavLst>
+                                        <p:tav tm="0">
+                                          <p:val>
+                                            <p:strVal val="ppt_w"/>
+                                          </p:val>
+                                        </p:tav>
+                                        <p:tav tm="100000">
+                                          <p:val>
+                                            <p:fltVal val="0"/>
+                                          </p:val>
+                                        </p:tav>
+                                      </p:tavLst>
+                                    </p:anim>
+                                    <p:anim calcmode="lin" valueType="num">
+                                      <p:cBhvr>
+                                        <p:cTn id="7" dur="1000"/>
+                                        <p:tgtEl>
+                                          <p:spTgt spid="20"/>
+                                        </p:tgtEl>
+                                        <p:attrNameLst>
+                                          <p:attrName>ppt_h</p:attrName>
+                                        </p:attrNameLst>
+                                      </p:cBhvr>
+                                      <p:tavLst>
+                                        <p:tav tm="0">
+                                          <p:val>
+                                            <p:strVal val="ppt_h"/>
+                                          </p:val>
+                                        </p:tav>
+                                        <p:tav tm="100000">
+                                          <p:val>
+                                            <p:fltVal val="0"/>
+                                          </p:val>
+                                        </p:tav>
+                                      </p:tavLst>
+                                    </p:anim>
+                                    <p:anim calcmode="lin" valueType="num">
+                                      <p:cBhvr>
+                                        <p:cTn id="8" dur="1000"/>
+                                        <p:tgtEl>
+                                          <p:spTgt spid="20"/>
+                                        </p:tgtEl>
+                                        <p:attrNameLst>
+                                          <p:attrName>style.rotation</p:attrName>
+                                        </p:attrNameLst>
+                                      </p:cBhvr>
+                                      <p:tavLst>
+                                        <p:tav tm="0">
+                                          <p:val>
+                                            <p:fltVal val="0"/>
+                                          </p:val>
+                                        </p:tav>
+                                        <p:tav tm="100000">
+                                          <p:val>
+                                            <p:fltVal val="90"/>
+                                          </p:val>
+                                        </p:tav>
+                                      </p:tavLst>
+                                    </p:anim>
+                                    <p:animEffect transition="out" filter="fade">
+                                      <p:cBhvr>
+                                        <p:cTn id="9" dur="1000"/>
+                                        <p:tgtEl>
+                                          <p:spTgt spid="20"/>
+                                        </p:tgtEl>
+                                      </p:cBhvr>
+                                    </p:animEffect>
+                                    <p:set>
+                                      <p:cBhvr>
+                                        <p:cTn id="10" dur="1" fill="hold">
+                                          <p:stCondLst>
+                                            <p:cond delay="999"/>
+                                          </p:stCondLst>
+                                        </p:cTn>
+                                        <p:tgtEl>
+                                          <p:spTgt spid="20"/>
+                                        </p:tgtEl>
+                                        <p:attrNameLst>
+                                          <p:attrName>style.visibility</p:attrName>
+                                        </p:attrNameLst>
+                                      </p:cBhvr>
+                                      <p:to>
+                                        <p:strVal val="hidden"/>
+                                      </p:to>
+                                    </p:set>
+                                  </p:childTnLst>
+                                </p:cTn>
+                              </p:par>
+                            </p:childTnLst>
+                          </p:cTn>
+                        </p:par>
+                        <p:par>
+                          <p:cTn id="11" fill="hold">
+                            <p:stCondLst>
+                              <p:cond delay="1000"/>
+                            </p:stCondLst>
+                            <p:childTnLst>
+                              <p:par>
+                                <p:cTn id="12" presetID="10" presetClass="entr" presetSubtype="0" fill="hold" grpId="0" nodeType="afterEffect">
+                                  <p:stCondLst>
+                                    <p:cond delay="750"/>
+                                  </p:stCondLst>
+                                  <p:childTnLst>
+                                    <p:set>
+                                      <p:cBhvr>
+                                        <p:cTn id="13" dur="1" fill="hold">
+                                          <p:stCondLst>
+                                            <p:cond delay="0"/>
+                                          </p:stCondLst>
+                                        </p:cTn>
+                                        <p:tgtEl>
+                                          <p:spTgt spid="7"/>
+                                        </p:tgtEl>
+                                        <p:attrNameLst>
+                                          <p:attrName>style.visibility</p:attrName>
+                                        </p:attrNameLst>
+                                      </p:cBhvr>
+                                      <p:to>
+                                        <p:strVal val="visible"/>
+                                      </p:to>
+                                    </p:set>
+                                    <p:animEffect transition="in" filter="fade">
+                                      <p:cBhvr>
+                                        <p:cTn id="14" dur="500"/>
+                                        <p:tgtEl>
+                                          <p:spTgt spid="7"/>
+                                        </p:tgtEl>
+                                      </p:cBhvr>
+                                    </p:animEffect>
+                                  </p:childTnLst>
+                                </p:cTn>
+                              </p:par>
+                              <p:par>
+                                <p:cTn id="15" presetID="2" presetClass="entr" presetSubtype="4" fill="hold" grpId="0" nodeType="withEffect">
+                                  <p:stCondLst>
+                                    <p:cond delay="750"/>
+                                  </p:stCondLst>
+                                  <p:childTnLst>
+                                    <p:set>
+                                      <p:cBhvr>
+                                        <p:cTn id="16" dur="1" fill="hold">
+                                          <p:stCondLst>
+                                            <p:cond delay="0"/>
+                                          </p:stCondLst>
+                                        </p:cTn>
+                                        <p:tgtEl>
+                                          <p:spTgt spid="2"/>
+                                        </p:tgtEl>
+                                        <p:attrNameLst>
+                                          <p:attrName>style.visibility</p:attrName>
+                                        </p:attrNameLst>
+                                      </p:cBhvr>
+                                      <p:to>
+                                        <p:strVal val="visible"/>
+                                      </p:to>
+                                    </p:set>
+                                    <p:anim calcmode="lin" valueType="num">
+                                      <p:cBhvr additive="base">
+                                        <p:cTn id="17" dur="500" fill="hold"/>
+                                        <p:tgtEl>
+                                          <p:spTgt spid="2"/>
+                                        </p:tgtEl>
+                                        <p:attrNameLst>
+                                          <p:attrName>ppt_x</p:attrName>
+                                        </p:attrNameLst>
+                                      </p:cBhvr>
+                                      <p:tavLst>
+                                        <p:tav tm="0">
+                                          <p:val>
+                                            <p:strVal val="#ppt_x"/>
+                                          </p:val>
+                                        </p:tav>
+                                        <p:tav tm="100000">
+                                          <p:val>
+                                            <p:strVal val="#ppt_x"/>
+                                          </p:val>
+                                        </p:tav>
+                                      </p:tavLst>
+                                    </p:anim>
+                                    <p:anim calcmode="lin" valueType="num">
+                                      <p:cBhvr additive="base">
+                                        <p:cTn id="18" dur="500" fill="hold"/>
+                                        <p:tgtEl>
+                                          <p:spTgt spid="2"/>
+                                        </p:tgtEl>
+                                        <p:attrNameLst>
+                                          <p:attrName>ppt_y</p:attrName>
+                                        </p:attrNameLst>
+                                      </p:cBhvr>
+                                      <p:tavLst>
+                                        <p:tav tm="0">
+                                          <p:val>
+                                            <p:strVal val="1+#ppt_h/2"/>
+                                          </p:val>
+                                        </p:tav>
+                                        <p:tav tm="100000">
+                                          <p:val>
+                                            <p:strVal val="#ppt_y"/>
+                                          </p:val>
+                                        </p:tav>
+                                      </p:tavLst>
+                                    </p:anim>
+                                  </p:childTnLst>
+                                </p:cTn>
+                              </p:par>
+                              <p:par>
+                                <p:cTn id="19" presetID="2" presetClass="entr" presetSubtype="4" fill="hold" grpId="0" nodeType="withEffect">
+                                  <p:stCondLst>
+                                    <p:cond delay="750"/>
+                                  </p:stCondLst>
+                                  <p:childTnLst>
+                                    <p:set>
+                                      <p:cBhvr>
+                                        <p:cTn id="20" dur="1" fill="hold">
+                                          <p:stCondLst>
+                                            <p:cond delay="0"/>
+                                          </p:stCondLst>
+                                        </p:cTn>
+                                        <p:tgtEl>
+                                          <p:spTgt spid="3"/>
+                                        </p:tgtEl>
+                                        <p:attrNameLst>
+                                          <p:attrName>style.visibility</p:attrName>
+                                        </p:attrNameLst>
+                                      </p:cBhvr>
+                                      <p:to>
+                                        <p:strVal val="visible"/>
+                                      </p:to>
+                                    </p:set>
+                                    <p:anim calcmode="lin" valueType="num">
+                                      <p:cBhvr additive="base">
+                                        <p:cTn id="21" dur="500" fill="hold"/>
+                                        <p:tgtEl>
+                                          <p:spTgt spid="3"/>
+                                        </p:tgtEl>
+                                        <p:attrNameLst>
+                                          <p:attrName>ppt_x</p:attrName>
+                                        </p:attrNameLst>
+                                      </p:cBhvr>
+                                      <p:tavLst>
+                                        <p:tav tm="0">
+                                          <p:val>
+                                            <p:strVal val="#ppt_x"/>
+                                          </p:val>
+                                        </p:tav>
+                                        <p:tav tm="100000">
+                                          <p:val>
+                                            <p:strVal val="#ppt_x"/>
+                                          </p:val>
+                                        </p:tav>
+                                      </p:tavLst>
+                                    </p:anim>
+                                    <p:anim calcmode="lin" valueType="num">
+                                      <p:cBhvr additive="base">
+                                        <p:cTn id="22" dur="500" fill="hold"/>
+                                        <p:tgtEl>
+                                          <p:spTgt spid="3"/>
+                                        </p:tgtEl>
+                                        <p:attrNameLst>
+                                          <p:attrName>ppt_y</p:attrName>
+                                        </p:attrNameLst>
+                                      </p:cBhvr>
+                                      <p:tavLst>
+                                        <p:tav tm="0">
+                                          <p:val>
+                                            <p:strVal val="1+#ppt_h/2"/>
+                                          </p:val>
+                                        </p:tav>
+                                        <p:tav tm="100000">
+                                          <p:val>
+                                            <p:strVal val="#ppt_y"/>
+                                          </p:val>
+                                        </p:tav>
+                                      </p:tavLst>
+                                    </p:anim>
+                                  </p:childTnLst>
+                                </p:cTn>
+                              </p:par>
+                              <p:par>
+                                <p:cTn id="23" presetID="2" presetClass="entr" presetSubtype="4" fill="hold" nodeType="withEffect">
+                                  <p:stCondLst>
+                                    <p:cond delay="750"/>
+                                  </p:stCondLst>
+                                  <p:childTnLst>
+                                    <p:set>
+                                      <p:cBhvr>
+                                        <p:cTn id="24" dur="1" fill="hold">
+                                          <p:stCondLst>
+                                            <p:cond delay="0"/>
+                                          </p:stCondLst>
+                                        </p:cTn>
+                                        <p:tgtEl>
+                                          <p:spTgt spid="17"/>
+                                        </p:tgtEl>
+                                        <p:attrNameLst>
+                                          <p:attrName>style.visibility</p:attrName>
+                                        </p:attrNameLst>
+                                      </p:cBhvr>
+                                      <p:to>
+                                        <p:strVal val="visible"/>
+                                      </p:to>
+                                    </p:set>
+                                    <p:anim calcmode="lin" valueType="num">
+                                      <p:cBhvr additive="base">
+                                        <p:cTn id="25" dur="500" fill="hold"/>
+                                        <p:tgtEl>
+                                          <p:spTgt spid="17"/>
+                                        </p:tgtEl>
+                                        <p:attrNameLst>
+                                          <p:attrName>ppt_x</p:attrName>
+                                        </p:attrNameLst>
+                                      </p:cBhvr>
+                                      <p:tavLst>
+                                        <p:tav tm="0">
+                                          <p:val>
+                                            <p:strVal val="#ppt_x"/>
+                                          </p:val>
+                                        </p:tav>
+                                        <p:tav tm="100000">
+                                          <p:val>
+                                            <p:strVal val="#ppt_x"/>
+                                          </p:val>
+                                        </p:tav>
+                                      </p:tavLst>
+                                    </p:anim>
+                                    <p:anim calcmode="lin" valueType="num">
+                                      <p:cBhvr additive="base">
+                                        <p:cTn id="26" dur="500" fill="hold"/>
+                                        <p:tgtEl>
+                                          <p:spTgt spid="17"/>
+                                        </p:tgtEl>
+                                        <p:attrNameLst>
+                                          <p:attrName>ppt_y</p:attrName>
+                                        </p:attrNameLst>
+                                      </p:cBhvr>
+                                      <p:tavLst>
+                                        <p:tav tm="0">
+                                          <p:val>
+                                            <p:strVal val="1+#ppt_h/2"/>
+                                          </p:val>
+                                        </p:tav>
+                                        <p:tav tm="100000">
+                                          <p:val>
+                                            <p:strVal val="#ppt_y"/>
+                                          </p:val>
+                                        </p:tav>
+                                      </p:tavLst>
+                                    </p:anim>
+                                  </p:childTnLst>
+                                </p:cTn>
+                              </p:par>
+                            </p:childTnLst>
+                          </p:cTn>
+                        </p:par>
+                      </p:childTnLst>
+                    </p:cTn>
+                  </p:par>
+                </p:childTnLst>
+              </p:cTn>
+              <p:prevCondLst>
+                <p:cond evt="onPrev" delay="0">
+                  <p:tgtEl>
+                    <p:sldTgt/>
+                  </p:tgtEl>
+                </p:cond>
+              </p:prevCondLst>
+              <p:nextCondLst>
+                <p:cond evt="onNext" delay="0">
+                  <p:tgtEl>
+                    <p:sldTgt/>
+                  </p:tgtEl>
+                </p:cond>
+              </p:nextCondLst>
+            </p:seq>
+          </p:childTnLst>
+        </p:cTn>
+      </p:par>
+    </p:tnLst>
+    <p:bldLst>
+      <p:bldP spid="2" grpId="0" animBg="1"/>
+      <p:bldP spid="3" grpId="0" animBg="1"/>
+      <p:bldP spid="7" grpId="0"/>
+    </p:bldLst>
+  </p:timing>
+</p:sld>
+</file>
+
+<file path=ppt/slides/slide5.xml><?xml version="1.0" encoding="utf-8"?>
+<p:sld xmlns:a="http://schemas.openxmlformats.org/drawingml/2006/main" xmlns:r="http://schemas.openxmlformats.org/officeDocument/2006/relationships" xmlns:p="http://schemas.openxmlformats.org/presentationml/2006/main">
+  <p:cSld>
+    <p:bg>
+      <p:bgPr>
+        <a:gradFill>
+          <a:gsLst>
+            <a:gs pos="20000">
+              <a:srgbClr val="296075"/>
+            </a:gs>
+            <a:gs pos="80000">
+              <a:srgbClr val="296075"/>
+            </a:gs>
+            <a:gs pos="64190">
+              <a:srgbClr val="27383D"/>
+            </a:gs>
+            <a:gs pos="41000">
+              <a:srgbClr val="27383D"/>
+            </a:gs>
+            <a:gs pos="4000">
+              <a:srgbClr val="57C785"/>
+            </a:gs>
+            <a:gs pos="100000">
+              <a:srgbClr val="57C785"/>
+            </a:gs>
+          </a:gsLst>
+          <a:lin ang="2400000" scaled="0"/>
+        </a:gradFill>
+        <a:effectLst/>
+      </p:bgPr>
+    </p:bg>
+    <p:spTree>
+      <p:nvGrpSpPr>
+        <p:cNvPr id="1" name="">
+          <a:extLst>
+            <a:ext uri="{FF2B5EF4-FFF2-40B4-BE49-F238E27FC236}">
+              <a16:creationId xmlns:a16="http://schemas.microsoft.com/office/drawing/2014/main" id="{A1556B8C-2D8D-CA19-F524-C415EB7EA902}"/>
+            </a:ext>
+          </a:extLst>
+        </p:cNvPr>
+        <p:cNvGrpSpPr/>
+        <p:nvPr/>
+      </p:nvGrpSpPr>
+      <p:grpSpPr>
+        <a:xfrm>
+          <a:off x="0" y="0"/>
+          <a:ext cx="0" cy="0"/>
+          <a:chOff x="0" y="0"/>
+          <a:chExt cx="0" cy="0"/>
+        </a:xfrm>
+      </p:grpSpPr>
+      <p:sp>
+        <p:nvSpPr>
+          <p:cNvPr id="6" name="!!idobeosztás">
+            <a:extLst>
+              <a:ext uri="{FF2B5EF4-FFF2-40B4-BE49-F238E27FC236}">
+                <a16:creationId xmlns:a16="http://schemas.microsoft.com/office/drawing/2014/main" id="{A4ECB620-CE44-6B0D-3FDB-6AAF485DDE3E}"/>
+              </a:ext>
+            </a:extLst>
+          </p:cNvPr>
+          <p:cNvSpPr/>
+          <p:nvPr/>
+        </p:nvSpPr>
+        <p:spPr>
+          <a:xfrm>
+            <a:off x="409274" y="341346"/>
+            <a:ext cx="11172672" cy="6175308"/>
+          </a:xfrm>
+          <a:prstGeom prst="roundRect">
+            <a:avLst/>
+          </a:prstGeom>
+          <a:gradFill>
+            <a:gsLst>
+              <a:gs pos="4000">
+                <a:srgbClr val="FF0000"/>
+              </a:gs>
+              <a:gs pos="57000">
+                <a:schemeClr val="accent4"/>
+              </a:gs>
+              <a:gs pos="80396">
+                <a:schemeClr val="accent4">
+                  <a:lumMod val="40000"/>
+                  <a:lumOff val="60000"/>
+                </a:schemeClr>
+              </a:gs>
+              <a:gs pos="27000">
+                <a:schemeClr val="accent4">
+                  <a:lumMod val="40000"/>
+                  <a:lumOff val="60000"/>
+                </a:schemeClr>
+              </a:gs>
+              <a:gs pos="100000">
+                <a:srgbClr val="FF0000"/>
+              </a:gs>
+            </a:gsLst>
+            <a:lin ang="2400000" scaled="0"/>
+          </a:gradFill>
+          <a:ln w="19050">
+            <a:solidFill>
+              <a:schemeClr val="bg1"/>
+            </a:solidFill>
+          </a:ln>
+          <a:effectLst>
+            <a:glow rad="101600">
+              <a:schemeClr val="bg1">
+                <a:alpha val="40000"/>
+              </a:schemeClr>
+            </a:glow>
+          </a:effectLst>
+        </p:spPr>
+        <p:style>
+          <a:lnRef idx="2">
+            <a:schemeClr val="accent1">
+              <a:shade val="50000"/>
+            </a:schemeClr>
+          </a:lnRef>
+          <a:fillRef idx="1">
+            <a:schemeClr val="accent1"/>
+          </a:fillRef>
+          <a:effectRef idx="0">
+            <a:schemeClr val="accent1"/>
+          </a:effectRef>
+          <a:fontRef idx="minor">
+            <a:schemeClr val="lt1"/>
+          </a:fontRef>
+        </p:style>
+        <p:txBody>
+          <a:bodyPr rtlCol="0" anchor="ctr"/>
+          <a:lstStyle/>
+          <a:p>
+            <a:pPr algn="ctr"/>
+            <a:endParaRPr lang="hu-HU" dirty="0">
+              <a:solidFill>
+                <a:schemeClr val="bg2">
+                  <a:lumMod val="50000"/>
+                </a:schemeClr>
+              </a:solidFill>
+              <a:latin typeface="Lucida Fax" panose="02060602050505020204" pitchFamily="18" charset="0"/>
+            </a:endParaRPr>
+          </a:p>
+        </p:txBody>
+      </p:sp>
+      <p:sp>
+        <p:nvSpPr>
+          <p:cNvPr id="2" name="Cím 1">
+            <a:extLst>
+              <a:ext uri="{FF2B5EF4-FFF2-40B4-BE49-F238E27FC236}">
+                <a16:creationId xmlns:a16="http://schemas.microsoft.com/office/drawing/2014/main" id="{650EDFD8-A237-7437-71F4-F429EA1345D3}"/>
+              </a:ext>
+            </a:extLst>
+          </p:cNvPr>
+          <p:cNvSpPr>
+            <a:spLocks noGrp="1"/>
+          </p:cNvSpPr>
+          <p:nvPr>
+            <p:ph type="title"/>
+          </p:nvPr>
+        </p:nvSpPr>
+        <p:spPr>
+          <a:xfrm>
+            <a:off x="4157888" y="579436"/>
+            <a:ext cx="3876221" cy="1325563"/>
+          </a:xfrm>
+        </p:spPr>
+        <p:txBody>
+          <a:bodyPr/>
+          <a:lstStyle/>
+          <a:p>
+            <a:r>
+              <a:rPr lang="hu-HU" dirty="0">
+                <a:latin typeface="Lucida Fax" panose="02060602050505020204" pitchFamily="18" charset="0"/>
+              </a:rPr>
+              <a:t>Időbeosztás:</a:t>
+            </a:r>
+          </a:p>
+        </p:txBody>
+      </p:sp>
+      <p:graphicFrame>
+        <p:nvGraphicFramePr>
+          <p:cNvPr id="17" name="Chart 16">
+            <a:extLst>
+              <a:ext uri="{FF2B5EF4-FFF2-40B4-BE49-F238E27FC236}">
+                <a16:creationId xmlns:a16="http://schemas.microsoft.com/office/drawing/2014/main" id="{5648E858-F53A-902A-FCE8-961CD531F998}"/>
+              </a:ext>
+            </a:extLst>
+          </p:cNvPr>
+          <p:cNvGraphicFramePr/>
+          <p:nvPr>
+            <p:extLst>
+              <p:ext uri="{D42A27DB-BD31-4B8C-83A1-F6EECF244321}">
+                <p14:modId xmlns:p14="http://schemas.microsoft.com/office/powerpoint/2010/main" val="3578135499"/>
+              </p:ext>
+            </p:extLst>
+          </p:nvPr>
+        </p:nvGraphicFramePr>
+        <p:xfrm>
+          <a:off x="2600325" y="1904999"/>
+          <a:ext cx="6770687" cy="4366684"/>
+        </p:xfrm>
+        <a:graphic>
+          <a:graphicData uri="http://schemas.openxmlformats.org/drawingml/2006/chart">
+            <c:chart xmlns:c="http://schemas.openxmlformats.org/drawingml/2006/chart" xmlns:r="http://schemas.openxmlformats.org/officeDocument/2006/relationships" r:id="rId2"/>
+          </a:graphicData>
+        </a:graphic>
+      </p:graphicFrame>
+      <p:sp>
+        <p:nvSpPr>
+          <p:cNvPr id="18" name="TextBox 17">
+            <a:extLst>
+              <a:ext uri="{FF2B5EF4-FFF2-40B4-BE49-F238E27FC236}">
+                <a16:creationId xmlns:a16="http://schemas.microsoft.com/office/drawing/2014/main" id="{6B27923A-F09A-FCB7-2967-BE2E7BF4832D}"/>
+              </a:ext>
+            </a:extLst>
+          </p:cNvPr>
+          <p:cNvSpPr txBox="1"/>
+          <p:nvPr/>
+        </p:nvSpPr>
+        <p:spPr>
+          <a:xfrm rot="16200000">
+            <a:off x="2184405" y="3801102"/>
+            <a:ext cx="1273168" cy="307777"/>
+          </a:xfrm>
+          <a:prstGeom prst="rect">
+            <a:avLst/>
+          </a:prstGeom>
+          <a:noFill/>
+        </p:spPr>
+        <p:txBody>
+          <a:bodyPr wrap="square" rtlCol="0">
+            <a:spAutoFit/>
+          </a:bodyPr>
+          <a:lstStyle/>
+          <a:p>
+            <a:r>
+              <a:rPr lang="hu-HU" sz="1400" dirty="0">
+                <a:solidFill>
+                  <a:schemeClr val="tx1">
+                    <a:lumMod val="65000"/>
+                    <a:lumOff val="35000"/>
+                  </a:schemeClr>
+                </a:solidFill>
+              </a:rPr>
+              <a:t>Dolgozott órák</a:t>
+            </a:r>
+          </a:p>
+        </p:txBody>
+      </p:sp>
+    </p:spTree>
+    <p:extLst>
+      <p:ext uri="{BB962C8B-B14F-4D97-AF65-F5344CB8AC3E}">
+        <p14:creationId xmlns:p14="http://schemas.microsoft.com/office/powerpoint/2010/main" val="619596152"/>
+      </p:ext>
+    </p:extLst>
+  </p:cSld>
+  <p:clrMapOvr>
+    <a:masterClrMapping/>
+  </p:clrMapOvr>
+  <mc:AlternateContent xmlns:mc="http://schemas.openxmlformats.org/markup-compatibility/2006">
+    <mc:Choice xmlns:p159="http://schemas.microsoft.com/office/powerpoint/2015/09/main" Requires="p159">
+      <p:transition xmlns:p14="http://schemas.microsoft.com/office/powerpoint/2010/main" spd="slow" p14:dur="2000">
+        <p159:morph option="byObject"/>
+      </p:transition>
+    </mc:Choice>
+    <mc:Fallback>
+      <p:transition spd="slow">
+        <p:fade/>
+      </p:transition>
+    </mc:Fallback>
+  </mc:AlternateContent>
+  <p:timing>
+    <p:tnLst>
+      <p:par>
+        <p:cTn id="1" dur="indefinite" restart="never" nodeType="tmRoot">
+          <p:childTnLst>
+            <p:seq concurrent="1" nextAc="seek">
+              <p:cTn id="2" dur="indefinite" nodeType="mainSeq">
+                <p:childTnLst>
+                  <p:par>
+                    <p:cTn id="3" fill="hold">
+                      <p:stCondLst>
+                        <p:cond delay="indefinite"/>
+                        <p:cond evt="onBegin" delay="0">
+                          <p:tn val="2"/>
+                        </p:cond>
+                      </p:stCondLst>
+                      <p:childTnLst>
+                        <p:par>
+                          <p:cTn id="4" fill="hold">
+                            <p:stCondLst>
+                              <p:cond delay="0"/>
+                            </p:stCondLst>
+                            <p:childTnLst>
+                              <p:par>
+                                <p:cTn id="5" presetID="10" presetClass="entr" presetSubtype="0" fill="hold" grpId="0" nodeType="afterEffect">
+                                  <p:stCondLst>
+                                    <p:cond delay="0"/>
+                                  </p:stCondLst>
+                                  <p:childTnLst>
+                                    <p:set>
+                                      <p:cBhvr>
+                                        <p:cTn id="6" dur="1" fill="hold">
+                                          <p:stCondLst>
+                                            <p:cond delay="0"/>
+                                          </p:stCondLst>
+                                        </p:cTn>
+                                        <p:tgtEl>
+                                          <p:spTgt spid="17"/>
+                                        </p:tgtEl>
+                                        <p:attrNameLst>
+                                          <p:attrName>style.visibility</p:attrName>
+                                        </p:attrNameLst>
+                                      </p:cBhvr>
+                                      <p:to>
+                                        <p:strVal val="visible"/>
+                                      </p:to>
+                                    </p:set>
+                                    <p:animEffect transition="in" filter="fade">
+                                      <p:cBhvr>
+                                        <p:cTn id="7" dur="500"/>
+                                        <p:tgtEl>
+                                          <p:spTgt spid="17"/>
+                                        </p:tgtEl>
+                                      </p:cBhvr>
+                                    </p:animEffect>
+                                  </p:childTnLst>
+                                </p:cTn>
+                              </p:par>
+                              <p:par>
+                                <p:cTn id="8" presetID="10" presetClass="entr" presetSubtype="0" fill="hold" grpId="0" nodeType="withEffect">
+                                  <p:stCondLst>
+                                    <p:cond delay="0"/>
+                                  </p:stCondLst>
+                                  <p:childTnLst>
+                                    <p:set>
+                                      <p:cBhvr>
+                                        <p:cTn id="9" dur="1" fill="hold">
+                                          <p:stCondLst>
+                                            <p:cond delay="0"/>
+                                          </p:stCondLst>
+                                        </p:cTn>
+                                        <p:tgtEl>
+                                          <p:spTgt spid="2"/>
+                                        </p:tgtEl>
+                                        <p:attrNameLst>
+                                          <p:attrName>style.visibility</p:attrName>
+                                        </p:attrNameLst>
+                                      </p:cBhvr>
+                                      <p:to>
+                                        <p:strVal val="visible"/>
+                                      </p:to>
+                                    </p:set>
+                                    <p:animEffect transition="in" filter="fade">
+                                      <p:cBhvr>
+                                        <p:cTn id="10" dur="500"/>
+                                        <p:tgtEl>
+                                          <p:spTgt spid="2"/>
+                                        </p:tgtEl>
+                                      </p:cBhvr>
+                                    </p:animEffect>
+                                  </p:childTnLst>
+                                </p:cTn>
+                              </p:par>
+                              <p:par>
+                                <p:cTn id="11" presetID="10" presetClass="entr" presetSubtype="0" fill="hold" grpId="0" nodeType="withEffect">
+                                  <p:stCondLst>
+                                    <p:cond delay="0"/>
+                                  </p:stCondLst>
+                                  <p:childTnLst>
+                                    <p:set>
+                                      <p:cBhvr>
+                                        <p:cTn id="12" dur="1" fill="hold">
+                                          <p:stCondLst>
+                                            <p:cond delay="0"/>
+                                          </p:stCondLst>
+                                        </p:cTn>
+                                        <p:tgtEl>
+                                          <p:spTgt spid="18"/>
+                                        </p:tgtEl>
+                                        <p:attrNameLst>
+                                          <p:attrName>style.visibility</p:attrName>
+                                        </p:attrNameLst>
+                                      </p:cBhvr>
+                                      <p:to>
+                                        <p:strVal val="visible"/>
+                                      </p:to>
+                                    </p:set>
+                                    <p:animEffect transition="in" filter="fade">
+                                      <p:cBhvr>
+                                        <p:cTn id="13" dur="500"/>
+                                        <p:tgtEl>
+                                          <p:spTgt spid="18"/>
+                                        </p:tgtEl>
+                                      </p:cBhvr>
+                                    </p:animEffect>
+                                  </p:childTnLst>
+                                </p:cTn>
+                              </p:par>
+                            </p:childTnLst>
+                          </p:cTn>
+                        </p:par>
+                      </p:childTnLst>
+                    </p:cTn>
+                  </p:par>
+                </p:childTnLst>
+              </p:cTn>
+              <p:prevCondLst>
+                <p:cond evt="onPrev" delay="0">
+                  <p:tgtEl>
+                    <p:sldTgt/>
+                  </p:tgtEl>
+                </p:cond>
+              </p:prevCondLst>
+              <p:nextCondLst>
+                <p:cond evt="onNext" delay="0">
+                  <p:tgtEl>
+                    <p:sldTgt/>
+                  </p:tgtEl>
+                </p:cond>
+              </p:nextCondLst>
+            </p:seq>
+          </p:childTnLst>
+        </p:cTn>
+      </p:par>
+    </p:tnLst>
+    <p:bldLst>
+      <p:bldP spid="2" grpId="0"/>
+      <p:bldGraphic spid="17" grpId="0">
+        <p:bldAsOne/>
+      </p:bldGraphic>
+      <p:bldP spid="18" grpId="0"/>
+    </p:bldLst>
+  </p:timing>
+</p:sld>
+</file>
+
+<file path=ppt/slides/slide6.xml><?xml version="1.0" encoding="utf-8"?>
+<p:sld xmlns:a="http://schemas.openxmlformats.org/drawingml/2006/main" xmlns:r="http://schemas.openxmlformats.org/officeDocument/2006/relationships" xmlns:p="http://schemas.openxmlformats.org/presentationml/2006/main">
+  <p:cSld>
+    <p:bg>
+      <p:bgPr>
+        <a:gradFill>
+          <a:gsLst>
+            <a:gs pos="20000">
+              <a:srgbClr val="296075"/>
+            </a:gs>
+            <a:gs pos="80000">
+              <a:srgbClr val="296075"/>
+            </a:gs>
+            <a:gs pos="64190">
+              <a:srgbClr val="27383D"/>
+            </a:gs>
+            <a:gs pos="41000">
+              <a:srgbClr val="27383D"/>
+            </a:gs>
+            <a:gs pos="4000">
+              <a:srgbClr val="57C785"/>
+            </a:gs>
+            <a:gs pos="100000">
+              <a:srgbClr val="57C785"/>
+            </a:gs>
+          </a:gsLst>
+          <a:lin ang="2400000" scaled="0"/>
+        </a:gradFill>
+        <a:effectLst/>
+      </p:bgPr>
+    </p:bg>
+    <p:spTree>
+      <p:nvGrpSpPr>
+        <p:cNvPr id="1" name="">
+          <a:extLst>
+            <a:ext uri="{FF2B5EF4-FFF2-40B4-BE49-F238E27FC236}">
+              <a16:creationId xmlns:a16="http://schemas.microsoft.com/office/drawing/2014/main" id="{0EE5F636-7C50-3CB1-A19F-85C67DC068CB}"/>
+            </a:ext>
+          </a:extLst>
+        </p:cNvPr>
+        <p:cNvGrpSpPr/>
+        <p:nvPr/>
+      </p:nvGrpSpPr>
+      <p:grpSpPr>
+        <a:xfrm>
+          <a:off x="0" y="0"/>
+          <a:ext cx="0" cy="0"/>
+          <a:chOff x="0" y="0"/>
+          <a:chExt cx="0" cy="0"/>
+        </a:xfrm>
+      </p:grpSpPr>
+      <p:sp>
+        <p:nvSpPr>
+          <p:cNvPr id="6" name="!!tapasztalatok">
+            <a:extLst>
+              <a:ext uri="{FF2B5EF4-FFF2-40B4-BE49-F238E27FC236}">
+                <a16:creationId xmlns:a16="http://schemas.microsoft.com/office/drawing/2014/main" id="{E1EF357D-5F3B-7F63-9BC4-FC1A5C371B2B}"/>
+              </a:ext>
+            </a:extLst>
+          </p:cNvPr>
+          <p:cNvSpPr/>
+          <p:nvPr/>
+        </p:nvSpPr>
+        <p:spPr>
+          <a:xfrm>
+            <a:off x="6239934" y="5074708"/>
+            <a:ext cx="2650067" cy="1464733"/>
+          </a:xfrm>
+          <a:prstGeom prst="roundRect">
+            <a:avLst/>
+          </a:prstGeom>
+          <a:gradFill>
+            <a:gsLst>
+              <a:gs pos="4000">
+                <a:srgbClr val="7030A0"/>
+              </a:gs>
+              <a:gs pos="93578">
+                <a:srgbClr val="7030A0"/>
+              </a:gs>
+              <a:gs pos="64000">
+                <a:srgbClr val="FFCC66"/>
+              </a:gs>
+              <a:gs pos="55000">
+                <a:srgbClr val="FFFF00"/>
+              </a:gs>
+              <a:gs pos="44000">
+                <a:srgbClr val="FFCC66"/>
+              </a:gs>
+            </a:gsLst>
+            <a:lin ang="7800000" scaled="0"/>
+          </a:gradFill>
+          <a:ln w="19050">
+            <a:solidFill>
+              <a:schemeClr val="bg1"/>
+            </a:solidFill>
+          </a:ln>
+          <a:effectLst>
+            <a:glow rad="101600">
+              <a:schemeClr val="bg1">
+                <a:alpha val="40000"/>
+              </a:schemeClr>
+            </a:glow>
+          </a:effectLst>
+        </p:spPr>
+        <p:style>
+          <a:lnRef idx="2">
+            <a:schemeClr val="accent1">
+              <a:shade val="50000"/>
+            </a:schemeClr>
+          </a:lnRef>
+          <a:fillRef idx="1">
+            <a:schemeClr val="accent1"/>
+          </a:fillRef>
+          <a:effectRef idx="0">
+            <a:schemeClr val="accent1"/>
+          </a:effectRef>
+          <a:fontRef idx="minor">
+            <a:schemeClr val="lt1"/>
+          </a:fontRef>
+        </p:style>
+        <p:txBody>
+          <a:bodyPr rtlCol="0" anchor="ctr"/>
+          <a:lstStyle/>
+          <a:p>
+            <a:pPr algn="ctr"/>
+            <a:r>
+              <a:rPr lang="hu-HU" dirty="0">
+                <a:solidFill>
+                  <a:schemeClr val="bg2">
+                    <a:lumMod val="50000"/>
+                  </a:schemeClr>
+                </a:solidFill>
+                <a:latin typeface="Lucida Fax" panose="02060602050505020204" pitchFamily="18" charset="0"/>
+              </a:rPr>
+              <a:t>Tapasztalatok</a:t>
+            </a:r>
+          </a:p>
+        </p:txBody>
+      </p:sp>
+      <p:sp>
+        <p:nvSpPr>
+          <p:cNvPr id="8" name="Téglalap: lekerekített 4">
+            <a:extLst>
+              <a:ext uri="{FF2B5EF4-FFF2-40B4-BE49-F238E27FC236}">
+                <a16:creationId xmlns:a16="http://schemas.microsoft.com/office/drawing/2014/main" id="{F0E82AB9-2F45-73BF-D849-8CE682ABBEB2}"/>
+              </a:ext>
+            </a:extLst>
+          </p:cNvPr>
+          <p:cNvSpPr/>
+          <p:nvPr/>
+        </p:nvSpPr>
+        <p:spPr>
+          <a:xfrm>
+            <a:off x="9194801" y="5070474"/>
+            <a:ext cx="2650067" cy="1464733"/>
+          </a:xfrm>
+          <a:prstGeom prst="roundRect">
+            <a:avLst/>
+          </a:prstGeom>
+          <a:gradFill flip="none" rotWithShape="1">
+            <a:gsLst>
+              <a:gs pos="38528">
+                <a:schemeClr val="bg2">
+                  <a:lumMod val="50000"/>
+                </a:schemeClr>
+              </a:gs>
+              <a:gs pos="63000">
+                <a:schemeClr val="bg2">
+                  <a:lumMod val="50000"/>
+                </a:schemeClr>
+              </a:gs>
+              <a:gs pos="76000">
+                <a:schemeClr val="bg2">
+                  <a:lumMod val="75000"/>
+                </a:schemeClr>
+              </a:gs>
+              <a:gs pos="25000">
+                <a:schemeClr val="bg2">
+                  <a:lumMod val="75000"/>
+                </a:schemeClr>
+              </a:gs>
+              <a:gs pos="4000">
+                <a:schemeClr val="bg1"/>
+              </a:gs>
+              <a:gs pos="100000">
+                <a:schemeClr val="bg1"/>
+              </a:gs>
+            </a:gsLst>
+            <a:lin ang="7800000" scaled="0"/>
+            <a:tileRect/>
+          </a:gradFill>
+          <a:ln w="19050">
+            <a:solidFill>
+              <a:schemeClr val="bg1"/>
+            </a:solidFill>
+          </a:ln>
+          <a:effectLst>
+            <a:glow rad="101600">
+              <a:schemeClr val="bg1">
+                <a:alpha val="40000"/>
+              </a:schemeClr>
+            </a:glow>
+          </a:effectLst>
+        </p:spPr>
+        <p:style>
+          <a:lnRef idx="2">
+            <a:schemeClr val="accent1">
+              <a:shade val="50000"/>
+            </a:schemeClr>
+          </a:lnRef>
+          <a:fillRef idx="1">
+            <a:schemeClr val="accent1"/>
+          </a:fillRef>
+          <a:effectRef idx="0">
+            <a:schemeClr val="accent1"/>
+          </a:effectRef>
+          <a:fontRef idx="minor">
+            <a:schemeClr val="lt1"/>
+          </a:fontRef>
+        </p:style>
+        <p:txBody>
+          <a:bodyPr rtlCol="0" anchor="ctr"/>
+          <a:lstStyle/>
+          <a:p>
+            <a:pPr algn="ctr"/>
+            <a:r>
+              <a:rPr lang="hu-HU" dirty="0">
+                <a:latin typeface="Lucida Fax" panose="02060602050505020204" pitchFamily="18" charset="0"/>
+              </a:rPr>
+              <a:t>Források</a:t>
+            </a:r>
+          </a:p>
+        </p:txBody>
+      </p:sp>
+      <p:sp>
+        <p:nvSpPr>
+          <p:cNvPr id="2" name="!!feladat_megoszt">
+            <a:extLst>
+              <a:ext uri="{FF2B5EF4-FFF2-40B4-BE49-F238E27FC236}">
+                <a16:creationId xmlns:a16="http://schemas.microsoft.com/office/drawing/2014/main" id="{B9C7F578-9DC5-5D93-37C4-56944EEE8A80}"/>
+              </a:ext>
+            </a:extLst>
+          </p:cNvPr>
+          <p:cNvSpPr/>
+          <p:nvPr/>
+        </p:nvSpPr>
+        <p:spPr>
+          <a:xfrm>
+            <a:off x="347132" y="5070474"/>
+            <a:ext cx="2650067" cy="1464733"/>
+          </a:xfrm>
+          <a:prstGeom prst="roundRect">
+            <a:avLst/>
+          </a:prstGeom>
+          <a:gradFill>
+            <a:gsLst>
+              <a:gs pos="90000">
+                <a:srgbClr val="296075"/>
+              </a:gs>
+              <a:gs pos="8000">
+                <a:srgbClr val="296075"/>
+              </a:gs>
+              <a:gs pos="41000">
+                <a:srgbClr val="57C785"/>
+              </a:gs>
+              <a:gs pos="62000">
+                <a:srgbClr val="57C785"/>
+              </a:gs>
+            </a:gsLst>
+            <a:lin ang="2400000" scaled="0"/>
+          </a:gradFill>
+          <a:ln w="19050">
+            <a:solidFill>
+              <a:schemeClr val="bg1"/>
+            </a:solidFill>
+          </a:ln>
+          <a:effectLst>
+            <a:glow rad="101600">
+              <a:schemeClr val="bg1">
+                <a:alpha val="40000"/>
+              </a:schemeClr>
+            </a:glow>
+          </a:effectLst>
+        </p:spPr>
+        <p:style>
+          <a:lnRef idx="2">
+            <a:schemeClr val="accent1">
+              <a:shade val="50000"/>
+            </a:schemeClr>
+          </a:lnRef>
+          <a:fillRef idx="1">
+            <a:schemeClr val="accent1"/>
+          </a:fillRef>
+          <a:effectRef idx="0">
+            <a:schemeClr val="accent1"/>
+          </a:effectRef>
+          <a:fontRef idx="minor">
+            <a:schemeClr val="lt1"/>
+          </a:fontRef>
+        </p:style>
+        <p:txBody>
+          <a:bodyPr rtlCol="0" anchor="ctr"/>
+          <a:lstStyle/>
+          <a:p>
+            <a:pPr algn="ctr"/>
+            <a:r>
+              <a:rPr lang="hu-HU" dirty="0">
+                <a:latin typeface="Lucida Fax" panose="02060602050505020204" pitchFamily="18" charset="0"/>
+              </a:rPr>
+              <a:t>Feladat Megosztás</a:t>
+            </a:r>
+          </a:p>
+        </p:txBody>
+      </p:sp>
+      <p:sp>
+        <p:nvSpPr>
+          <p:cNvPr id="3" name="Téglalap: lekerekített 2">
+            <a:extLst>
+              <a:ext uri="{FF2B5EF4-FFF2-40B4-BE49-F238E27FC236}">
+                <a16:creationId xmlns:a16="http://schemas.microsoft.com/office/drawing/2014/main" id="{AA2C61DC-220D-804C-9D2D-075C422B99D7}"/>
+              </a:ext>
+            </a:extLst>
+          </p:cNvPr>
+          <p:cNvSpPr/>
+          <p:nvPr/>
+        </p:nvSpPr>
+        <p:spPr>
+          <a:xfrm>
+            <a:off x="3301999" y="5070475"/>
+            <a:ext cx="2650067" cy="1464733"/>
+          </a:xfrm>
+          <a:prstGeom prst="roundRect">
+            <a:avLst/>
+          </a:prstGeom>
+          <a:gradFill>
+            <a:gsLst>
+              <a:gs pos="4000">
+                <a:srgbClr val="FF0000"/>
+              </a:gs>
+              <a:gs pos="57000">
+                <a:schemeClr val="accent4"/>
+              </a:gs>
+              <a:gs pos="80396">
+                <a:schemeClr val="accent4">
+                  <a:lumMod val="40000"/>
+                  <a:lumOff val="60000"/>
+                </a:schemeClr>
+              </a:gs>
+              <a:gs pos="27000">
+                <a:schemeClr val="accent4">
+                  <a:lumMod val="40000"/>
+                  <a:lumOff val="60000"/>
+                </a:schemeClr>
+              </a:gs>
+              <a:gs pos="100000">
+                <a:srgbClr val="FF0000"/>
+              </a:gs>
+            </a:gsLst>
+            <a:lin ang="2400000" scaled="0"/>
+          </a:gradFill>
+          <a:ln w="19050">
+            <a:solidFill>
+              <a:schemeClr val="bg1"/>
+            </a:solidFill>
+          </a:ln>
+          <a:effectLst>
+            <a:glow rad="101600">
+              <a:schemeClr val="bg1">
+                <a:alpha val="40000"/>
+              </a:schemeClr>
+            </a:glow>
+          </a:effectLst>
+        </p:spPr>
+        <p:style>
+          <a:lnRef idx="2">
+            <a:schemeClr val="accent1">
+              <a:shade val="50000"/>
+            </a:schemeClr>
+          </a:lnRef>
+          <a:fillRef idx="1">
+            <a:schemeClr val="accent1"/>
+          </a:fillRef>
+          <a:effectRef idx="0">
+            <a:schemeClr val="accent1"/>
+          </a:effectRef>
+          <a:fontRef idx="minor">
+            <a:schemeClr val="lt1"/>
+          </a:fontRef>
+        </p:style>
+        <p:txBody>
+          <a:bodyPr rtlCol="0" anchor="ctr"/>
+          <a:lstStyle/>
+          <a:p>
+            <a:pPr algn="ctr"/>
+            <a:r>
+              <a:rPr lang="hu-HU" dirty="0">
+                <a:solidFill>
+                  <a:schemeClr val="bg2">
+                    <a:lumMod val="50000"/>
+                  </a:schemeClr>
+                </a:solidFill>
+                <a:latin typeface="Lucida Fax" panose="02060602050505020204" pitchFamily="18" charset="0"/>
+              </a:rPr>
+              <a:t>Időbeosztás</a:t>
+            </a:r>
+          </a:p>
+        </p:txBody>
+      </p:sp>
+      <p:sp>
+        <p:nvSpPr>
+          <p:cNvPr id="7" name="Szövegdoboz 6">
+            <a:extLst>
+              <a:ext uri="{FF2B5EF4-FFF2-40B4-BE49-F238E27FC236}">
+                <a16:creationId xmlns:a16="http://schemas.microsoft.com/office/drawing/2014/main" id="{F752A275-7D22-3328-B825-B817694C04CC}"/>
+              </a:ext>
+            </a:extLst>
+          </p:cNvPr>
+          <p:cNvSpPr txBox="1"/>
+          <p:nvPr/>
+        </p:nvSpPr>
+        <p:spPr>
+          <a:xfrm>
+            <a:off x="1865841" y="600075"/>
+            <a:ext cx="8782050" cy="1015663"/>
+          </a:xfrm>
+          <a:prstGeom prst="rect">
+            <a:avLst/>
+          </a:prstGeom>
+          <a:noFill/>
+        </p:spPr>
+        <p:txBody>
+          <a:bodyPr wrap="square" rtlCol="0">
+            <a:spAutoFit/>
+          </a:bodyPr>
+          <a:lstStyle/>
+          <a:p>
+            <a:pPr algn="ctr"/>
+            <a:r>
+              <a:rPr lang="hu-HU" sz="6000" b="1" u="sng" dirty="0">
+                <a:solidFill>
+                  <a:srgbClr val="57C785"/>
+                </a:solidFill>
+                <a:latin typeface="Lucida Fax" panose="02060602050505020204" pitchFamily="18" charset="0"/>
+              </a:rPr>
+              <a:t>Tartalom:</a:t>
+            </a:r>
+          </a:p>
+        </p:txBody>
+      </p:sp>
+    </p:spTree>
+    <p:extLst>
+      <p:ext uri="{BB962C8B-B14F-4D97-AF65-F5344CB8AC3E}">
+        <p14:creationId xmlns:p14="http://schemas.microsoft.com/office/powerpoint/2010/main" val="2678678178"/>
+      </p:ext>
+    </p:extLst>
+  </p:cSld>
+  <p:clrMapOvr>
+    <a:masterClrMapping/>
+  </p:clrMapOvr>
+  <mc:AlternateContent xmlns:mc="http://schemas.openxmlformats.org/markup-compatibility/2006">
+    <mc:Choice xmlns:p15="http://schemas.microsoft.com/office/powerpoint/2012/main" Requires="p15">
+      <p:transition xmlns:p14="http://schemas.microsoft.com/office/powerpoint/2010/main" spd="slow" p14:dur="2000" advClick="0" advTm="1000">
+        <p15:prstTrans prst="fracture"/>
+      </p:transition>
+    </mc:Choice>
+    <mc:Fallback>
+      <p:transition spd="slow" advClick="0" advTm="1000">
+        <p:fade/>
+      </p:transition>
+    </mc:Fallback>
+  </mc:AlternateContent>
+</p:sld>
+</file>
+
+<file path=ppt/slides/slide7.xml><?xml version="1.0" encoding="utf-8"?>
+<p:sld xmlns:a="http://schemas.openxmlformats.org/drawingml/2006/main" xmlns:r="http://schemas.openxmlformats.org/officeDocument/2006/relationships" xmlns:p="http://schemas.openxmlformats.org/presentationml/2006/main">
+  <p:cSld>
+    <p:bg>
+      <p:bgPr>
+        <a:gradFill>
+          <a:gsLst>
+            <a:gs pos="20000">
+              <a:srgbClr val="296075"/>
+            </a:gs>
+            <a:gs pos="80000">
+              <a:srgbClr val="296075"/>
+            </a:gs>
+            <a:gs pos="64190">
+              <a:srgbClr val="27383D"/>
+            </a:gs>
+            <a:gs pos="41000">
+              <a:srgbClr val="27383D"/>
+            </a:gs>
+            <a:gs pos="4000">
+              <a:srgbClr val="57C785"/>
+            </a:gs>
+            <a:gs pos="100000">
+              <a:srgbClr val="57C785"/>
+            </a:gs>
+          </a:gsLst>
+          <a:lin ang="2400000" scaled="0"/>
+        </a:gradFill>
+        <a:effectLst/>
+      </p:bgPr>
+    </p:bg>
+    <p:spTree>
+      <p:nvGrpSpPr>
+        <p:cNvPr id="1" name="">
+          <a:extLst>
+            <a:ext uri="{FF2B5EF4-FFF2-40B4-BE49-F238E27FC236}">
+              <a16:creationId xmlns:a16="http://schemas.microsoft.com/office/drawing/2014/main" id="{A8F32FD4-5F24-46FC-C460-B428C3EAB0FA}"/>
+            </a:ext>
+          </a:extLst>
+        </p:cNvPr>
+        <p:cNvGrpSpPr/>
+        <p:nvPr/>
+      </p:nvGrpSpPr>
+      <p:grpSpPr>
+        <a:xfrm>
+          <a:off x="0" y="0"/>
+          <a:ext cx="0" cy="0"/>
+          <a:chOff x="0" y="0"/>
+          <a:chExt cx="0" cy="0"/>
+        </a:xfrm>
+      </p:grpSpPr>
+      <p:sp>
+        <p:nvSpPr>
+          <p:cNvPr id="7" name="!!tapasztalatok">
+            <a:extLst>
+              <a:ext uri="{FF2B5EF4-FFF2-40B4-BE49-F238E27FC236}">
+                <a16:creationId xmlns:a16="http://schemas.microsoft.com/office/drawing/2014/main" id="{1DD4DB66-E2FD-1E66-FAED-FC0812D6FCB7}"/>
+              </a:ext>
+            </a:extLst>
+          </p:cNvPr>
+          <p:cNvSpPr/>
+          <p:nvPr/>
+        </p:nvSpPr>
+        <p:spPr>
+          <a:xfrm>
+            <a:off x="347132" y="357625"/>
+            <a:ext cx="11206240" cy="6193862"/>
+          </a:xfrm>
+          <a:prstGeom prst="roundRect">
+            <a:avLst/>
+          </a:prstGeom>
+          <a:gradFill>
+            <a:gsLst>
+              <a:gs pos="4000">
+                <a:srgbClr val="7030A0"/>
+              </a:gs>
+              <a:gs pos="93578">
+                <a:srgbClr val="7030A0"/>
+              </a:gs>
+              <a:gs pos="64000">
+                <a:srgbClr val="FFCC66"/>
+              </a:gs>
+              <a:gs pos="55000">
+                <a:srgbClr val="FFFF00"/>
+              </a:gs>
+              <a:gs pos="44000">
+                <a:srgbClr val="FFCC66"/>
+              </a:gs>
+            </a:gsLst>
+            <a:lin ang="7800000" scaled="0"/>
+          </a:gradFill>
+          <a:ln w="19050">
+            <a:solidFill>
+              <a:schemeClr val="bg1"/>
+            </a:solidFill>
+          </a:ln>
+          <a:effectLst>
+            <a:glow rad="101600">
+              <a:schemeClr val="bg1">
+                <a:alpha val="40000"/>
+              </a:schemeClr>
+            </a:glow>
+          </a:effectLst>
+        </p:spPr>
+        <p:style>
+          <a:lnRef idx="2">
+            <a:schemeClr val="accent1">
+              <a:shade val="50000"/>
+            </a:schemeClr>
+          </a:lnRef>
+          <a:fillRef idx="1">
+            <a:schemeClr val="accent1"/>
+          </a:fillRef>
+          <a:effectRef idx="0">
+            <a:schemeClr val="accent1"/>
+          </a:effectRef>
+          <a:fontRef idx="minor">
+            <a:schemeClr val="lt1"/>
+          </a:fontRef>
+        </p:style>
+        <p:txBody>
+          <a:bodyPr rtlCol="0" anchor="ctr"/>
+          <a:lstStyle/>
+          <a:p>
+            <a:pPr algn="ctr"/>
+            <a:endParaRPr lang="hu-HU" dirty="0">
+              <a:solidFill>
+                <a:schemeClr val="bg2">
+                  <a:lumMod val="50000"/>
+                </a:schemeClr>
+              </a:solidFill>
+              <a:latin typeface="Lucida Fax" panose="02060602050505020204" pitchFamily="18" charset="0"/>
+            </a:endParaRPr>
+          </a:p>
+        </p:txBody>
+      </p:sp>
+      <p:sp>
+        <p:nvSpPr>
+          <p:cNvPr id="2" name="Cím 1">
+            <a:extLst>
+              <a:ext uri="{FF2B5EF4-FFF2-40B4-BE49-F238E27FC236}">
+                <a16:creationId xmlns:a16="http://schemas.microsoft.com/office/drawing/2014/main" id="{A3163D02-2A7B-66E9-D658-BFFBEA22DE08}"/>
+              </a:ext>
+            </a:extLst>
+          </p:cNvPr>
+          <p:cNvSpPr>
+            <a:spLocks noGrp="1"/>
+          </p:cNvSpPr>
+          <p:nvPr>
+            <p:ph type="title"/>
+          </p:nvPr>
+        </p:nvSpPr>
+        <p:spPr>
+          <a:xfrm>
+            <a:off x="638629" y="951316"/>
+            <a:ext cx="10515600" cy="1325563"/>
+          </a:xfrm>
+        </p:spPr>
+        <p:txBody>
+          <a:bodyPr/>
+          <a:lstStyle/>
+          <a:p>
+            <a:r>
+              <a:rPr lang="hu-HU" dirty="0">
+                <a:solidFill>
+                  <a:schemeClr val="bg2">
+                    <a:lumMod val="50000"/>
+                  </a:schemeClr>
+                </a:solidFill>
+                <a:latin typeface="Lucida Fax" panose="02060602050505020204" pitchFamily="18" charset="0"/>
+              </a:rPr>
+              <a:t>Tapasztalatok :</a:t>
+            </a:r>
+          </a:p>
+        </p:txBody>
+      </p:sp>
+      <p:sp>
+        <p:nvSpPr>
+          <p:cNvPr id="9" name="Content Placeholder 8">
+            <a:extLst>
+              <a:ext uri="{FF2B5EF4-FFF2-40B4-BE49-F238E27FC236}">
+                <a16:creationId xmlns:a16="http://schemas.microsoft.com/office/drawing/2014/main" id="{830FED37-EE47-56B0-4668-DC59695737BB}"/>
+              </a:ext>
+            </a:extLst>
+          </p:cNvPr>
+          <p:cNvSpPr>
+            <a:spLocks noGrp="1"/>
+          </p:cNvSpPr>
+          <p:nvPr>
+            <p:ph sz="half" idx="2"/>
+          </p:nvPr>
+        </p:nvSpPr>
+        <p:spPr>
+          <a:xfrm>
+            <a:off x="3359452" y="2658221"/>
+            <a:ext cx="5181600" cy="3248463"/>
+          </a:xfrm>
+        </p:spPr>
+        <p:txBody>
+          <a:bodyPr/>
+          <a:lstStyle/>
+          <a:p>
+            <a:pPr>
+              <a:buFont typeface="Lucida Fax" panose="02060602050505020204" pitchFamily="18" charset="0"/>
+              <a:buChar char="»"/>
+            </a:pPr>
+            <a:r>
+              <a:rPr lang="hu-HU" dirty="0">
+                <a:solidFill>
+                  <a:schemeClr val="bg2">
+                    <a:lumMod val="50000"/>
+                  </a:schemeClr>
+                </a:solidFill>
+                <a:latin typeface="Lucida Fax" panose="02060602050505020204" pitchFamily="18" charset="0"/>
+              </a:rPr>
+              <a:t>Kollaboráció</a:t>
+            </a:r>
+          </a:p>
+          <a:p>
+            <a:pPr>
+              <a:buFont typeface="Lucida Fax" panose="02060602050505020204" pitchFamily="18" charset="0"/>
+              <a:buChar char="»"/>
+            </a:pPr>
+            <a:r>
+              <a:rPr lang="hu-HU" dirty="0">
+                <a:solidFill>
+                  <a:schemeClr val="bg2">
+                    <a:lumMod val="50000"/>
+                  </a:schemeClr>
+                </a:solidFill>
+                <a:latin typeface="Lucida Fax" panose="02060602050505020204" pitchFamily="18" charset="0"/>
+              </a:rPr>
+              <a:t>Csapattag váltás</a:t>
+            </a:r>
+          </a:p>
+          <a:p>
+            <a:pPr>
+              <a:buFont typeface="Lucida Fax" panose="02060602050505020204" pitchFamily="18" charset="0"/>
+              <a:buChar char="»"/>
+            </a:pPr>
+            <a:r>
+              <a:rPr lang="hu-HU" dirty="0">
+                <a:solidFill>
+                  <a:schemeClr val="bg2">
+                    <a:lumMod val="50000"/>
+                  </a:schemeClr>
+                </a:solidFill>
+                <a:latin typeface="Lucida Fax" panose="02060602050505020204" pitchFamily="18" charset="0"/>
+              </a:rPr>
+              <a:t>Kommunikáció</a:t>
+            </a:r>
+          </a:p>
+          <a:p>
+            <a:pPr>
+              <a:buFont typeface="Lucida Fax" panose="02060602050505020204" pitchFamily="18" charset="0"/>
+              <a:buChar char="»"/>
+            </a:pPr>
+            <a:r>
+              <a:rPr lang="hu-HU" dirty="0">
+                <a:solidFill>
+                  <a:schemeClr val="bg2">
+                    <a:lumMod val="50000"/>
+                  </a:schemeClr>
+                </a:solidFill>
+                <a:latin typeface="Lucida Fax" panose="02060602050505020204" pitchFamily="18" charset="0"/>
+              </a:rPr>
+              <a:t>Problémamegoldás</a:t>
+            </a:r>
+          </a:p>
+          <a:p>
+            <a:pPr>
+              <a:buFont typeface="Lucida Fax" panose="02060602050505020204" pitchFamily="18" charset="0"/>
+              <a:buChar char="»"/>
+            </a:pPr>
+            <a:r>
+              <a:rPr lang="hu-HU" dirty="0">
+                <a:solidFill>
+                  <a:schemeClr val="bg2">
+                    <a:lumMod val="50000"/>
+                  </a:schemeClr>
+                </a:solidFill>
+                <a:latin typeface="Lucida Fax" panose="02060602050505020204" pitchFamily="18" charset="0"/>
+              </a:rPr>
+              <a:t>Webfejlesztés</a:t>
+            </a:r>
+          </a:p>
+        </p:txBody>
+      </p:sp>
+    </p:spTree>
+    <p:extLst>
+      <p:ext uri="{BB962C8B-B14F-4D97-AF65-F5344CB8AC3E}">
+        <p14:creationId xmlns:p14="http://schemas.microsoft.com/office/powerpoint/2010/main" val="1393086071"/>
+      </p:ext>
+    </p:extLst>
+  </p:cSld>
+  <p:clrMapOvr>
+    <a:masterClrMapping/>
+  </p:clrMapOvr>
+  <mc:AlternateContent xmlns:mc="http://schemas.openxmlformats.org/markup-compatibility/2006">
+    <mc:Choice xmlns:p159="http://schemas.microsoft.com/office/powerpoint/2015/09/main" Requires="p159">
+      <p:transition xmlns:p14="http://schemas.microsoft.com/office/powerpoint/2010/main" spd="slow" p14:dur="2000">
+        <p159:morph option="byObject"/>
+      </p:transition>
+    </mc:Choice>
+    <mc:Fallback>
+      <p:transition spd="slow">
+        <p:fade/>
+      </p:transition>
+    </mc:Fallback>
+  </mc:AlternateContent>
+  <p:timing>
+    <p:tnLst>
+      <p:par>
+        <p:cTn id="1" dur="indefinite" restart="never" nodeType="tmRoot">
+          <p:childTnLst>
+            <p:seq concurrent="1" nextAc="seek">
+              <p:cTn id="2" dur="indefinite" nodeType="mainSeq">
+                <p:childTnLst>
+                  <p:par>
+                    <p:cTn id="3" fill="hold">
+                      <p:stCondLst>
+                        <p:cond delay="indefinite"/>
+                        <p:cond evt="onBegin" delay="0">
+                          <p:tn val="2"/>
+                        </p:cond>
+                      </p:stCondLst>
+                      <p:childTnLst>
+                        <p:par>
+                          <p:cTn id="4" fill="hold">
+                            <p:stCondLst>
+                              <p:cond delay="0"/>
+                            </p:stCondLst>
+                            <p:childTnLst>
+                              <p:par>
+                                <p:cTn id="5" presetID="10" presetClass="entr" presetSubtype="0" fill="hold" grpId="0" nodeType="afterEffect">
+                                  <p:stCondLst>
+                                    <p:cond delay="0"/>
+                                  </p:stCondLst>
+                                  <p:childTnLst>
+                                    <p:set>
+                                      <p:cBhvr>
+                                        <p:cTn id="6" dur="1" fill="hold">
+                                          <p:stCondLst>
+                                            <p:cond delay="0"/>
+                                          </p:stCondLst>
+                                        </p:cTn>
+                                        <p:tgtEl>
+                                          <p:spTgt spid="2"/>
+                                        </p:tgtEl>
+                                        <p:attrNameLst>
+                                          <p:attrName>style.visibility</p:attrName>
+                                        </p:attrNameLst>
+                                      </p:cBhvr>
+                                      <p:to>
+                                        <p:strVal val="visible"/>
+                                      </p:to>
+                                    </p:set>
+                                    <p:animEffect transition="in" filter="fade">
+                                      <p:cBhvr>
+                                        <p:cTn id="7" dur="500"/>
+                                        <p:tgtEl>
+                                          <p:spTgt spid="2"/>
+                                        </p:tgtEl>
+                                      </p:cBhvr>
+                                    </p:animEffect>
+                                  </p:childTnLst>
+                                </p:cTn>
+                              </p:par>
+                              <p:par>
+                                <p:cTn id="8" presetID="10" presetClass="entr" presetSubtype="0" fill="hold" grpId="0" nodeType="withEffect">
+                                  <p:stCondLst>
+                                    <p:cond delay="0"/>
+                                  </p:stCondLst>
+                                  <p:childTnLst>
+                                    <p:set>
+                                      <p:cBhvr>
+                                        <p:cTn id="9" dur="1" fill="hold">
+                                          <p:stCondLst>
+                                            <p:cond delay="0"/>
+                                          </p:stCondLst>
+                                        </p:cTn>
+                                        <p:tgtEl>
+                                          <p:spTgt spid="9">
+                                            <p:txEl>
+                                              <p:pRg st="0" end="0"/>
+                                            </p:txEl>
+                                          </p:spTgt>
+                                        </p:tgtEl>
+                                        <p:attrNameLst>
+                                          <p:attrName>style.visibility</p:attrName>
+                                        </p:attrNameLst>
+                                      </p:cBhvr>
+                                      <p:to>
+                                        <p:strVal val="visible"/>
+                                      </p:to>
+                                    </p:set>
+                                    <p:animEffect transition="in" filter="fade">
+                                      <p:cBhvr>
+                                        <p:cTn id="10" dur="500"/>
+                                        <p:tgtEl>
+                                          <p:spTgt spid="9">
+                                            <p:txEl>
+                                              <p:pRg st="0" end="0"/>
+                                            </p:txEl>
+                                          </p:spTgt>
+                                        </p:tgtEl>
+                                      </p:cBhvr>
+                                    </p:animEffect>
+                                  </p:childTnLst>
+                                </p:cTn>
+                              </p:par>
+                              <p:par>
+                                <p:cTn id="11" presetID="10" presetClass="entr" presetSubtype="0" fill="hold" grpId="0" nodeType="withEffect">
+                                  <p:stCondLst>
+                                    <p:cond delay="0"/>
+                                  </p:stCondLst>
+                                  <p:childTnLst>
+                                    <p:set>
+                                      <p:cBhvr>
+                                        <p:cTn id="12" dur="1" fill="hold">
+                                          <p:stCondLst>
+                                            <p:cond delay="0"/>
+                                          </p:stCondLst>
+                                        </p:cTn>
+                                        <p:tgtEl>
+                                          <p:spTgt spid="9">
+                                            <p:txEl>
+                                              <p:pRg st="1" end="1"/>
+                                            </p:txEl>
+                                          </p:spTgt>
+                                        </p:tgtEl>
+                                        <p:attrNameLst>
+                                          <p:attrName>style.visibility</p:attrName>
+                                        </p:attrNameLst>
+                                      </p:cBhvr>
+                                      <p:to>
+                                        <p:strVal val="visible"/>
+                                      </p:to>
+                                    </p:set>
+                                    <p:animEffect transition="in" filter="fade">
+                                      <p:cBhvr>
+                                        <p:cTn id="13" dur="500"/>
+                                        <p:tgtEl>
+                                          <p:spTgt spid="9">
+                                            <p:txEl>
+                                              <p:pRg st="1" end="1"/>
+                                            </p:txEl>
+                                          </p:spTgt>
+                                        </p:tgtEl>
+                                      </p:cBhvr>
+                                    </p:animEffect>
+                                  </p:childTnLst>
+                                </p:cTn>
+                              </p:par>
+                              <p:par>
+                                <p:cTn id="14" presetID="10" presetClass="entr" presetSubtype="0" fill="hold" grpId="0" nodeType="withEffect">
+                                  <p:stCondLst>
+                                    <p:cond delay="0"/>
+                                  </p:stCondLst>
+                                  <p:childTnLst>
+                                    <p:set>
+                                      <p:cBhvr>
+                                        <p:cTn id="15" dur="1" fill="hold">
+                                          <p:stCondLst>
+                                            <p:cond delay="0"/>
+                                          </p:stCondLst>
+                                        </p:cTn>
+                                        <p:tgtEl>
+                                          <p:spTgt spid="9">
+                                            <p:txEl>
+                                              <p:pRg st="2" end="2"/>
+                                            </p:txEl>
+                                          </p:spTgt>
+                                        </p:tgtEl>
+                                        <p:attrNameLst>
+                                          <p:attrName>style.visibility</p:attrName>
+                                        </p:attrNameLst>
+                                      </p:cBhvr>
+                                      <p:to>
+                                        <p:strVal val="visible"/>
+                                      </p:to>
+                                    </p:set>
+                                    <p:animEffect transition="in" filter="fade">
+                                      <p:cBhvr>
+                                        <p:cTn id="16" dur="500"/>
+                                        <p:tgtEl>
+                                          <p:spTgt spid="9">
+                                            <p:txEl>
+                                              <p:pRg st="2" end="2"/>
+                                            </p:txEl>
+                                          </p:spTgt>
+                                        </p:tgtEl>
+                                      </p:cBhvr>
+                                    </p:animEffect>
+                                  </p:childTnLst>
+                                </p:cTn>
+                              </p:par>
+                              <p:par>
+                                <p:cTn id="17" presetID="10" presetClass="entr" presetSubtype="0" fill="hold" grpId="0" nodeType="withEffect">
+                                  <p:stCondLst>
+                                    <p:cond delay="0"/>
+                                  </p:stCondLst>
+                                  <p:childTnLst>
+                                    <p:set>
+                                      <p:cBhvr>
+                                        <p:cTn id="18" dur="1" fill="hold">
+                                          <p:stCondLst>
+                                            <p:cond delay="0"/>
+                                          </p:stCondLst>
+                                        </p:cTn>
+                                        <p:tgtEl>
+                                          <p:spTgt spid="9">
+                                            <p:txEl>
+                                              <p:pRg st="3" end="3"/>
+                                            </p:txEl>
+                                          </p:spTgt>
+                                        </p:tgtEl>
+                                        <p:attrNameLst>
+                                          <p:attrName>style.visibility</p:attrName>
+                                        </p:attrNameLst>
+                                      </p:cBhvr>
+                                      <p:to>
+                                        <p:strVal val="visible"/>
+                                      </p:to>
+                                    </p:set>
+                                    <p:animEffect transition="in" filter="fade">
+                                      <p:cBhvr>
+                                        <p:cTn id="19" dur="500"/>
+                                        <p:tgtEl>
+                                          <p:spTgt spid="9">
+                                            <p:txEl>
+                                              <p:pRg st="3" end="3"/>
+                                            </p:txEl>
+                                          </p:spTgt>
+                                        </p:tgtEl>
+                                      </p:cBhvr>
+                                    </p:animEffect>
+                                  </p:childTnLst>
+                                </p:cTn>
+                              </p:par>
+                              <p:par>
+                                <p:cTn id="20" presetID="10" presetClass="entr" presetSubtype="0" fill="hold" grpId="0" nodeType="withEffect">
+                                  <p:stCondLst>
+                                    <p:cond delay="0"/>
+                                  </p:stCondLst>
+                                  <p:childTnLst>
+                                    <p:set>
+                                      <p:cBhvr>
+                                        <p:cTn id="21" dur="1" fill="hold">
+                                          <p:stCondLst>
+                                            <p:cond delay="0"/>
+                                          </p:stCondLst>
+                                        </p:cTn>
+                                        <p:tgtEl>
+                                          <p:spTgt spid="9">
+                                            <p:txEl>
+                                              <p:pRg st="4" end="4"/>
+                                            </p:txEl>
+                                          </p:spTgt>
+                                        </p:tgtEl>
+                                        <p:attrNameLst>
+                                          <p:attrName>style.visibility</p:attrName>
+                                        </p:attrNameLst>
+                                      </p:cBhvr>
+                                      <p:to>
+                                        <p:strVal val="visible"/>
+                                      </p:to>
+                                    </p:set>
+                                    <p:animEffect transition="in" filter="fade">
+                                      <p:cBhvr>
+                                        <p:cTn id="22" dur="500"/>
+                                        <p:tgtEl>
+                                          <p:spTgt spid="9">
+                                            <p:txEl>
+                                              <p:pRg st="4" end="4"/>
+                                            </p:txEl>
+                                          </p:spTgt>
+                                        </p:tgtEl>
+                                      </p:cBhvr>
+                                    </p:animEffect>
+                                  </p:childTnLst>
+                                </p:cTn>
+                              </p:par>
+                            </p:childTnLst>
+                          </p:cTn>
+                        </p:par>
+                      </p:childTnLst>
+                    </p:cTn>
+                  </p:par>
+                </p:childTnLst>
+              </p:cTn>
+              <p:prevCondLst>
+                <p:cond evt="onPrev" delay="0">
+                  <p:tgtEl>
+                    <p:sldTgt/>
+                  </p:tgtEl>
+                </p:cond>
+              </p:prevCondLst>
+              <p:nextCondLst>
+                <p:cond evt="onNext" delay="0">
+                  <p:tgtEl>
+                    <p:sldTgt/>
+                  </p:tgtEl>
+                </p:cond>
+              </p:nextCondLst>
+            </p:seq>
+          </p:childTnLst>
+        </p:cTn>
+      </p:par>
+    </p:tnLst>
+    <p:bldLst>
+      <p:bldP spid="2" grpId="0"/>
+      <p:bldP spid="9" grpId="0" uiExpand="1" build="p"/>
+    </p:bldLst>
+  </p:timing>
+</p:sld>
+</file>
+
+<file path=ppt/slides/slide8.xml><?xml version="1.0" encoding="utf-8"?>
+<p:sld xmlns:a="http://schemas.openxmlformats.org/drawingml/2006/main" xmlns:r="http://schemas.openxmlformats.org/officeDocument/2006/relationships" xmlns:p="http://schemas.openxmlformats.org/presentationml/2006/main">
+  <p:cSld>
+    <p:bg>
+      <p:bgPr>
+        <a:gradFill>
+          <a:gsLst>
+            <a:gs pos="20000">
+              <a:srgbClr val="296075"/>
+            </a:gs>
+            <a:gs pos="80000">
+              <a:srgbClr val="296075"/>
+            </a:gs>
+            <a:gs pos="64190">
+              <a:srgbClr val="27383D"/>
+            </a:gs>
+            <a:gs pos="41000">
+              <a:srgbClr val="27383D"/>
+            </a:gs>
+            <a:gs pos="4000">
+              <a:srgbClr val="57C785"/>
+            </a:gs>
+            <a:gs pos="100000">
+              <a:srgbClr val="57C785"/>
+            </a:gs>
+          </a:gsLst>
+          <a:lin ang="2400000" scaled="0"/>
+        </a:gradFill>
+        <a:effectLst/>
+      </p:bgPr>
+    </p:bg>
+    <p:spTree>
+      <p:nvGrpSpPr>
+        <p:cNvPr id="1" name="">
+          <a:extLst>
+            <a:ext uri="{FF2B5EF4-FFF2-40B4-BE49-F238E27FC236}">
+              <a16:creationId xmlns:a16="http://schemas.microsoft.com/office/drawing/2014/main" id="{FF0A7D2C-62E1-68A2-E9F7-7552C3534729}"/>
+            </a:ext>
+          </a:extLst>
+        </p:cNvPr>
+        <p:cNvGrpSpPr/>
+        <p:nvPr/>
+      </p:nvGrpSpPr>
+      <p:grpSpPr>
+        <a:xfrm>
+          <a:off x="0" y="0"/>
+          <a:ext cx="0" cy="0"/>
+          <a:chOff x="0" y="0"/>
+          <a:chExt cx="0" cy="0"/>
+        </a:xfrm>
+      </p:grpSpPr>
+      <p:sp>
+        <p:nvSpPr>
+          <p:cNvPr id="6" name="!!tapasztalatok">
+            <a:extLst>
+              <a:ext uri="{FF2B5EF4-FFF2-40B4-BE49-F238E27FC236}">
+                <a16:creationId xmlns:a16="http://schemas.microsoft.com/office/drawing/2014/main" id="{3F45801B-AD44-D3DC-9A4B-6F4C3D8FDE42}"/>
+              </a:ext>
+            </a:extLst>
+          </p:cNvPr>
+          <p:cNvSpPr/>
+          <p:nvPr/>
+        </p:nvSpPr>
+        <p:spPr>
+          <a:xfrm>
+            <a:off x="6239934" y="5074708"/>
+            <a:ext cx="2650067" cy="1464733"/>
+          </a:xfrm>
+          <a:prstGeom prst="roundRect">
+            <a:avLst/>
+          </a:prstGeom>
+          <a:gradFill>
+            <a:gsLst>
+              <a:gs pos="4000">
+                <a:srgbClr val="7030A0"/>
+              </a:gs>
+              <a:gs pos="93578">
+                <a:srgbClr val="7030A0"/>
+              </a:gs>
+              <a:gs pos="64000">
+                <a:srgbClr val="FFCC66"/>
+              </a:gs>
+              <a:gs pos="55000">
+                <a:srgbClr val="FFFF00"/>
+              </a:gs>
+              <a:gs pos="44000">
+                <a:srgbClr val="FFCC66"/>
+              </a:gs>
+            </a:gsLst>
+            <a:lin ang="7800000" scaled="0"/>
+          </a:gradFill>
+          <a:ln w="19050">
+            <a:solidFill>
+              <a:schemeClr val="bg1"/>
+            </a:solidFill>
+          </a:ln>
+          <a:effectLst>
+            <a:glow rad="101600">
+              <a:schemeClr val="bg1">
+                <a:alpha val="40000"/>
+              </a:schemeClr>
+            </a:glow>
+          </a:effectLst>
+        </p:spPr>
+        <p:style>
+          <a:lnRef idx="2">
+            <a:schemeClr val="accent1">
+              <a:shade val="50000"/>
+            </a:schemeClr>
+          </a:lnRef>
+          <a:fillRef idx="1">
+            <a:schemeClr val="accent1"/>
+          </a:fillRef>
+          <a:effectRef idx="0">
+            <a:schemeClr val="accent1"/>
+          </a:effectRef>
+          <a:fontRef idx="minor">
+            <a:schemeClr val="lt1"/>
+          </a:fontRef>
+        </p:style>
+        <p:txBody>
+          <a:bodyPr rtlCol="0" anchor="ctr"/>
+          <a:lstStyle/>
+          <a:p>
+            <a:pPr algn="ctr"/>
+            <a:r>
+              <a:rPr lang="hu-HU" dirty="0">
+                <a:solidFill>
+                  <a:schemeClr val="bg2">
+                    <a:lumMod val="50000"/>
+                  </a:schemeClr>
+                </a:solidFill>
+                <a:latin typeface="Lucida Fax" panose="02060602050505020204" pitchFamily="18" charset="0"/>
+              </a:rPr>
+              <a:t>Tapasztalatok</a:t>
+            </a:r>
+          </a:p>
+        </p:txBody>
+      </p:sp>
+      <p:sp>
+        <p:nvSpPr>
+          <p:cNvPr id="8" name="!!forras">
+            <a:extLst>
+              <a:ext uri="{FF2B5EF4-FFF2-40B4-BE49-F238E27FC236}">
+                <a16:creationId xmlns:a16="http://schemas.microsoft.com/office/drawing/2014/main" id="{9C163F61-388A-A99B-9A56-6787C0C26569}"/>
+              </a:ext>
+            </a:extLst>
+          </p:cNvPr>
+          <p:cNvSpPr/>
+          <p:nvPr/>
+        </p:nvSpPr>
+        <p:spPr>
+          <a:xfrm>
+            <a:off x="9194801" y="5070474"/>
+            <a:ext cx="2650067" cy="1464733"/>
+          </a:xfrm>
+          <a:prstGeom prst="roundRect">
+            <a:avLst/>
+          </a:prstGeom>
+          <a:gradFill flip="none" rotWithShape="1">
+            <a:gsLst>
+              <a:gs pos="38528">
+                <a:schemeClr val="bg2">
+                  <a:lumMod val="50000"/>
+                </a:schemeClr>
+              </a:gs>
+              <a:gs pos="63000">
+                <a:schemeClr val="bg2">
+                  <a:lumMod val="50000"/>
+                </a:schemeClr>
+              </a:gs>
+              <a:gs pos="76000">
+                <a:schemeClr val="bg2">
+                  <a:lumMod val="75000"/>
+                </a:schemeClr>
+              </a:gs>
+              <a:gs pos="25000">
+                <a:schemeClr val="bg2">
+                  <a:lumMod val="75000"/>
+                </a:schemeClr>
+              </a:gs>
+              <a:gs pos="4000">
+                <a:schemeClr val="bg1"/>
+              </a:gs>
+              <a:gs pos="100000">
+                <a:schemeClr val="bg1"/>
+              </a:gs>
+            </a:gsLst>
+            <a:lin ang="7800000" scaled="0"/>
+            <a:tileRect/>
+          </a:gradFill>
+          <a:ln w="19050">
+            <a:solidFill>
+              <a:schemeClr val="bg1"/>
+            </a:solidFill>
+          </a:ln>
+          <a:effectLst>
+            <a:glow rad="101600">
+              <a:schemeClr val="bg1">
+                <a:alpha val="40000"/>
+              </a:schemeClr>
+            </a:glow>
+          </a:effectLst>
+        </p:spPr>
+        <p:style>
+          <a:lnRef idx="2">
+            <a:schemeClr val="accent1">
+              <a:shade val="50000"/>
+            </a:schemeClr>
+          </a:lnRef>
+          <a:fillRef idx="1">
+            <a:schemeClr val="accent1"/>
+          </a:fillRef>
+          <a:effectRef idx="0">
+            <a:schemeClr val="accent1"/>
+          </a:effectRef>
+          <a:fontRef idx="minor">
+            <a:schemeClr val="lt1"/>
+          </a:fontRef>
+        </p:style>
+        <p:txBody>
+          <a:bodyPr rtlCol="0" anchor="ctr"/>
+          <a:lstStyle/>
+          <a:p>
+            <a:pPr algn="ctr"/>
+            <a:r>
+              <a:rPr lang="hu-HU" dirty="0">
+                <a:latin typeface="Lucida Fax" panose="02060602050505020204" pitchFamily="18" charset="0"/>
+              </a:rPr>
+              <a:t>Források</a:t>
+            </a:r>
+          </a:p>
+        </p:txBody>
+      </p:sp>
+      <p:sp>
+        <p:nvSpPr>
+          <p:cNvPr id="2" name="!!feladat_megoszt">
+            <a:extLst>
+              <a:ext uri="{FF2B5EF4-FFF2-40B4-BE49-F238E27FC236}">
+                <a16:creationId xmlns:a16="http://schemas.microsoft.com/office/drawing/2014/main" id="{1FA39D70-53A4-7CF6-0FB9-C9A4120D09DE}"/>
+              </a:ext>
+            </a:extLst>
+          </p:cNvPr>
+          <p:cNvSpPr/>
+          <p:nvPr/>
+        </p:nvSpPr>
+        <p:spPr>
+          <a:xfrm>
+            <a:off x="347132" y="5070474"/>
+            <a:ext cx="2650067" cy="1464733"/>
+          </a:xfrm>
+          <a:prstGeom prst="roundRect">
+            <a:avLst/>
+          </a:prstGeom>
+          <a:gradFill>
+            <a:gsLst>
+              <a:gs pos="90000">
+                <a:srgbClr val="296075"/>
+              </a:gs>
+              <a:gs pos="8000">
+                <a:srgbClr val="296075"/>
+              </a:gs>
+              <a:gs pos="41000">
+                <a:srgbClr val="57C785"/>
+              </a:gs>
+              <a:gs pos="62000">
+                <a:srgbClr val="57C785"/>
+              </a:gs>
+            </a:gsLst>
+            <a:lin ang="2400000" scaled="0"/>
+          </a:gradFill>
+          <a:ln w="19050">
+            <a:solidFill>
+              <a:schemeClr val="bg1"/>
+            </a:solidFill>
+          </a:ln>
+          <a:effectLst>
+            <a:glow rad="101600">
+              <a:schemeClr val="bg1">
+                <a:alpha val="40000"/>
+              </a:schemeClr>
+            </a:glow>
+          </a:effectLst>
+        </p:spPr>
+        <p:style>
+          <a:lnRef idx="2">
+            <a:schemeClr val="accent1">
+              <a:shade val="50000"/>
+            </a:schemeClr>
+          </a:lnRef>
+          <a:fillRef idx="1">
+            <a:schemeClr val="accent1"/>
+          </a:fillRef>
+          <a:effectRef idx="0">
+            <a:schemeClr val="accent1"/>
+          </a:effectRef>
+          <a:fontRef idx="minor">
+            <a:schemeClr val="lt1"/>
+          </a:fontRef>
+        </p:style>
+        <p:txBody>
+          <a:bodyPr rtlCol="0" anchor="ctr"/>
+          <a:lstStyle/>
+          <a:p>
+            <a:pPr algn="ctr"/>
+            <a:r>
+              <a:rPr lang="hu-HU" dirty="0">
+                <a:latin typeface="Lucida Fax" panose="02060602050505020204" pitchFamily="18" charset="0"/>
+              </a:rPr>
+              <a:t>Feladat Megosztás</a:t>
+            </a:r>
+          </a:p>
+        </p:txBody>
+      </p:sp>
+      <p:sp>
+        <p:nvSpPr>
+          <p:cNvPr id="3" name="Téglalap: lekerekített 2">
+            <a:extLst>
+              <a:ext uri="{FF2B5EF4-FFF2-40B4-BE49-F238E27FC236}">
+                <a16:creationId xmlns:a16="http://schemas.microsoft.com/office/drawing/2014/main" id="{F0E9E05B-5B8A-1810-DA32-39D18BF30C97}"/>
+              </a:ext>
+            </a:extLst>
+          </p:cNvPr>
+          <p:cNvSpPr/>
+          <p:nvPr/>
+        </p:nvSpPr>
+        <p:spPr>
+          <a:xfrm>
+            <a:off x="3301999" y="5070475"/>
+            <a:ext cx="2650067" cy="1464733"/>
+          </a:xfrm>
+          <a:prstGeom prst="roundRect">
+            <a:avLst/>
+          </a:prstGeom>
+          <a:gradFill>
+            <a:gsLst>
+              <a:gs pos="4000">
+                <a:srgbClr val="FF0000"/>
+              </a:gs>
+              <a:gs pos="57000">
+                <a:schemeClr val="accent4"/>
+              </a:gs>
+              <a:gs pos="80396">
+                <a:schemeClr val="accent4">
+                  <a:lumMod val="40000"/>
+                  <a:lumOff val="60000"/>
+                </a:schemeClr>
+              </a:gs>
+              <a:gs pos="27000">
+                <a:schemeClr val="accent4">
+                  <a:lumMod val="40000"/>
+                  <a:lumOff val="60000"/>
+                </a:schemeClr>
+              </a:gs>
+              <a:gs pos="100000">
+                <a:srgbClr val="FF0000"/>
+              </a:gs>
+            </a:gsLst>
+            <a:lin ang="2400000" scaled="0"/>
+          </a:gradFill>
+          <a:ln w="19050">
+            <a:solidFill>
+              <a:schemeClr val="bg1"/>
+            </a:solidFill>
+          </a:ln>
+          <a:effectLst>
+            <a:glow rad="101600">
+              <a:schemeClr val="bg1">
+                <a:alpha val="40000"/>
+              </a:schemeClr>
+            </a:glow>
+          </a:effectLst>
+        </p:spPr>
+        <p:style>
+          <a:lnRef idx="2">
+            <a:schemeClr val="accent1">
+              <a:shade val="50000"/>
+            </a:schemeClr>
+          </a:lnRef>
+          <a:fillRef idx="1">
+            <a:schemeClr val="accent1"/>
+          </a:fillRef>
+          <a:effectRef idx="0">
+            <a:schemeClr val="accent1"/>
+          </a:effectRef>
+          <a:fontRef idx="minor">
+            <a:schemeClr val="lt1"/>
+          </a:fontRef>
+        </p:style>
+        <p:txBody>
+          <a:bodyPr rtlCol="0" anchor="ctr"/>
+          <a:lstStyle/>
+          <a:p>
+            <a:pPr algn="ctr"/>
+            <a:r>
+              <a:rPr lang="hu-HU" dirty="0">
+                <a:solidFill>
+                  <a:schemeClr val="bg2">
+                    <a:lumMod val="50000"/>
+                  </a:schemeClr>
+                </a:solidFill>
+                <a:latin typeface="Lucida Fax" panose="02060602050505020204" pitchFamily="18" charset="0"/>
+              </a:rPr>
+              <a:t>Időbeosztás</a:t>
+            </a:r>
+          </a:p>
+        </p:txBody>
+      </p:sp>
+      <p:sp>
+        <p:nvSpPr>
+          <p:cNvPr id="7" name="Szövegdoboz 6">
+            <a:extLst>
+              <a:ext uri="{FF2B5EF4-FFF2-40B4-BE49-F238E27FC236}">
+                <a16:creationId xmlns:a16="http://schemas.microsoft.com/office/drawing/2014/main" id="{D0F397C3-986C-90BD-A4F0-1455DB189D10}"/>
+              </a:ext>
+            </a:extLst>
+          </p:cNvPr>
+          <p:cNvSpPr txBox="1"/>
+          <p:nvPr/>
+        </p:nvSpPr>
+        <p:spPr>
+          <a:xfrm>
+            <a:off x="1865841" y="600075"/>
+            <a:ext cx="8782050" cy="1015663"/>
+          </a:xfrm>
+          <a:prstGeom prst="rect">
+            <a:avLst/>
+          </a:prstGeom>
+          <a:noFill/>
+        </p:spPr>
+        <p:txBody>
+          <a:bodyPr wrap="square" rtlCol="0">
+            <a:spAutoFit/>
+          </a:bodyPr>
+          <a:lstStyle/>
+          <a:p>
+            <a:pPr algn="ctr"/>
+            <a:r>
+              <a:rPr lang="hu-HU" sz="6000" b="1" u="sng" dirty="0">
+                <a:solidFill>
+                  <a:srgbClr val="57C785"/>
+                </a:solidFill>
+                <a:latin typeface="Lucida Fax" panose="02060602050505020204" pitchFamily="18" charset="0"/>
+              </a:rPr>
+              <a:t>Tartalom:</a:t>
+            </a:r>
+          </a:p>
+        </p:txBody>
+      </p:sp>
+    </p:spTree>
+    <p:extLst>
+      <p:ext uri="{BB962C8B-B14F-4D97-AF65-F5344CB8AC3E}">
+        <p14:creationId xmlns:p14="http://schemas.microsoft.com/office/powerpoint/2010/main" val="3853579695"/>
+      </p:ext>
+    </p:extLst>
+  </p:cSld>
+  <p:clrMapOvr>
+    <a:masterClrMapping/>
+  </p:clrMapOvr>
+  <mc:AlternateContent xmlns:mc="http://schemas.openxmlformats.org/markup-compatibility/2006">
+    <mc:Choice xmlns:p14="http://schemas.microsoft.com/office/powerpoint/2010/main" Requires="p14">
+      <p:transition spd="slow" p14:dur="1400" advClick="0" advTm="1000">
+        <p14:ripple/>
+      </p:transition>
+    </mc:Choice>
+    <mc:Fallback>
+      <p:transition spd="slow" advClick="0" advTm="1000">
+        <p:fade/>
+      </p:transition>
+    </mc:Fallback>
+  </mc:AlternateContent>
+</p:sld>
+</file>
+
+<file path=ppt/slides/slide9.xml><?xml version="1.0" encoding="utf-8"?>
+<p:sld xmlns:a="http://schemas.openxmlformats.org/drawingml/2006/main" xmlns:r="http://schemas.openxmlformats.org/officeDocument/2006/relationships" xmlns:p="http://schemas.openxmlformats.org/presentationml/2006/main">
+  <p:cSld>
+    <p:bg>
+      <p:bgPr>
+        <a:gradFill>
+          <a:gsLst>
+            <a:gs pos="20000">
+              <a:srgbClr val="296075"/>
+            </a:gs>
+            <a:gs pos="80000">
+              <a:srgbClr val="296075"/>
+            </a:gs>
+            <a:gs pos="64190">
+              <a:srgbClr val="27383D"/>
+            </a:gs>
+            <a:gs pos="41000">
+              <a:srgbClr val="27383D"/>
+            </a:gs>
+            <a:gs pos="4000">
+              <a:srgbClr val="57C785"/>
+            </a:gs>
+            <a:gs pos="100000">
+              <a:srgbClr val="57C785"/>
+            </a:gs>
+          </a:gsLst>
+          <a:lin ang="2400000" scaled="0"/>
+        </a:gradFill>
+        <a:effectLst/>
+      </p:bgPr>
+    </p:bg>
+    <p:spTree>
+      <p:nvGrpSpPr>
+        <p:cNvPr id="1" name="">
+          <a:extLst>
+            <a:ext uri="{FF2B5EF4-FFF2-40B4-BE49-F238E27FC236}">
+              <a16:creationId xmlns:a16="http://schemas.microsoft.com/office/drawing/2014/main" id="{21039F1F-1B83-A2FF-4E9A-C95C90E58662}"/>
+            </a:ext>
+          </a:extLst>
+        </p:cNvPr>
+        <p:cNvGrpSpPr/>
+        <p:nvPr/>
+      </p:nvGrpSpPr>
+      <p:grpSpPr>
+        <a:xfrm>
+          <a:off x="0" y="0"/>
+          <a:ext cx="0" cy="0"/>
+          <a:chOff x="0" y="0"/>
+          <a:chExt cx="0" cy="0"/>
+        </a:xfrm>
+      </p:grpSpPr>
+      <p:sp>
+        <p:nvSpPr>
+          <p:cNvPr id="6" name="!!forras">
+            <a:extLst>
+              <a:ext uri="{FF2B5EF4-FFF2-40B4-BE49-F238E27FC236}">
+                <a16:creationId xmlns:a16="http://schemas.microsoft.com/office/drawing/2014/main" id="{C23F7EE9-BB9C-11C6-EE10-773E85FBDEF5}"/>
+              </a:ext>
+            </a:extLst>
+          </p:cNvPr>
+          <p:cNvSpPr/>
+          <p:nvPr/>
+        </p:nvSpPr>
+        <p:spPr>
+          <a:xfrm>
+            <a:off x="347131" y="357626"/>
+            <a:ext cx="11206239" cy="6193862"/>
+          </a:xfrm>
+          <a:prstGeom prst="roundRect">
+            <a:avLst/>
+          </a:prstGeom>
+          <a:gradFill flip="none" rotWithShape="1">
+            <a:gsLst>
+              <a:gs pos="38528">
+                <a:schemeClr val="bg2">
+                  <a:lumMod val="50000"/>
+                </a:schemeClr>
+              </a:gs>
+              <a:gs pos="63000">
+                <a:schemeClr val="bg2">
+                  <a:lumMod val="50000"/>
+                </a:schemeClr>
+              </a:gs>
+              <a:gs pos="76000">
+                <a:schemeClr val="bg2">
+                  <a:lumMod val="75000"/>
+                </a:schemeClr>
+              </a:gs>
+              <a:gs pos="25000">
+                <a:schemeClr val="bg2">
+                  <a:lumMod val="75000"/>
+                </a:schemeClr>
+              </a:gs>
+              <a:gs pos="4000">
+                <a:schemeClr val="bg1"/>
+              </a:gs>
+              <a:gs pos="100000">
+                <a:schemeClr val="bg1"/>
+              </a:gs>
+            </a:gsLst>
+            <a:lin ang="7800000" scaled="0"/>
+            <a:tileRect/>
+          </a:gradFill>
+          <a:ln w="19050">
+            <a:solidFill>
+              <a:schemeClr val="bg1"/>
+            </a:solidFill>
+          </a:ln>
+          <a:effectLst>
+            <a:glow rad="101600">
+              <a:schemeClr val="bg1">
+                <a:alpha val="40000"/>
+              </a:schemeClr>
+            </a:glow>
+          </a:effectLst>
+        </p:spPr>
+        <p:style>
+          <a:lnRef idx="2">
+            <a:schemeClr val="accent1">
+              <a:shade val="50000"/>
+            </a:schemeClr>
+          </a:lnRef>
+          <a:fillRef idx="1">
+            <a:schemeClr val="accent1"/>
+          </a:fillRef>
+          <a:effectRef idx="0">
+            <a:schemeClr val="accent1"/>
+          </a:effectRef>
+          <a:fontRef idx="minor">
+            <a:schemeClr val="lt1"/>
+          </a:fontRef>
+        </p:style>
+        <p:txBody>
+          <a:bodyPr rtlCol="0" anchor="ctr"/>
+          <a:lstStyle/>
+          <a:p>
+            <a:pPr algn="ctr"/>
+            <a:endParaRPr lang="hu-HU" dirty="0">
+              <a:latin typeface="Lucida Fax" panose="02060602050505020204" pitchFamily="18" charset="0"/>
+            </a:endParaRPr>
+          </a:p>
+        </p:txBody>
+      </p:sp>
+      <p:sp>
+        <p:nvSpPr>
+          <p:cNvPr id="2" name="Cím 1">
+            <a:extLst>
+              <a:ext uri="{FF2B5EF4-FFF2-40B4-BE49-F238E27FC236}">
+                <a16:creationId xmlns:a16="http://schemas.microsoft.com/office/drawing/2014/main" id="{2FF71BD9-23F8-CAA0-DF64-7AF26C2CD466}"/>
+              </a:ext>
+            </a:extLst>
+          </p:cNvPr>
+          <p:cNvSpPr>
+            <a:spLocks noGrp="1"/>
+          </p:cNvSpPr>
+          <p:nvPr>
+            <p:ph type="title"/>
+          </p:nvPr>
+        </p:nvSpPr>
+        <p:spPr>
+          <a:xfrm>
+            <a:off x="638629" y="951316"/>
+            <a:ext cx="10515600" cy="1325563"/>
+          </a:xfrm>
+        </p:spPr>
+        <p:txBody>
+          <a:bodyPr/>
+          <a:lstStyle/>
+          <a:p>
+            <a:r>
+              <a:rPr lang="hu-HU" dirty="0">
+                <a:solidFill>
+                  <a:schemeClr val="bg1"/>
+                </a:solidFill>
+                <a:latin typeface="Lucida Fax" panose="02060602050505020204" pitchFamily="18" charset="0"/>
+              </a:rPr>
+              <a:t>Források :</a:t>
+            </a:r>
+          </a:p>
+        </p:txBody>
+      </p:sp>
+      <p:sp>
+        <p:nvSpPr>
+          <p:cNvPr id="9" name="Content Placeholder 8">
+            <a:extLst>
+              <a:ext uri="{FF2B5EF4-FFF2-40B4-BE49-F238E27FC236}">
+                <a16:creationId xmlns:a16="http://schemas.microsoft.com/office/drawing/2014/main" id="{5B498B46-820D-9059-6FB0-485CDB9AEDEC}"/>
+              </a:ext>
+            </a:extLst>
+          </p:cNvPr>
+          <p:cNvSpPr>
+            <a:spLocks noGrp="1"/>
+          </p:cNvSpPr>
+          <p:nvPr>
+            <p:ph sz="half" idx="2"/>
+          </p:nvPr>
+        </p:nvSpPr>
+        <p:spPr>
+          <a:xfrm>
+            <a:off x="3359452" y="2276879"/>
+            <a:ext cx="5181600" cy="3629805"/>
+          </a:xfrm>
+        </p:spPr>
+        <p:txBody>
+          <a:bodyPr>
+            <a:normAutofit fontScale="92500" lnSpcReduction="10000"/>
+          </a:bodyPr>
+          <a:lstStyle/>
+          <a:p>
+            <a:pPr>
+              <a:buFont typeface="Lucida Fax" panose="02060602050505020204" pitchFamily="18" charset="0"/>
+              <a:buChar char="»"/>
+            </a:pPr>
+            <a:r>
+              <a:rPr lang="hu-HU" dirty="0">
+                <a:solidFill>
+                  <a:schemeClr val="bg1"/>
+                </a:solidFill>
+                <a:latin typeface="Lucida Fax" panose="02060602050505020204" pitchFamily="18" charset="0"/>
+              </a:rPr>
+              <a:t>Tamás bárát</a:t>
+            </a:r>
+          </a:p>
+          <a:p>
+            <a:pPr marL="0" indent="0">
+              <a:buNone/>
+            </a:pPr>
+            <a:endParaRPr lang="hu-HU" dirty="0">
+              <a:solidFill>
+                <a:schemeClr val="bg1"/>
+              </a:solidFill>
+              <a:latin typeface="Lucida Fax" panose="02060602050505020204" pitchFamily="18" charset="0"/>
+            </a:endParaRPr>
+          </a:p>
+          <a:p>
+            <a:pPr>
+              <a:buFont typeface="Lucida Fax" panose="02060602050505020204" pitchFamily="18" charset="0"/>
+              <a:buChar char="»"/>
+            </a:pPr>
+            <a:r>
+              <a:rPr lang="hu-HU" dirty="0">
+                <a:solidFill>
+                  <a:schemeClr val="bg1"/>
+                </a:solidFill>
+                <a:latin typeface="Lucida Fax" panose="02060602050505020204" pitchFamily="18" charset="0"/>
+              </a:rPr>
+              <a:t>A projektben résztvevők brain.sql adatbázisa</a:t>
+            </a:r>
+          </a:p>
+          <a:p>
+            <a:pPr marL="0" indent="0">
+              <a:buNone/>
+            </a:pPr>
+            <a:endParaRPr lang="hu-HU" dirty="0">
+              <a:solidFill>
+                <a:schemeClr val="bg1"/>
+              </a:solidFill>
+              <a:latin typeface="Lucida Fax" panose="02060602050505020204" pitchFamily="18" charset="0"/>
+            </a:endParaRPr>
+          </a:p>
+          <a:p>
+            <a:pPr>
+              <a:buFont typeface="Lucida Fax" panose="02060602050505020204" pitchFamily="18" charset="0"/>
+              <a:buChar char="»"/>
+            </a:pPr>
+            <a:r>
+              <a:rPr lang="hu-HU" dirty="0">
+                <a:solidFill>
+                  <a:schemeClr val="bg1"/>
+                </a:solidFill>
+                <a:latin typeface="Lucida Fax" panose="02060602050505020204" pitchFamily="18" charset="0"/>
+              </a:rPr>
+              <a:t>W3schools</a:t>
+            </a:r>
+          </a:p>
+          <a:p>
+            <a:pPr>
+              <a:buFont typeface="Lucida Fax" panose="02060602050505020204" pitchFamily="18" charset="0"/>
+              <a:buChar char="»"/>
+            </a:pPr>
+            <a:endParaRPr lang="hu-HU" dirty="0">
+              <a:solidFill>
+                <a:schemeClr val="bg1"/>
+              </a:solidFill>
+              <a:latin typeface="Lucida Fax" panose="02060602050505020204" pitchFamily="18" charset="0"/>
+            </a:endParaRPr>
+          </a:p>
+          <a:p>
+            <a:pPr>
+              <a:buFont typeface="Lucida Fax" panose="02060602050505020204" pitchFamily="18" charset="0"/>
+              <a:buChar char="»"/>
+            </a:pPr>
+            <a:r>
+              <a:rPr lang="hu-HU" dirty="0">
+                <a:solidFill>
+                  <a:schemeClr val="bg1"/>
+                </a:solidFill>
+                <a:latin typeface="Lucida Fax" panose="02060602050505020204" pitchFamily="18" charset="0"/>
+              </a:rPr>
+              <a:t>Youtube</a:t>
+            </a:r>
+          </a:p>
+        </p:txBody>
+      </p:sp>
+    </p:spTree>
+    <p:extLst>
+      <p:ext uri="{BB962C8B-B14F-4D97-AF65-F5344CB8AC3E}">
+        <p14:creationId xmlns:p14="http://schemas.microsoft.com/office/powerpoint/2010/main" val="3495907155"/>
+      </p:ext>
+    </p:extLst>
+  </p:cSld>
+  <p:clrMapOvr>
+    <a:masterClrMapping/>
+  </p:clrMapOvr>
+  <mc:AlternateContent xmlns:mc="http://schemas.openxmlformats.org/markup-compatibility/2006">
+    <mc:Choice xmlns:p159="http://schemas.microsoft.com/office/powerpoint/2015/09/main" Requires="p159">
+      <p:transition xmlns:p14="http://schemas.microsoft.com/office/powerpoint/2010/main" spd="slow" p14:dur="2000">
+        <p159:morph option="byObject"/>
+      </p:transition>
+    </mc:Choice>
+    <mc:Fallback>
+      <p:transition spd="slow">
+        <p:fade/>
+      </p:transition>
+    </mc:Fallback>
+  </mc:AlternateContent>
+  <p:timing>
+    <p:tnLst>
+      <p:par>
+        <p:cTn id="1" dur="indefinite" restart="never" nodeType="tmRoot">
+          <p:childTnLst>
+            <p:seq concurrent="1" nextAc="seek">
+              <p:cTn id="2" dur="indefinite" nodeType="mainSeq">
+                <p:childTnLst>
+                  <p:par>
+                    <p:cTn id="3" fill="hold">
+                      <p:stCondLst>
+                        <p:cond delay="indefinite"/>
+                        <p:cond evt="onBegin" delay="0">
+                          <p:tn val="2"/>
+                        </p:cond>
+                      </p:stCondLst>
+                      <p:childTnLst>
+                        <p:par>
+                          <p:cTn id="4" fill="hold">
+                            <p:stCondLst>
+                              <p:cond delay="0"/>
+                            </p:stCondLst>
+                            <p:childTnLst>
+                              <p:par>
+                                <p:cTn id="5" presetID="10" presetClass="entr" presetSubtype="0" fill="hold" grpId="0" nodeType="afterEffect">
+                                  <p:stCondLst>
+                                    <p:cond delay="0"/>
+                                  </p:stCondLst>
+                                  <p:childTnLst>
+                                    <p:set>
+                                      <p:cBhvr>
+                                        <p:cTn id="6" dur="1" fill="hold">
+                                          <p:stCondLst>
+                                            <p:cond delay="0"/>
+                                          </p:stCondLst>
+                                        </p:cTn>
+                                        <p:tgtEl>
+                                          <p:spTgt spid="2"/>
+                                        </p:tgtEl>
+                                        <p:attrNameLst>
+                                          <p:attrName>style.visibility</p:attrName>
+                                        </p:attrNameLst>
+                                      </p:cBhvr>
+                                      <p:to>
+                                        <p:strVal val="visible"/>
+                                      </p:to>
+                                    </p:set>
+                                    <p:animEffect transition="in" filter="fade">
+                                      <p:cBhvr>
+                                        <p:cTn id="7" dur="500"/>
+                                        <p:tgtEl>
+                                          <p:spTgt spid="2"/>
+                                        </p:tgtEl>
+                                      </p:cBhvr>
+                                    </p:animEffect>
+                                  </p:childTnLst>
+                                </p:cTn>
+                              </p:par>
+                              <p:par>
+                                <p:cTn id="8" presetID="10" presetClass="entr" presetSubtype="0" fill="hold" grpId="0" nodeType="withEffect">
+                                  <p:stCondLst>
+                                    <p:cond delay="0"/>
+                                  </p:stCondLst>
+                                  <p:childTnLst>
+                                    <p:set>
+                                      <p:cBhvr>
+                                        <p:cTn id="9" dur="1" fill="hold">
+                                          <p:stCondLst>
+                                            <p:cond delay="0"/>
+                                          </p:stCondLst>
+                                        </p:cTn>
+                                        <p:tgtEl>
+                                          <p:spTgt spid="9">
+                                            <p:txEl>
+                                              <p:pRg st="0" end="0"/>
+                                            </p:txEl>
+                                          </p:spTgt>
+                                        </p:tgtEl>
+                                        <p:attrNameLst>
+                                          <p:attrName>style.visibility</p:attrName>
+                                        </p:attrNameLst>
+                                      </p:cBhvr>
+                                      <p:to>
+                                        <p:strVal val="visible"/>
+                                      </p:to>
+                                    </p:set>
+                                    <p:animEffect transition="in" filter="fade">
+                                      <p:cBhvr>
+                                        <p:cTn id="10" dur="500"/>
+                                        <p:tgtEl>
+                                          <p:spTgt spid="9">
+                                            <p:txEl>
+                                              <p:pRg st="0" end="0"/>
+                                            </p:txEl>
+                                          </p:spTgt>
+                                        </p:tgtEl>
+                                      </p:cBhvr>
+                                    </p:animEffect>
+                                  </p:childTnLst>
+                                </p:cTn>
+                              </p:par>
+                              <p:par>
+                                <p:cTn id="11" presetID="10" presetClass="entr" presetSubtype="0" fill="hold" grpId="0" nodeType="withEffect">
+                                  <p:stCondLst>
+                                    <p:cond delay="0"/>
+                                  </p:stCondLst>
+                                  <p:childTnLst>
+                                    <p:set>
+                                      <p:cBhvr>
+                                        <p:cTn id="12" dur="1" fill="hold">
+                                          <p:stCondLst>
+                                            <p:cond delay="0"/>
+                                          </p:stCondLst>
+                                        </p:cTn>
+                                        <p:tgtEl>
+                                          <p:spTgt spid="9">
+                                            <p:txEl>
+                                              <p:pRg st="2" end="2"/>
+                                            </p:txEl>
+                                          </p:spTgt>
+                                        </p:tgtEl>
+                                        <p:attrNameLst>
+                                          <p:attrName>style.visibility</p:attrName>
+                                        </p:attrNameLst>
+                                      </p:cBhvr>
+                                      <p:to>
+                                        <p:strVal val="visible"/>
+                                      </p:to>
+                                    </p:set>
+                                    <p:animEffect transition="in" filter="fade">
+                                      <p:cBhvr>
+                                        <p:cTn id="13" dur="500"/>
+                                        <p:tgtEl>
+                                          <p:spTgt spid="9">
+                                            <p:txEl>
+                                              <p:pRg st="2" end="2"/>
+                                            </p:txEl>
+                                          </p:spTgt>
+                                        </p:tgtEl>
+                                      </p:cBhvr>
+                                    </p:animEffect>
+                                  </p:childTnLst>
+                                </p:cTn>
+                              </p:par>
+                              <p:par>
+                                <p:cTn id="14" presetID="10" presetClass="entr" presetSubtype="0" fill="hold" grpId="0" nodeType="withEffect">
+                                  <p:stCondLst>
+                                    <p:cond delay="0"/>
+                                  </p:stCondLst>
+                                  <p:childTnLst>
+                                    <p:set>
+                                      <p:cBhvr>
+                                        <p:cTn id="15" dur="1" fill="hold">
+                                          <p:stCondLst>
+                                            <p:cond delay="0"/>
+                                          </p:stCondLst>
+                                        </p:cTn>
+                                        <p:tgtEl>
+                                          <p:spTgt spid="9">
+                                            <p:txEl>
+                                              <p:pRg st="4" end="4"/>
+                                            </p:txEl>
+                                          </p:spTgt>
+                                        </p:tgtEl>
+                                        <p:attrNameLst>
+                                          <p:attrName>style.visibility</p:attrName>
+                                        </p:attrNameLst>
+                                      </p:cBhvr>
+                                      <p:to>
+                                        <p:strVal val="visible"/>
+                                      </p:to>
+                                    </p:set>
+                                    <p:animEffect transition="in" filter="fade">
+                                      <p:cBhvr>
+                                        <p:cTn id="16" dur="500"/>
+                                        <p:tgtEl>
+                                          <p:spTgt spid="9">
+                                            <p:txEl>
+                                              <p:pRg st="4" end="4"/>
+                                            </p:txEl>
+                                          </p:spTgt>
+                                        </p:tgtEl>
+                                      </p:cBhvr>
+                                    </p:animEffect>
+                                  </p:childTnLst>
+                                </p:cTn>
+                              </p:par>
+                              <p:par>
+                                <p:cTn id="17" presetID="10" presetClass="entr" presetSubtype="0" fill="hold" grpId="0" nodeType="withEffect">
+                                  <p:stCondLst>
+                                    <p:cond delay="0"/>
+                                  </p:stCondLst>
+                                  <p:childTnLst>
+                                    <p:set>
+                                      <p:cBhvr>
+                                        <p:cTn id="18" dur="1" fill="hold">
+                                          <p:stCondLst>
+                                            <p:cond delay="0"/>
+                                          </p:stCondLst>
+                                        </p:cTn>
+                                        <p:tgtEl>
+                                          <p:spTgt spid="9">
+                                            <p:txEl>
+                                              <p:pRg st="6" end="6"/>
+                                            </p:txEl>
+                                          </p:spTgt>
+                                        </p:tgtEl>
+                                        <p:attrNameLst>
+                                          <p:attrName>style.visibility</p:attrName>
+                                        </p:attrNameLst>
+                                      </p:cBhvr>
+                                      <p:to>
+                                        <p:strVal val="visible"/>
+                                      </p:to>
+                                    </p:set>
+                                    <p:animEffect transition="in" filter="fade">
+                                      <p:cBhvr>
+                                        <p:cTn id="19" dur="500"/>
+                                        <p:tgtEl>
+                                          <p:spTgt spid="9">
+                                            <p:txEl>
+                                              <p:pRg st="6" end="6"/>
+                                            </p:txEl>
+                                          </p:spTgt>
+                                        </p:tgtEl>
+                                      </p:cBhvr>
+                                    </p:animEffect>
+                                  </p:childTnLst>
+                                </p:cTn>
+                              </p:par>
+                            </p:childTnLst>
+                          </p:cTn>
+                        </p:par>
+                      </p:childTnLst>
+                    </p:cTn>
+                  </p:par>
+                </p:childTnLst>
+              </p:cTn>
+              <p:prevCondLst>
+                <p:cond evt="onPrev" delay="0">
+                  <p:tgtEl>
+                    <p:sldTgt/>
+                  </p:tgtEl>
+                </p:cond>
+              </p:prevCondLst>
+              <p:nextCondLst>
+                <p:cond evt="onNext" delay="0">
+                  <p:tgtEl>
+                    <p:sldTgt/>
+                  </p:tgtEl>
+                </p:cond>
+              </p:nextCondLst>
+            </p:seq>
+          </p:childTnLst>
+        </p:cTn>
+      </p:par>
+    </p:tnLst>
+    <p:bldLst>
+      <p:bldP spid="2" grpId="0"/>
+      <p:bldP spid="9" grpId="0" uiExpand="1" build="p"/>
+    </p:bldLst>
+  </p:timing>
 </p:sld>
 </file>
 

--- a/Kiszállítás és Ételrendező Rendszer.pptx
+++ b/Kiszállítás és Ételrendező Rendszer.pptx
@@ -4540,13 +4540,13 @@
   <p:clrMapOvr>
     <a:masterClrMapping/>
   </p:clrMapOvr>
-  <mc:AlternateContent xmlns:mc="http://schemas.openxmlformats.org/markup-compatibility/2006">
-    <mc:Choice xmlns:p15="http://schemas.microsoft.com/office/powerpoint/2012/main" Requires="p15">
+  <mc:AlternateContent xmlns:mc="http://schemas.openxmlformats.org/markup-compatibility/2006" xmlns:p15="http://schemas.microsoft.com/office/powerpoint/2012/main">
+    <mc:Choice Requires="p15">
       <p:transition xmlns:p14="http://schemas.microsoft.com/office/powerpoint/2010/main" spd="slow" p14:dur="2000">
         <p15:prstTrans prst="drape"/>
       </p:transition>
     </mc:Choice>
-    <mc:Fallback>
+    <mc:Fallback xmlns="">
       <p:transition spd="slow">
         <p:fade/>
       </p:transition>
@@ -6034,34 +6034,15 @@
                 </a:solidFill>
                 <a:latin typeface="Lucida Fax" panose="02060602050505020204" pitchFamily="18" charset="0"/>
               </a:rPr>
-              <a:t>Css</a:t>
+              <a:t>Github</a:t>
             </a:r>
           </a:p>
           <a:p>
-            <a:pPr>
+            <a:pPr marL="0" indent="0">
               <a:buClr>
                 <a:schemeClr val="bg1"/>
               </a:buClr>
-              <a:buFont typeface="Lucida Fax" panose="02060602050505020204" pitchFamily="18" charset="0"/>
-              <a:buChar char="»"/>
-            </a:pPr>
-            <a:r>
-              <a:rPr lang="hu-HU" dirty="0">
-                <a:solidFill>
-                  <a:schemeClr val="bg1"/>
-                </a:solidFill>
-                <a:latin typeface="Lucida Fax" panose="02060602050505020204" pitchFamily="18" charset="0"/>
-              </a:rPr>
-              <a:t>Github</a:t>
-            </a:r>
-          </a:p>
-          <a:p>
-            <a:pPr>
-              <a:buClr>
-                <a:schemeClr val="bg1"/>
-              </a:buClr>
-              <a:buFont typeface="Lucida Fax" panose="02060602050505020204" pitchFamily="18" charset="0"/>
-              <a:buChar char="»"/>
+              <a:buNone/>
             </a:pPr>
             <a:endParaRPr lang="hu-HU" dirty="0">
               <a:solidFill>
@@ -6144,26 +6125,22 @@
                 </a:solidFill>
                 <a:latin typeface="Lucida Fax" panose="02060602050505020204" pitchFamily="18" charset="0"/>
               </a:rPr>
-              <a:t>Css</a:t>
+              <a:t>PPT</a:t>
             </a:r>
           </a:p>
           <a:p>
-            <a:pPr>
+            <a:pPr marL="0" indent="0">
               <a:buClr>
                 <a:schemeClr val="bg1"/>
               </a:buClr>
-              <a:buFont typeface="Lucida Fax" panose="02060602050505020204" pitchFamily="18" charset="0"/>
-              <a:buChar char="»"/>
+              <a:buNone/>
             </a:pPr>
-            <a:r>
-              <a:rPr lang="hu-HU" dirty="0">
-                <a:solidFill>
-                  <a:schemeClr val="bg1"/>
-                </a:solidFill>
-                <a:latin typeface="Lucida Fax" panose="02060602050505020204" pitchFamily="18" charset="0"/>
-              </a:rPr>
-              <a:t>Figma</a:t>
-            </a:r>
+            <a:endParaRPr lang="hu-HU" dirty="0">
+              <a:solidFill>
+                <a:schemeClr val="bg1"/>
+              </a:solidFill>
+              <a:latin typeface="Lucida Fax" panose="02060602050505020204" pitchFamily="18" charset="0"/>
+            </a:endParaRPr>
           </a:p>
         </p:txBody>
       </p:sp>
@@ -6177,13 +6154,13 @@
   <p:clrMapOvr>
     <a:masterClrMapping/>
   </p:clrMapOvr>
-  <mc:AlternateContent xmlns:mc="http://schemas.openxmlformats.org/markup-compatibility/2006">
-    <mc:Choice xmlns:p159="http://schemas.microsoft.com/office/powerpoint/2015/09/main" Requires="p159">
+  <mc:AlternateContent xmlns:mc="http://schemas.openxmlformats.org/markup-compatibility/2006" xmlns:p159="http://schemas.microsoft.com/office/powerpoint/2015/09/main">
+    <mc:Choice Requires="p159">
       <p:transition xmlns:p14="http://schemas.microsoft.com/office/powerpoint/2010/main" spd="slow" p14:dur="2000">
         <p159:morph option="byObject"/>
       </p:transition>
     </mc:Choice>
-    <mc:Fallback>
+    <mc:Fallback xmlns="">
       <p:transition spd="slow">
         <p:fade/>
       </p:transition>
@@ -6390,9 +6367,9 @@
                                           </p:stCondLst>
                                         </p:cTn>
                                         <p:tgtEl>
-                                          <p:spTgt spid="3">
+                                          <p:spTgt spid="4">
                                             <p:txEl>
-                                              <p:pRg st="3" end="3"/>
+                                              <p:pRg st="0" end="0"/>
                                             </p:txEl>
                                           </p:spTgt>
                                         </p:tgtEl>
@@ -6408,9 +6385,9 @@
                                       <p:cBhvr>
                                         <p:cTn id="19" dur="500"/>
                                         <p:tgtEl>
-                                          <p:spTgt spid="3">
+                                          <p:spTgt spid="4">
                                             <p:txEl>
-                                              <p:pRg st="3" end="3"/>
+                                              <p:pRg st="0" end="0"/>
                                             </p:txEl>
                                           </p:spTgt>
                                         </p:tgtEl>
@@ -6435,7 +6412,7 @@
                                         <p:tgtEl>
                                           <p:spTgt spid="4">
                                             <p:txEl>
-                                              <p:pRg st="0" end="0"/>
+                                              <p:pRg st="1" end="1"/>
                                             </p:txEl>
                                           </p:spTgt>
                                         </p:tgtEl>
@@ -6453,7 +6430,7 @@
                                         <p:tgtEl>
                                           <p:spTgt spid="4">
                                             <p:txEl>
-                                              <p:pRg st="0" end="0"/>
+                                              <p:pRg st="1" end="1"/>
                                             </p:txEl>
                                           </p:spTgt>
                                         </p:tgtEl>
@@ -6478,7 +6455,7 @@
                                         <p:tgtEl>
                                           <p:spTgt spid="4">
                                             <p:txEl>
-                                              <p:pRg st="1" end="1"/>
+                                              <p:pRg st="2" end="2"/>
                                             </p:txEl>
                                           </p:spTgt>
                                         </p:tgtEl>
@@ -6496,93 +6473,7 @@
                                         <p:tgtEl>
                                           <p:spTgt spid="4">
                                             <p:txEl>
-                                              <p:pRg st="1" end="1"/>
-                                            </p:txEl>
-                                          </p:spTgt>
-                                        </p:tgtEl>
-                                      </p:cBhvr>
-                                    </p:animEffect>
-                                  </p:childTnLst>
-                                </p:cTn>
-                              </p:par>
-                              <p:par>
-                                <p:cTn id="26" presetID="10" presetClass="entr" presetSubtype="0" fill="hold" grpId="0" nodeType="withEffect">
-                                  <p:stCondLst>
-                                    <p:cond delay="0"/>
-                                  </p:stCondLst>
-                                  <p:childTnLst>
-                                    <p:set>
-                                      <p:cBhvr>
-                                        <p:cTn id="27" dur="1" fill="hold">
-                                          <p:stCondLst>
-                                            <p:cond delay="0"/>
-                                          </p:stCondLst>
-                                        </p:cTn>
-                                        <p:tgtEl>
-                                          <p:spTgt spid="4">
-                                            <p:txEl>
                                               <p:pRg st="2" end="2"/>
-                                            </p:txEl>
-                                          </p:spTgt>
-                                        </p:tgtEl>
-                                        <p:attrNameLst>
-                                          <p:attrName>style.visibility</p:attrName>
-                                        </p:attrNameLst>
-                                      </p:cBhvr>
-                                      <p:to>
-                                        <p:strVal val="visible"/>
-                                      </p:to>
-                                    </p:set>
-                                    <p:animEffect transition="in" filter="fade">
-                                      <p:cBhvr>
-                                        <p:cTn id="28" dur="500"/>
-                                        <p:tgtEl>
-                                          <p:spTgt spid="4">
-                                            <p:txEl>
-                                              <p:pRg st="2" end="2"/>
-                                            </p:txEl>
-                                          </p:spTgt>
-                                        </p:tgtEl>
-                                      </p:cBhvr>
-                                    </p:animEffect>
-                                  </p:childTnLst>
-                                </p:cTn>
-                              </p:par>
-                              <p:par>
-                                <p:cTn id="29" presetID="10" presetClass="entr" presetSubtype="0" fill="hold" grpId="0" nodeType="withEffect">
-                                  <p:stCondLst>
-                                    <p:cond delay="0"/>
-                                  </p:stCondLst>
-                                  <p:childTnLst>
-                                    <p:set>
-                                      <p:cBhvr>
-                                        <p:cTn id="30" dur="1" fill="hold">
-                                          <p:stCondLst>
-                                            <p:cond delay="0"/>
-                                          </p:stCondLst>
-                                        </p:cTn>
-                                        <p:tgtEl>
-                                          <p:spTgt spid="4">
-                                            <p:txEl>
-                                              <p:pRg st="3" end="3"/>
-                                            </p:txEl>
-                                          </p:spTgt>
-                                        </p:tgtEl>
-                                        <p:attrNameLst>
-                                          <p:attrName>style.visibility</p:attrName>
-                                        </p:attrNameLst>
-                                      </p:cBhvr>
-                                      <p:to>
-                                        <p:strVal val="visible"/>
-                                      </p:to>
-                                    </p:set>
-                                    <p:animEffect transition="in" filter="fade">
-                                      <p:cBhvr>
-                                        <p:cTn id="31" dur="500"/>
-                                        <p:tgtEl>
-                                          <p:spTgt spid="4">
-                                            <p:txEl>
-                                              <p:pRg st="3" end="3"/>
                                             </p:txEl>
                                           </p:spTgt>
                                         </p:tgtEl>
@@ -7824,11 +7715,11 @@
   <p:clrMapOvr>
     <a:masterClrMapping/>
   </p:clrMapOvr>
-  <mc:AlternateContent xmlns:mc="http://schemas.openxmlformats.org/markup-compatibility/2006">
-    <mc:Choice xmlns:p14="http://schemas.microsoft.com/office/powerpoint/2010/main" Requires="p14">
+  <mc:AlternateContent xmlns:mc="http://schemas.openxmlformats.org/markup-compatibility/2006" xmlns:p14="http://schemas.microsoft.com/office/powerpoint/2010/main">
+    <mc:Choice Requires="p14">
       <p:transition p14:dur="10" advClick="0" advTm="5000"/>
     </mc:Choice>
-    <mc:Fallback>
+    <mc:Fallback xmlns="">
       <p:transition advClick="0" advTm="5000"/>
     </mc:Fallback>
   </mc:AlternateContent>
@@ -8515,13 +8406,13 @@
   <p:clrMapOvr>
     <a:masterClrMapping/>
   </p:clrMapOvr>
-  <mc:AlternateContent xmlns:mc="http://schemas.openxmlformats.org/markup-compatibility/2006">
-    <mc:Choice xmlns:p159="http://schemas.microsoft.com/office/powerpoint/2015/09/main" Requires="p159">
+  <mc:AlternateContent xmlns:mc="http://schemas.openxmlformats.org/markup-compatibility/2006" xmlns:p159="http://schemas.microsoft.com/office/powerpoint/2015/09/main">
+    <mc:Choice Requires="p159">
       <p:transition xmlns:p14="http://schemas.microsoft.com/office/powerpoint/2010/main" spd="slow" p14:dur="2000">
         <p159:morph option="byObject"/>
       </p:transition>
     </mc:Choice>
-    <mc:Fallback>
+    <mc:Fallback xmlns="">
       <p:transition spd="slow">
         <p:fade/>
       </p:transition>
@@ -9152,13 +9043,13 @@
   <p:clrMapOvr>
     <a:masterClrMapping/>
   </p:clrMapOvr>
-  <mc:AlternateContent xmlns:mc="http://schemas.openxmlformats.org/markup-compatibility/2006">
-    <mc:Choice xmlns:p15="http://schemas.microsoft.com/office/powerpoint/2012/main" Requires="p15">
+  <mc:AlternateContent xmlns:mc="http://schemas.openxmlformats.org/markup-compatibility/2006" xmlns:p15="http://schemas.microsoft.com/office/powerpoint/2012/main">
+    <mc:Choice Requires="p15">
       <p:transition xmlns:p14="http://schemas.microsoft.com/office/powerpoint/2010/main" spd="slow" p14:dur="2000" advClick="0" advTm="1000">
         <p15:prstTrans prst="fracture"/>
       </p:transition>
     </mc:Choice>
-    <mc:Fallback>
+    <mc:Fallback xmlns="">
       <p:transition spd="slow" advClick="0" advTm="1000">
         <p:fade/>
       </p:transition>
@@ -9465,13 +9356,13 @@
   <p:clrMapOvr>
     <a:masterClrMapping/>
   </p:clrMapOvr>
-  <mc:AlternateContent xmlns:mc="http://schemas.openxmlformats.org/markup-compatibility/2006">
-    <mc:Choice xmlns:p159="http://schemas.microsoft.com/office/powerpoint/2015/09/main" Requires="p159">
+  <mc:AlternateContent xmlns:mc="http://schemas.openxmlformats.org/markup-compatibility/2006" xmlns:p159="http://schemas.microsoft.com/office/powerpoint/2015/09/main">
+    <mc:Choice Requires="p159">
       <p:transition xmlns:p14="http://schemas.microsoft.com/office/powerpoint/2010/main" spd="slow" p14:dur="2000">
         <p159:morph option="byObject"/>
       </p:transition>
     </mc:Choice>
-    <mc:Fallback>
+    <mc:Fallback xmlns="">
       <p:transition spd="slow">
         <p:fade/>
       </p:transition>
@@ -10244,13 +10135,13 @@
   <p:clrMapOvr>
     <a:masterClrMapping/>
   </p:clrMapOvr>
-  <mc:AlternateContent xmlns:mc="http://schemas.openxmlformats.org/markup-compatibility/2006">
-    <mc:Choice xmlns:p14="http://schemas.microsoft.com/office/powerpoint/2010/main" Requires="p14">
+  <mc:AlternateContent xmlns:mc="http://schemas.openxmlformats.org/markup-compatibility/2006" xmlns:p14="http://schemas.microsoft.com/office/powerpoint/2010/main">
+    <mc:Choice Requires="p14">
       <p:transition spd="slow" p14:dur="1400" advClick="0" advTm="1000">
         <p14:ripple/>
       </p:transition>
     </mc:Choice>
-    <mc:Fallback>
+    <mc:Fallback xmlns="">
       <p:transition spd="slow" advClick="0" advTm="1000">
         <p:fade/>
       </p:transition>
@@ -10573,13 +10464,13 @@
   <p:clrMapOvr>
     <a:masterClrMapping/>
   </p:clrMapOvr>
-  <mc:AlternateContent xmlns:mc="http://schemas.openxmlformats.org/markup-compatibility/2006">
-    <mc:Choice xmlns:p159="http://schemas.microsoft.com/office/powerpoint/2015/09/main" Requires="p159">
+  <mc:AlternateContent xmlns:mc="http://schemas.openxmlformats.org/markup-compatibility/2006" xmlns:p159="http://schemas.microsoft.com/office/powerpoint/2015/09/main">
+    <mc:Choice Requires="p159">
       <p:transition xmlns:p14="http://schemas.microsoft.com/office/powerpoint/2010/main" spd="slow" p14:dur="2000">
         <p159:morph option="byObject"/>
       </p:transition>
     </mc:Choice>
-    <mc:Fallback>
+    <mc:Fallback xmlns="">
       <p:transition spd="slow">
         <p:fade/>
       </p:transition>

--- a/Kiszállítás és Ételrendező Rendszer.pptx
+++ b/Kiszállítás és Ételrendező Rendszer.pptx
@@ -1189,7 +1189,7 @@
           <a:p>
             <a:fld id="{B1DEA063-3AA9-4E46-8E09-26CB67C754C8}" type="datetimeFigureOut">
               <a:rPr lang="hu-HU" smtClean="0"/>
-              <a:t>2026. 10. 11.</a:t>
+              <a:t>2026. 10. 12.</a:t>
             </a:fld>
             <a:endParaRPr lang="hu-HU"/>
           </a:p>
@@ -1387,7 +1387,7 @@
           <a:p>
             <a:fld id="{B1DEA063-3AA9-4E46-8E09-26CB67C754C8}" type="datetimeFigureOut">
               <a:rPr lang="hu-HU" smtClean="0"/>
-              <a:t>2026. 10. 11.</a:t>
+              <a:t>2026. 10. 12.</a:t>
             </a:fld>
             <a:endParaRPr lang="hu-HU"/>
           </a:p>
@@ -1595,7 +1595,7 @@
           <a:p>
             <a:fld id="{B1DEA063-3AA9-4E46-8E09-26CB67C754C8}" type="datetimeFigureOut">
               <a:rPr lang="hu-HU" smtClean="0"/>
-              <a:t>2026. 10. 11.</a:t>
+              <a:t>2026. 10. 12.</a:t>
             </a:fld>
             <a:endParaRPr lang="hu-HU"/>
           </a:p>
@@ -1793,7 +1793,7 @@
           <a:p>
             <a:fld id="{B1DEA063-3AA9-4E46-8E09-26CB67C754C8}" type="datetimeFigureOut">
               <a:rPr lang="hu-HU" smtClean="0"/>
-              <a:t>2026. 10. 11.</a:t>
+              <a:t>2026. 10. 12.</a:t>
             </a:fld>
             <a:endParaRPr lang="hu-HU"/>
           </a:p>
@@ -2068,7 +2068,7 @@
           <a:p>
             <a:fld id="{B1DEA063-3AA9-4E46-8E09-26CB67C754C8}" type="datetimeFigureOut">
               <a:rPr lang="hu-HU" smtClean="0"/>
-              <a:t>2026. 10. 11.</a:t>
+              <a:t>2026. 10. 12.</a:t>
             </a:fld>
             <a:endParaRPr lang="hu-HU"/>
           </a:p>
@@ -2333,7 +2333,7 @@
           <a:p>
             <a:fld id="{B1DEA063-3AA9-4E46-8E09-26CB67C754C8}" type="datetimeFigureOut">
               <a:rPr lang="hu-HU" smtClean="0"/>
-              <a:t>2026. 10. 11.</a:t>
+              <a:t>2026. 10. 12.</a:t>
             </a:fld>
             <a:endParaRPr lang="hu-HU"/>
           </a:p>
@@ -2745,7 +2745,7 @@
           <a:p>
             <a:fld id="{B1DEA063-3AA9-4E46-8E09-26CB67C754C8}" type="datetimeFigureOut">
               <a:rPr lang="hu-HU" smtClean="0"/>
-              <a:t>2026. 10. 11.</a:t>
+              <a:t>2026. 10. 12.</a:t>
             </a:fld>
             <a:endParaRPr lang="hu-HU"/>
           </a:p>
@@ -2886,7 +2886,7 @@
           <a:p>
             <a:fld id="{B1DEA063-3AA9-4E46-8E09-26CB67C754C8}" type="datetimeFigureOut">
               <a:rPr lang="hu-HU" smtClean="0"/>
-              <a:t>2026. 10. 11.</a:t>
+              <a:t>2026. 10. 12.</a:t>
             </a:fld>
             <a:endParaRPr lang="hu-HU"/>
           </a:p>
@@ -2999,7 +2999,7 @@
           <a:p>
             <a:fld id="{B1DEA063-3AA9-4E46-8E09-26CB67C754C8}" type="datetimeFigureOut">
               <a:rPr lang="hu-HU" smtClean="0"/>
-              <a:t>2026. 10. 11.</a:t>
+              <a:t>2026. 10. 12.</a:t>
             </a:fld>
             <a:endParaRPr lang="hu-HU"/>
           </a:p>
@@ -3310,7 +3310,7 @@
           <a:p>
             <a:fld id="{B1DEA063-3AA9-4E46-8E09-26CB67C754C8}" type="datetimeFigureOut">
               <a:rPr lang="hu-HU" smtClean="0"/>
-              <a:t>2026. 10. 11.</a:t>
+              <a:t>2026. 10. 12.</a:t>
             </a:fld>
             <a:endParaRPr lang="hu-HU"/>
           </a:p>
@@ -3598,7 +3598,7 @@
           <a:p>
             <a:fld id="{B1DEA063-3AA9-4E46-8E09-26CB67C754C8}" type="datetimeFigureOut">
               <a:rPr lang="hu-HU" smtClean="0"/>
-              <a:t>2026. 10. 11.</a:t>
+              <a:t>2026. 10. 12.</a:t>
             </a:fld>
             <a:endParaRPr lang="hu-HU"/>
           </a:p>
@@ -3839,7 +3839,7 @@
           <a:p>
             <a:fld id="{B1DEA063-3AA9-4E46-8E09-26CB67C754C8}" type="datetimeFigureOut">
               <a:rPr lang="hu-HU" smtClean="0"/>
-              <a:t>2026. 10. 11.</a:t>
+              <a:t>2026. 10. 12.</a:t>
             </a:fld>
             <a:endParaRPr lang="hu-HU"/>
           </a:p>
@@ -6990,10 +6990,10 @@
       </p:sp>
       <p:grpSp>
         <p:nvGrpSpPr>
-          <p:cNvPr id="20" name="Group 19">
+          <p:cNvPr id="6" name="Group 5">
             <a:extLst>
               <a:ext uri="{FF2B5EF4-FFF2-40B4-BE49-F238E27FC236}">
-                <a16:creationId xmlns:a16="http://schemas.microsoft.com/office/drawing/2014/main" id="{A1A9A7C1-554E-4273-CCEF-048AE414D53F}"/>
+                <a16:creationId xmlns:a16="http://schemas.microsoft.com/office/drawing/2014/main" id="{2B036BB1-2F2E-77D7-3208-2917D2C3596F}"/>
               </a:ext>
             </a:extLst>
           </p:cNvPr>
@@ -7165,10 +7165,10 @@
         </p:grpSp>
         <p:sp>
           <p:nvSpPr>
-            <p:cNvPr id="18" name="Tartalom helye 2">
+            <p:cNvPr id="4" name="Tartalom helye 2">
               <a:extLst>
                 <a:ext uri="{FF2B5EF4-FFF2-40B4-BE49-F238E27FC236}">
-                  <a16:creationId xmlns:a16="http://schemas.microsoft.com/office/drawing/2014/main" id="{620062D1-F581-B8B8-B7CC-E0360227D72F}"/>
+                  <a16:creationId xmlns:a16="http://schemas.microsoft.com/office/drawing/2014/main" id="{5F2D2841-0FBB-B888-E90C-BB8F19A34069}"/>
                 </a:ext>
               </a:extLst>
             </p:cNvPr>
@@ -7358,7 +7358,7 @@
                 <a:buNone/>
               </a:pPr>
               <a:r>
-                <a:rPr lang="hu-HU">
+                <a:rPr lang="hu-HU" dirty="0">
                   <a:solidFill>
                     <a:schemeClr val="bg1"/>
                   </a:solidFill>
@@ -7376,7 +7376,7 @@
                 <a:buChar char="»"/>
               </a:pPr>
               <a:r>
-                <a:rPr lang="hu-HU">
+                <a:rPr lang="hu-HU" dirty="0">
                   <a:solidFill>
                     <a:schemeClr val="bg1"/>
                   </a:solidFill>
@@ -7394,25 +7394,7 @@
                 <a:buChar char="»"/>
               </a:pPr>
               <a:r>
-                <a:rPr lang="hu-HU">
-                  <a:solidFill>
-                    <a:schemeClr val="bg1"/>
-                  </a:solidFill>
-                  <a:latin typeface="Lucida Fax" panose="02060602050505020204" pitchFamily="18" charset="0"/>
-                </a:rPr>
-                <a:t>Css</a:t>
-              </a:r>
-            </a:p>
-            <a:p>
-              <a:pPr>
-                <a:buClr>
-                  <a:schemeClr val="bg1"/>
-                </a:buClr>
-                <a:buFont typeface="Lucida Fax" panose="02060602050505020204" pitchFamily="18" charset="0"/>
-                <a:buChar char="»"/>
-              </a:pPr>
-              <a:r>
-                <a:rPr lang="hu-HU">
+                <a:rPr lang="hu-HU" dirty="0">
                   <a:solidFill>
                     <a:schemeClr val="bg1"/>
                   </a:solidFill>
@@ -7422,12 +7404,12 @@
               </a:r>
             </a:p>
             <a:p>
-              <a:pPr>
+              <a:pPr marL="0" indent="0">
                 <a:buClr>
                   <a:schemeClr val="bg1"/>
                 </a:buClr>
-                <a:buFont typeface="Lucida Fax" panose="02060602050505020204" pitchFamily="18" charset="0"/>
-                <a:buChar char="»"/>
+                <a:buFont typeface="Arial" panose="020B0604020202020204" pitchFamily="34" charset="0"/>
+                <a:buNone/>
               </a:pPr>
               <a:endParaRPr lang="hu-HU" dirty="0">
                 <a:solidFill>
@@ -7440,10 +7422,10 @@
         </p:sp>
         <p:sp>
           <p:nvSpPr>
-            <p:cNvPr id="19" name="Tartalom helye 3">
+            <p:cNvPr id="5" name="Tartalom helye 3">
               <a:extLst>
                 <a:ext uri="{FF2B5EF4-FFF2-40B4-BE49-F238E27FC236}">
-                  <a16:creationId xmlns:a16="http://schemas.microsoft.com/office/drawing/2014/main" id="{094E7BAD-5D9B-A47B-6214-0C524779B1C6}"/>
+                  <a16:creationId xmlns:a16="http://schemas.microsoft.com/office/drawing/2014/main" id="{D7951B3B-E57F-CF9E-86BF-11B5A6FB5A2F}"/>
                 </a:ext>
               </a:extLst>
             </p:cNvPr>
@@ -7675,26 +7657,17 @@
                   </a:solidFill>
                   <a:latin typeface="Lucida Fax" panose="02060602050505020204" pitchFamily="18" charset="0"/>
                 </a:rPr>
-                <a:t>Css</a:t>
+                <a:t>PPT</a:t>
               </a:r>
             </a:p>
             <a:p>
-              <a:pPr>
+              <a:pPr marL="0" indent="0">
                 <a:buClr>
                   <a:schemeClr val="bg1"/>
                 </a:buClr>
-                <a:buFont typeface="Lucida Fax" panose="02060602050505020204" pitchFamily="18" charset="0"/>
-                <a:buChar char="»"/>
+                <a:buFont typeface="Arial" panose="020B0604020202020204" pitchFamily="34" charset="0"/>
+                <a:buNone/>
               </a:pPr>
-              <a:r>
-                <a:rPr lang="hu-HU">
-                  <a:solidFill>
-                    <a:schemeClr val="bg1"/>
-                  </a:solidFill>
-                  <a:latin typeface="Lucida Fax" panose="02060602050505020204" pitchFamily="18" charset="0"/>
-                </a:rPr>
-                <a:t>Figma</a:t>
-              </a:r>
               <a:endParaRPr lang="hu-HU" dirty="0">
                 <a:solidFill>
                   <a:schemeClr val="bg1"/>
@@ -7756,7 +7729,7 @@
                                       <p:cBhvr>
                                         <p:cTn id="6" dur="1000"/>
                                         <p:tgtEl>
-                                          <p:spTgt spid="20"/>
+                                          <p:spTgt spid="6"/>
                                         </p:tgtEl>
                                         <p:attrNameLst>
                                           <p:attrName>ppt_w</p:attrName>
@@ -7779,7 +7752,7 @@
                                       <p:cBhvr>
                                         <p:cTn id="7" dur="1000"/>
                                         <p:tgtEl>
-                                          <p:spTgt spid="20"/>
+                                          <p:spTgt spid="6"/>
                                         </p:tgtEl>
                                         <p:attrNameLst>
                                           <p:attrName>ppt_h</p:attrName>
@@ -7802,7 +7775,7 @@
                                       <p:cBhvr>
                                         <p:cTn id="8" dur="1000"/>
                                         <p:tgtEl>
-                                          <p:spTgt spid="20"/>
+                                          <p:spTgt spid="6"/>
                                         </p:tgtEl>
                                         <p:attrNameLst>
                                           <p:attrName>style.rotation</p:attrName>
@@ -7825,7 +7798,7 @@
                                       <p:cBhvr>
                                         <p:cTn id="9" dur="1000"/>
                                         <p:tgtEl>
-                                          <p:spTgt spid="20"/>
+                                          <p:spTgt spid="6"/>
                                         </p:tgtEl>
                                       </p:cBhvr>
                                     </p:animEffect>
@@ -7837,7 +7810,7 @@
                                           </p:stCondLst>
                                         </p:cTn>
                                         <p:tgtEl>
-                                          <p:spTgt spid="20"/>
+                                          <p:spTgt spid="6"/>
                                         </p:tgtEl>
                                         <p:attrNameLst>
                                           <p:attrName>style.visibility</p:attrName>
@@ -10450,6 +10423,47 @@
                 <a:latin typeface="Lucida Fax" panose="02060602050505020204" pitchFamily="18" charset="0"/>
               </a:rPr>
               <a:t>Youtube</a:t>
+            </a:r>
+          </a:p>
+        </p:txBody>
+      </p:sp>
+      <p:sp>
+        <p:nvSpPr>
+          <p:cNvPr id="3" name="TextBox 2">
+            <a:extLst>
+              <a:ext uri="{FF2B5EF4-FFF2-40B4-BE49-F238E27FC236}">
+                <a16:creationId xmlns:a16="http://schemas.microsoft.com/office/drawing/2014/main" id="{6B05724E-87CB-5A42-28B5-334D5C32CF73}"/>
+              </a:ext>
+            </a:extLst>
+          </p:cNvPr>
+          <p:cNvSpPr txBox="1"/>
+          <p:nvPr/>
+        </p:nvSpPr>
+        <p:spPr>
+          <a:xfrm>
+            <a:off x="4383729" y="1357995"/>
+            <a:ext cx="4065917" cy="369332"/>
+          </a:xfrm>
+          <a:prstGeom prst="rect">
+            <a:avLst/>
+          </a:prstGeom>
+          <a:noFill/>
+        </p:spPr>
+        <p:txBody>
+          <a:bodyPr wrap="square" rtlCol="0">
+            <a:spAutoFit/>
+          </a:bodyPr>
+          <a:lstStyle/>
+          <a:p>
+            <a:r>
+              <a:rPr lang="hu-HU" dirty="0">
+                <a:solidFill>
+                  <a:schemeClr val="tx1">
+                    <a:alpha val="0"/>
+                  </a:schemeClr>
+                </a:solidFill>
+              </a:rPr>
+              <a:t>Figma map icon: Viktor ötlete volt</a:t>
             </a:r>
           </a:p>
         </p:txBody>
